--- a/Chicago_Safety_Relocation.pptx
+++ b/Chicago_Safety_Relocation.pptx
@@ -4,9 +4,6 @@
   <p:sldMasterIdLst>
     <p:sldMasterId id="2147483648" r:id="rId1"/>
   </p:sldMasterIdLst>
-  <p:notesMasterIdLst>
-    <p:notesMasterId r:id="rId15"/>
-  </p:notesMasterIdLst>
   <p:sldIdLst>
     <p:sldId id="256" r:id="rId2"/>
     <p:sldId id="257" r:id="rId3"/>
@@ -21,8 +18,13 @@
     <p:sldId id="266" r:id="rId12"/>
     <p:sldId id="267" r:id="rId13"/>
     <p:sldId id="268" r:id="rId14"/>
+    <p:sldId id="269" r:id="rId15"/>
+    <p:sldId id="270" r:id="rId16"/>
   </p:sldIdLst>
-  <p:sldSz cx="9144000" cy="5143500" type="screen16x9"/>
+  <p:notesMasterIdLst>
+    <p:notesMasterId r:id="rId17"/>
+  </p:notesMasterIdLst>
+  <p:sldSz cx="9144000" cy="5143500"/>
   <p:notesSz cx="5143500" cy="9144000"/>
   <p:defaultTextStyle>
     <a:lvl1pPr marL="0" algn="l" defTabSz="914400" rtl="0" eaLnBrk="1" latinLnBrk="0" hangingPunct="1">
@@ -116,401 +118,13 @@
       </a:defRPr>
     </a:lvl9pPr>
   </p:defaultTextStyle>
-  <p:extLst>
-    <p:ext uri="{EFAFB233-063F-42B5-8137-9DF3F51BA10A}">
-      <p15:sldGuideLst xmlns:p15="http://schemas.microsoft.com/office/powerpoint/2012/main"/>
-    </p:ext>
-  </p:extLst>
 </p:presentation>
 </file>
 
-<file path=ppt/changesInfos/changesInfo1.xml><?xml version="1.0" encoding="utf-8"?>
-<pc:chgInfo xmlns:a="http://schemas.openxmlformats.org/drawingml/2006/main" xmlns:r="http://schemas.openxmlformats.org/officeDocument/2006/relationships" xmlns:ac="http://schemas.microsoft.com/office/drawing/2013/main/command" xmlns:pc="http://schemas.microsoft.com/office/powerpoint/2013/main/command">
-  <pc:docChgLst>
-    <pc:chgData name="Victoria Nguyen" userId="164d4bea6cd7b82e" providerId="LiveId" clId="{CD2AE2A6-83EE-4C2C-9D53-44CF7BCD11CE}"/>
-    <pc:docChg chg="custSel modSld">
-      <pc:chgData name="Victoria Nguyen" userId="164d4bea6cd7b82e" providerId="LiveId" clId="{CD2AE2A6-83EE-4C2C-9D53-44CF7BCD11CE}" dt="2026-06-16T22:26:19.072" v="15" actId="5793"/>
-      <pc:docMkLst>
-        <pc:docMk/>
-      </pc:docMkLst>
-      <pc:sldChg chg="delSp modSp mod">
-        <pc:chgData name="Victoria Nguyen" userId="164d4bea6cd7b82e" providerId="LiveId" clId="{CD2AE2A6-83EE-4C2C-9D53-44CF7BCD11CE}" dt="2026-06-16T22:25:33.526" v="1" actId="478"/>
-        <pc:sldMkLst>
-          <pc:docMk/>
-          <pc:sldMk cId="0" sldId="259"/>
-        </pc:sldMkLst>
-        <pc:spChg chg="del">
-          <ac:chgData name="Victoria Nguyen" userId="164d4bea6cd7b82e" providerId="LiveId" clId="{CD2AE2A6-83EE-4C2C-9D53-44CF7BCD11CE}" dt="2026-06-16T22:25:33.526" v="1" actId="478"/>
-          <ac:spMkLst>
-            <pc:docMk/>
-            <pc:sldMk cId="0" sldId="259"/>
-            <ac:spMk id="18" creationId="{00000000-0000-0000-0000-000000000000}"/>
-          </ac:spMkLst>
-        </pc:spChg>
-        <pc:spChg chg="mod">
-          <ac:chgData name="Victoria Nguyen" userId="164d4bea6cd7b82e" providerId="LiveId" clId="{CD2AE2A6-83EE-4C2C-9D53-44CF7BCD11CE}" dt="2026-06-16T22:25:30.702" v="0" actId="20577"/>
-          <ac:spMkLst>
-            <pc:docMk/>
-            <pc:sldMk cId="0" sldId="259"/>
-            <ac:spMk id="19" creationId="{00000000-0000-0000-0000-000000000000}"/>
-          </ac:spMkLst>
-        </pc:spChg>
-      </pc:sldChg>
-      <pc:sldChg chg="modSp mod">
-        <pc:chgData name="Victoria Nguyen" userId="164d4bea6cd7b82e" providerId="LiveId" clId="{CD2AE2A6-83EE-4C2C-9D53-44CF7BCD11CE}" dt="2026-06-16T22:26:19.072" v="15" actId="5793"/>
-        <pc:sldMkLst>
-          <pc:docMk/>
-          <pc:sldMk cId="0" sldId="260"/>
-        </pc:sldMkLst>
-        <pc:spChg chg="mod">
-          <ac:chgData name="Victoria Nguyen" userId="164d4bea6cd7b82e" providerId="LiveId" clId="{CD2AE2A6-83EE-4C2C-9D53-44CF7BCD11CE}" dt="2026-06-16T22:26:09.984" v="2" actId="20577"/>
-          <ac:spMkLst>
-            <pc:docMk/>
-            <pc:sldMk cId="0" sldId="260"/>
-            <ac:spMk id="14" creationId="{00000000-0000-0000-0000-000000000000}"/>
-          </ac:spMkLst>
-        </pc:spChg>
-        <pc:spChg chg="mod">
-          <ac:chgData name="Victoria Nguyen" userId="164d4bea6cd7b82e" providerId="LiveId" clId="{CD2AE2A6-83EE-4C2C-9D53-44CF7BCD11CE}" dt="2026-06-16T22:26:19.072" v="15" actId="5793"/>
-          <ac:spMkLst>
-            <pc:docMk/>
-            <pc:sldMk cId="0" sldId="260"/>
-            <ac:spMk id="20" creationId="{00000000-0000-0000-0000-000000000000}"/>
-          </ac:spMkLst>
-        </pc:spChg>
-      </pc:sldChg>
-    </pc:docChg>
-  </pc:docChgLst>
-</pc:chgInfo>
-</file>
-
 <file path=ppt/charts/chart1.xml><?xml version="1.0" encoding="utf-8"?>
-<c:chartSpace xmlns:c="http://schemas.openxmlformats.org/drawingml/2006/chart" xmlns:a="http://schemas.openxmlformats.org/drawingml/2006/main" xmlns:r="http://schemas.openxmlformats.org/officeDocument/2006/relationships" xmlns:c16r2="http://schemas.microsoft.com/office/drawing/2015/06/chart">
+<c:chartSpace xmlns:c="http://schemas.openxmlformats.org/drawingml/2006/chart" xmlns:a="http://schemas.openxmlformats.org/drawingml/2006/main" xmlns:r="http://schemas.openxmlformats.org/officeDocument/2006/relationships">
   <c:date1904 val="0"/>
-  <c:lang val="en-US"/>
   <c:roundedCorners val="1"/>
-  <c:style val="2"/>
-  <c:chart>
-    <c:autoTitleDeleted val="1"/>
-    <c:plotArea>
-      <c:layout/>
-      <c:barChart>
-        <c:barDir val="bar"/>
-        <c:grouping val="clustered"/>
-        <c:varyColors val="0"/>
-        <c:ser>
-          <c:idx val="0"/>
-          <c:order val="0"/>
-          <c:tx>
-            <c:strRef>
-              <c:f>Sheet1!$B$1</c:f>
-              <c:strCache>
-                <c:ptCount val="1"/>
-                <c:pt idx="0">
-                  <c:v>Violent/mo</c:v>
-                </c:pt>
-              </c:strCache>
-            </c:strRef>
-          </c:tx>
-          <c:spPr>
-            <a:solidFill>
-              <a:srgbClr val="2D5BA8"/>
-            </a:solidFill>
-            <a:effectLst/>
-          </c:spPr>
-          <c:invertIfNegative val="0"/>
-          <c:cat>
-            <c:strRef>
-              <c:f>Sheet1!$A$2:$A$23</c:f>
-              <c:strCache>
-                <c:ptCount val="22"/>
-                <c:pt idx="0">
-                  <c:v>D20</c:v>
-                </c:pt>
-                <c:pt idx="1">
-                  <c:v>D14</c:v>
-                </c:pt>
-                <c:pt idx="2">
-                  <c:v>D17</c:v>
-                </c:pt>
-                <c:pt idx="3">
-                  <c:v>D16</c:v>
-                </c:pt>
-                <c:pt idx="4">
-                  <c:v>D24</c:v>
-                </c:pt>
-                <c:pt idx="5">
-                  <c:v>D22</c:v>
-                </c:pt>
-                <c:pt idx="6">
-                  <c:v>D19</c:v>
-                </c:pt>
-                <c:pt idx="7">
-                  <c:v>D18</c:v>
-                </c:pt>
-                <c:pt idx="8">
-                  <c:v>D15</c:v>
-                </c:pt>
-                <c:pt idx="9">
-                  <c:v>D1</c:v>
-                </c:pt>
-                <c:pt idx="10">
-                  <c:v>D5</c:v>
-                </c:pt>
-                <c:pt idx="11">
-                  <c:v>D10</c:v>
-                </c:pt>
-                <c:pt idx="12">
-                  <c:v>D25</c:v>
-                </c:pt>
-                <c:pt idx="13">
-                  <c:v>D9</c:v>
-                </c:pt>
-                <c:pt idx="14">
-                  <c:v>D2</c:v>
-                </c:pt>
-                <c:pt idx="15">
-                  <c:v>D12</c:v>
-                </c:pt>
-                <c:pt idx="16">
-                  <c:v>D7</c:v>
-                </c:pt>
-                <c:pt idx="17">
-                  <c:v>D4</c:v>
-                </c:pt>
-                <c:pt idx="18">
-                  <c:v>D11</c:v>
-                </c:pt>
-                <c:pt idx="19">
-                  <c:v>D3</c:v>
-                </c:pt>
-                <c:pt idx="20">
-                  <c:v>D6</c:v>
-                </c:pt>
-                <c:pt idx="21">
-                  <c:v>D8</c:v>
-                </c:pt>
-              </c:strCache>
-            </c:strRef>
-          </c:cat>
-          <c:val>
-            <c:numRef>
-              <c:f>Sheet1!$B$2:$B$23</c:f>
-              <c:numCache>
-                <c:formatCode>General</c:formatCode>
-                <c:ptCount val="22"/>
-                <c:pt idx="0">
-                  <c:v>128.6</c:v>
-                </c:pt>
-                <c:pt idx="1">
-                  <c:v>169.2</c:v>
-                </c:pt>
-                <c:pt idx="2">
-                  <c:v>173.5</c:v>
-                </c:pt>
-                <c:pt idx="3">
-                  <c:v>191.7</c:v>
-                </c:pt>
-                <c:pt idx="4">
-                  <c:v>213</c:v>
-                </c:pt>
-                <c:pt idx="5">
-                  <c:v>213.2</c:v>
-                </c:pt>
-                <c:pt idx="6">
-                  <c:v>252.9</c:v>
-                </c:pt>
-                <c:pt idx="7">
-                  <c:v>268.7</c:v>
-                </c:pt>
-                <c:pt idx="8">
-                  <c:v>294</c:v>
-                </c:pt>
-                <c:pt idx="9">
-                  <c:v>294.5</c:v>
-                </c:pt>
-                <c:pt idx="10">
-                  <c:v>302.89999999999998</c:v>
-                </c:pt>
-                <c:pt idx="11">
-                  <c:v>342.9</c:v>
-                </c:pt>
-                <c:pt idx="12">
-                  <c:v>352.9</c:v>
-                </c:pt>
-                <c:pt idx="13">
-                  <c:v>354.4</c:v>
-                </c:pt>
-                <c:pt idx="14">
-                  <c:v>357.7</c:v>
-                </c:pt>
-                <c:pt idx="15">
-                  <c:v>364.5</c:v>
-                </c:pt>
-                <c:pt idx="16">
-                  <c:v>385.8</c:v>
-                </c:pt>
-                <c:pt idx="17">
-                  <c:v>424.3</c:v>
-                </c:pt>
-                <c:pt idx="18">
-                  <c:v>431</c:v>
-                </c:pt>
-                <c:pt idx="19">
-                  <c:v>452</c:v>
-                </c:pt>
-                <c:pt idx="20">
-                  <c:v>454.8</c:v>
-                </c:pt>
-                <c:pt idx="21">
-                  <c:v>456</c:v>
-                </c:pt>
-              </c:numCache>
-            </c:numRef>
-          </c:val>
-          <c:extLst>
-            <c:ext xmlns:c16="http://schemas.microsoft.com/office/drawing/2014/chart" uri="{C3380CC4-5D6E-409C-BE32-E72D297353CC}">
-              <c16:uniqueId val="{00000000-FD64-4164-BA54-45F678651B2E}"/>
-            </c:ext>
-          </c:extLst>
-        </c:ser>
-        <c:dLbls>
-          <c:showLegendKey val="0"/>
-          <c:showVal val="0"/>
-          <c:showCatName val="0"/>
-          <c:showSerName val="0"/>
-          <c:showPercent val="0"/>
-          <c:showBubbleSize val="0"/>
-        </c:dLbls>
-        <c:gapWidth val="35"/>
-        <c:axId val="2094734554"/>
-        <c:axId val="2094734552"/>
-      </c:barChart>
-      <c:catAx>
-        <c:axId val="2094734554"/>
-        <c:scaling>
-          <c:orientation val="minMax"/>
-        </c:scaling>
-        <c:delete val="0"/>
-        <c:axPos val="l"/>
-        <c:numFmt formatCode="General" sourceLinked="1"/>
-        <c:majorTickMark val="out"/>
-        <c:minorTickMark val="none"/>
-        <c:tickLblPos val="nextTo"/>
-        <c:spPr>
-          <a:ln w="12700" cap="flat">
-            <a:solidFill>
-              <a:srgbClr val="888888"/>
-            </a:solidFill>
-            <a:prstDash val="solid"/>
-            <a:round/>
-          </a:ln>
-        </c:spPr>
-        <c:txPr>
-          <a:bodyPr/>
-          <a:lstStyle/>
-          <a:p>
-            <a:pPr>
-              <a:defRPr sz="800" b="0" i="0" u="none" strike="noStrike">
-                <a:solidFill>
-                  <a:srgbClr val="6B7585"/>
-                </a:solidFill>
-                <a:latin typeface="Calibri"/>
-              </a:defRPr>
-            </a:pPr>
-            <a:endParaRPr lang="en-US"/>
-          </a:p>
-        </c:txPr>
-        <c:crossAx val="2094734552"/>
-        <c:crosses val="autoZero"/>
-        <c:auto val="1"/>
-        <c:lblAlgn val="ctr"/>
-        <c:lblOffset val="100"/>
-        <c:noMultiLvlLbl val="1"/>
-      </c:catAx>
-      <c:valAx>
-        <c:axId val="2094734552"/>
-        <c:scaling>
-          <c:orientation val="minMax"/>
-        </c:scaling>
-        <c:delete val="0"/>
-        <c:axPos val="b"/>
-        <c:majorGridlines>
-          <c:spPr>
-            <a:ln w="6350" cap="flat">
-              <a:solidFill>
-                <a:srgbClr val="EEF1F5"/>
-              </a:solidFill>
-              <a:prstDash val="solid"/>
-              <a:round/>
-            </a:ln>
-          </c:spPr>
-        </c:majorGridlines>
-        <c:numFmt formatCode="General" sourceLinked="0"/>
-        <c:majorTickMark val="out"/>
-        <c:minorTickMark val="none"/>
-        <c:tickLblPos val="low"/>
-        <c:spPr>
-          <a:ln w="12700" cap="flat">
-            <a:solidFill>
-              <a:srgbClr val="888888"/>
-            </a:solidFill>
-            <a:prstDash val="solid"/>
-            <a:round/>
-          </a:ln>
-        </c:spPr>
-        <c:txPr>
-          <a:bodyPr/>
-          <a:lstStyle/>
-          <a:p>
-            <a:pPr>
-              <a:defRPr sz="900" b="0" i="0" u="none" strike="noStrike">
-                <a:solidFill>
-                  <a:srgbClr val="6B7585"/>
-                </a:solidFill>
-                <a:latin typeface="Arial"/>
-              </a:defRPr>
-            </a:pPr>
-            <a:endParaRPr lang="en-US"/>
-          </a:p>
-        </c:txPr>
-        <c:crossAx val="2094734554"/>
-        <c:crosses val="autoZero"/>
-        <c:crossBetween val="between"/>
-      </c:valAx>
-      <c:spPr>
-        <a:noFill/>
-        <a:ln>
-          <a:noFill/>
-        </a:ln>
-        <a:effectLst/>
-      </c:spPr>
-    </c:plotArea>
-    <c:plotVisOnly val="1"/>
-    <c:dispBlanksAs val="span"/>
-    <c:showDLblsOverMax val="1"/>
-  </c:chart>
-  <c:spPr>
-    <a:solidFill>
-      <a:srgbClr val="FFFFFF"/>
-    </a:solidFill>
-    <a:ln>
-      <a:noFill/>
-    </a:ln>
-    <a:effectLst/>
-  </c:spPr>
-  <c:externalData r:id="rId1">
-    <c:autoUpdate val="0"/>
-  </c:externalData>
-</c:chartSpace>
-</file>
-
-<file path=ppt/charts/chart2.xml><?xml version="1.0" encoding="utf-8"?>
-<c:chartSpace xmlns:c="http://schemas.openxmlformats.org/drawingml/2006/chart" xmlns:a="http://schemas.openxmlformats.org/drawingml/2006/main" xmlns:r="http://schemas.openxmlformats.org/officeDocument/2006/relationships" xmlns:c16r2="http://schemas.microsoft.com/office/drawing/2015/06/chart">
-  <c:date1904 val="0"/>
-  <c:lang val="en-US"/>
-  <c:roundedCorners val="1"/>
-  <c:style val="2"/>
   <c:chart>
     <c:autoTitleDeleted val="1"/>
     <c:plotArea>
@@ -542,26 +156,18 @@
           <c:invertIfNegative val="0"/>
           <c:dLbls>
             <c:numFmt formatCode="#,##0" sourceLinked="0"/>
-            <c:spPr>
-              <a:noFill/>
-              <a:ln>
-                <a:noFill/>
-              </a:ln>
-              <a:effectLst/>
-            </c:spPr>
             <c:txPr>
               <a:bodyPr/>
               <a:lstStyle/>
               <a:p>
                 <a:pPr>
-                  <a:defRPr sz="1300" b="1" i="0" u="none" strike="noStrike">
+                  <a:defRPr b="1" i="0" strike="noStrike" sz="1300" u="none">
                     <a:solidFill>
                       <a:srgbClr val="1A2230"/>
                     </a:solidFill>
                     <a:latin typeface="Arial"/>
                   </a:defRPr>
                 </a:pPr>
-                <a:endParaRPr lang="en-US"/>
               </a:p>
             </c:txPr>
             <c:showLegendKey val="0"/>
@@ -571,25 +177,22 @@
             <c:showPercent val="0"/>
             <c:showBubbleSize val="0"/>
             <c:showLeaderLines val="0"/>
-            <c:extLst>
-              <c:ext xmlns:c15="http://schemas.microsoft.com/office/drawing/2012/chart" uri="{CE6537A1-D6FC-4f65-9D91-7224C49458BB}">
-                <c15:showLeaderLines val="0"/>
-              </c:ext>
-            </c:extLst>
           </c:dLbls>
           <c:cat>
-            <c:strRef>
+            <c:multiLvlStrRef>
               <c:f>Sheet1!$A$2:$A$3</c:f>
-              <c:strCache>
+              <c:multiLvlStrCache>
                 <c:ptCount val="2"/>
-                <c:pt idx="0">
-                  <c:v>Edgewater (D20)</c:v>
-                </c:pt>
-                <c:pt idx="1">
-                  <c:v>The Loop (D1)</c:v>
-                </c:pt>
-              </c:strCache>
-            </c:strRef>
+                <c:lvl>
+                  <c:pt idx="0">
+                    <c:v>Edgewater (D20)</c:v>
+                  </c:pt>
+                  <c:pt idx="1">
+                    <c:v>The Loop (D1)</c:v>
+                  </c:pt>
+                </c:lvl>
+              </c:multiLvlStrCache>
+            </c:multiLvlStrRef>
           </c:cat>
           <c:val>
             <c:numRef>
@@ -606,23 +209,36 @@
               </c:numCache>
             </c:numRef>
           </c:val>
-          <c:extLst>
-            <c:ext xmlns:c16="http://schemas.microsoft.com/office/drawing/2014/chart" uri="{C3380CC4-5D6E-409C-BE32-E72D297353CC}">
-              <c16:uniqueId val="{00000000-5A64-4179-B1A8-3C1F2C4D7ECF}"/>
-            </c:ext>
-          </c:extLst>
         </c:ser>
         <c:dLbls>
+          <c:numFmt formatCode="#,##0" sourceLinked="0"/>
+          <c:txPr>
+            <a:bodyPr/>
+            <a:lstStyle/>
+            <a:p>
+              <a:pPr>
+                <a:defRPr b="1" i="0" strike="noStrike" sz="1300" u="none">
+                  <a:solidFill>
+                    <a:srgbClr val="1A2230"/>
+                  </a:solidFill>
+                  <a:latin typeface="Arial"/>
+                </a:defRPr>
+              </a:pPr>
+            </a:p>
+          </c:txPr>
           <c:showLegendKey val="0"/>
           <c:showVal val="1"/>
           <c:showCatName val="0"/>
           <c:showSerName val="0"/>
           <c:showPercent val="0"/>
           <c:showBubbleSize val="0"/>
+          <c:showLeaderLines val="0"/>
         </c:dLbls>
         <c:gapWidth val="60"/>
+        <c:overlap val="0"/>
         <c:axId val="2094734554"/>
         <c:axId val="2094734552"/>
+        <c:axId val="2094734556"/>
       </c:barChart>
       <c:catAx>
         <c:axId val="2094734554"/>
@@ -663,7 +279,6 @@
         <c:crosses val="autoZero"/>
         <c:auto val="1"/>
         <c:lblAlgn val="ctr"/>
-        <c:lblOffset val="100"/>
         <c:noMultiLvlLbl val="1"/>
       </c:catAx>
       <c:valAx>
@@ -726,389 +341,6 @@
     </c:plotArea>
     <c:plotVisOnly val="1"/>
     <c:dispBlanksAs val="span"/>
-    <c:showDLblsOverMax val="1"/>
-  </c:chart>
-  <c:spPr>
-    <a:solidFill>
-      <a:srgbClr val="FFFFFF"/>
-    </a:solidFill>
-    <a:ln>
-      <a:noFill/>
-    </a:ln>
-    <a:effectLst/>
-  </c:spPr>
-  <c:externalData r:id="rId1">
-    <c:autoUpdate val="0"/>
-  </c:externalData>
-</c:chartSpace>
-</file>
-
-<file path=ppt/charts/chart3.xml><?xml version="1.0" encoding="utf-8"?>
-<c:chartSpace xmlns:c="http://schemas.openxmlformats.org/drawingml/2006/chart" xmlns:a="http://schemas.openxmlformats.org/drawingml/2006/main" xmlns:r="http://schemas.openxmlformats.org/officeDocument/2006/relationships" xmlns:c16r2="http://schemas.microsoft.com/office/drawing/2015/06/chart">
-  <c:date1904 val="0"/>
-  <c:lang val="en-US"/>
-  <c:roundedCorners val="1"/>
-  <c:style val="2"/>
-  <c:chart>
-    <c:autoTitleDeleted val="1"/>
-    <c:plotArea>
-      <c:layout/>
-      <c:lineChart>
-        <c:grouping val="standard"/>
-        <c:varyColors val="0"/>
-        <c:ser>
-          <c:idx val="0"/>
-          <c:order val="0"/>
-          <c:tx>
-            <c:strRef>
-              <c:f>Sheet1!$B$1</c:f>
-              <c:strCache>
-                <c:ptCount val="1"/>
-                <c:pt idx="0">
-                  <c:v>Share of crime</c:v>
-                </c:pt>
-              </c:strCache>
-            </c:strRef>
-          </c:tx>
-          <c:spPr>
-            <a:ln w="31750" cap="flat">
-              <a:solidFill>
-                <a:srgbClr val="2D5BA8"/>
-              </a:solidFill>
-              <a:prstDash val="solid"/>
-              <a:round/>
-            </a:ln>
-            <a:effectLst/>
-          </c:spPr>
-          <c:marker>
-            <c:symbol val="circle"/>
-            <c:size val="6"/>
-            <c:spPr>
-              <a:solidFill>
-                <a:srgbClr val="2D5BA8"/>
-              </a:solidFill>
-              <a:ln w="9525" cap="flat">
-                <a:solidFill>
-                  <a:srgbClr val="2D5BA8"/>
-                </a:solidFill>
-                <a:prstDash val="solid"/>
-                <a:round/>
-              </a:ln>
-              <a:effectLst/>
-            </c:spPr>
-          </c:marker>
-          <c:cat>
-            <c:strRef>
-              <c:f>Sheet1!$A$2:$A$25</c:f>
-              <c:strCache>
-                <c:ptCount val="24"/>
-                <c:pt idx="0">
-                  <c:v>0</c:v>
-                </c:pt>
-                <c:pt idx="1">
-                  <c:v>1</c:v>
-                </c:pt>
-                <c:pt idx="2">
-                  <c:v>2</c:v>
-                </c:pt>
-                <c:pt idx="3">
-                  <c:v>3</c:v>
-                </c:pt>
-                <c:pt idx="4">
-                  <c:v>4</c:v>
-                </c:pt>
-                <c:pt idx="5">
-                  <c:v>5</c:v>
-                </c:pt>
-                <c:pt idx="6">
-                  <c:v>6</c:v>
-                </c:pt>
-                <c:pt idx="7">
-                  <c:v>7</c:v>
-                </c:pt>
-                <c:pt idx="8">
-                  <c:v>8</c:v>
-                </c:pt>
-                <c:pt idx="9">
-                  <c:v>9</c:v>
-                </c:pt>
-                <c:pt idx="10">
-                  <c:v>10</c:v>
-                </c:pt>
-                <c:pt idx="11">
-                  <c:v>11</c:v>
-                </c:pt>
-                <c:pt idx="12">
-                  <c:v>12</c:v>
-                </c:pt>
-                <c:pt idx="13">
-                  <c:v>13</c:v>
-                </c:pt>
-                <c:pt idx="14">
-                  <c:v>14</c:v>
-                </c:pt>
-                <c:pt idx="15">
-                  <c:v>15</c:v>
-                </c:pt>
-                <c:pt idx="16">
-                  <c:v>16</c:v>
-                </c:pt>
-                <c:pt idx="17">
-                  <c:v>17</c:v>
-                </c:pt>
-                <c:pt idx="18">
-                  <c:v>18</c:v>
-                </c:pt>
-                <c:pt idx="19">
-                  <c:v>19</c:v>
-                </c:pt>
-                <c:pt idx="20">
-                  <c:v>20</c:v>
-                </c:pt>
-                <c:pt idx="21">
-                  <c:v>21</c:v>
-                </c:pt>
-                <c:pt idx="22">
-                  <c:v>22</c:v>
-                </c:pt>
-                <c:pt idx="23">
-                  <c:v>23</c:v>
-                </c:pt>
-              </c:strCache>
-            </c:strRef>
-          </c:cat>
-          <c:val>
-            <c:numRef>
-              <c:f>Sheet1!$B$2:$B$25</c:f>
-              <c:numCache>
-                <c:formatCode>General</c:formatCode>
-                <c:ptCount val="24"/>
-                <c:pt idx="0">
-                  <c:v>6.75</c:v>
-                </c:pt>
-                <c:pt idx="1">
-                  <c:v>3.3</c:v>
-                </c:pt>
-                <c:pt idx="2">
-                  <c:v>2.95</c:v>
-                </c:pt>
-                <c:pt idx="3">
-                  <c:v>2.64</c:v>
-                </c:pt>
-                <c:pt idx="4">
-                  <c:v>2.14</c:v>
-                </c:pt>
-                <c:pt idx="5">
-                  <c:v>1.86</c:v>
-                </c:pt>
-                <c:pt idx="6">
-                  <c:v>2.0099999999999998</c:v>
-                </c:pt>
-                <c:pt idx="7">
-                  <c:v>2.6</c:v>
-                </c:pt>
-                <c:pt idx="8">
-                  <c:v>3.45</c:v>
-                </c:pt>
-                <c:pt idx="9">
-                  <c:v>4.12</c:v>
-                </c:pt>
-                <c:pt idx="10">
-                  <c:v>4.29</c:v>
-                </c:pt>
-                <c:pt idx="11">
-                  <c:v>4.42</c:v>
-                </c:pt>
-                <c:pt idx="12">
-                  <c:v>5.69</c:v>
-                </c:pt>
-                <c:pt idx="13">
-                  <c:v>4.57</c:v>
-                </c:pt>
-                <c:pt idx="14">
-                  <c:v>4.84</c:v>
-                </c:pt>
-                <c:pt idx="15">
-                  <c:v>5.43</c:v>
-                </c:pt>
-                <c:pt idx="16">
-                  <c:v>5.37</c:v>
-                </c:pt>
-                <c:pt idx="17">
-                  <c:v>5.36</c:v>
-                </c:pt>
-                <c:pt idx="18">
-                  <c:v>5.32</c:v>
-                </c:pt>
-                <c:pt idx="19">
-                  <c:v>5.2</c:v>
-                </c:pt>
-                <c:pt idx="20">
-                  <c:v>4.93</c:v>
-                </c:pt>
-                <c:pt idx="21">
-                  <c:v>4.53</c:v>
-                </c:pt>
-                <c:pt idx="22">
-                  <c:v>4.32</c:v>
-                </c:pt>
-                <c:pt idx="23">
-                  <c:v>3.92</c:v>
-                </c:pt>
-              </c:numCache>
-            </c:numRef>
-          </c:val>
-          <c:smooth val="1"/>
-          <c:extLst>
-            <c:ext xmlns:c16="http://schemas.microsoft.com/office/drawing/2014/chart" uri="{C3380CC4-5D6E-409C-BE32-E72D297353CC}">
-              <c16:uniqueId val="{00000000-38FD-4C2D-8ED6-1729E5F85214}"/>
-            </c:ext>
-          </c:extLst>
-        </c:ser>
-        <c:dLbls>
-          <c:showLegendKey val="0"/>
-          <c:showVal val="0"/>
-          <c:showCatName val="0"/>
-          <c:showSerName val="0"/>
-          <c:showPercent val="0"/>
-          <c:showBubbleSize val="0"/>
-        </c:dLbls>
-        <c:marker val="1"/>
-        <c:smooth val="0"/>
-        <c:axId val="2094734554"/>
-        <c:axId val="2094734552"/>
-      </c:lineChart>
-      <c:catAx>
-        <c:axId val="2094734554"/>
-        <c:scaling>
-          <c:orientation val="minMax"/>
-        </c:scaling>
-        <c:delete val="0"/>
-        <c:axPos val="b"/>
-        <c:title>
-          <c:tx>
-            <c:rich>
-              <a:bodyPr/>
-              <a:lstStyle/>
-              <a:p>
-                <a:pPr>
-                  <a:defRPr sz="1000" b="0" i="0" u="none" strike="noStrike">
-                    <a:solidFill>
-                      <a:srgbClr val="6B7585"/>
-                    </a:solidFill>
-                    <a:latin typeface="Arial"/>
-                  </a:defRPr>
-                </a:pPr>
-                <a:r>
-                  <a:rPr lang="en-US" sz="1000" b="0" i="0" u="none" strike="noStrike">
-                    <a:solidFill>
-                      <a:srgbClr val="6B7585"/>
-                    </a:solidFill>
-                    <a:latin typeface="Arial"/>
-                  </a:rPr>
-                  <a:t>Hour of day</a:t>
-                </a:r>
-              </a:p>
-            </c:rich>
-          </c:tx>
-          <c:overlay val="0"/>
-        </c:title>
-        <c:numFmt formatCode="General" sourceLinked="1"/>
-        <c:majorTickMark val="out"/>
-        <c:minorTickMark val="none"/>
-        <c:tickLblPos val="low"/>
-        <c:spPr>
-          <a:ln w="12700" cap="flat">
-            <a:solidFill>
-              <a:srgbClr val="888888"/>
-            </a:solidFill>
-            <a:prstDash val="solid"/>
-            <a:round/>
-          </a:ln>
-        </c:spPr>
-        <c:txPr>
-          <a:bodyPr/>
-          <a:lstStyle/>
-          <a:p>
-            <a:pPr>
-              <a:defRPr sz="900" b="0" i="0" u="none" strike="noStrike">
-                <a:solidFill>
-                  <a:srgbClr val="6B7585"/>
-                </a:solidFill>
-                <a:latin typeface="Arial"/>
-              </a:defRPr>
-            </a:pPr>
-            <a:endParaRPr lang="en-US"/>
-          </a:p>
-        </c:txPr>
-        <c:crossAx val="2094734552"/>
-        <c:crosses val="autoZero"/>
-        <c:auto val="1"/>
-        <c:lblAlgn val="ctr"/>
-        <c:lblOffset val="100"/>
-        <c:noMultiLvlLbl val="1"/>
-      </c:catAx>
-      <c:valAx>
-        <c:axId val="2094734552"/>
-        <c:scaling>
-          <c:orientation val="minMax"/>
-        </c:scaling>
-        <c:delete val="0"/>
-        <c:axPos val="l"/>
-        <c:majorGridlines>
-          <c:spPr>
-            <a:ln w="6350" cap="flat">
-              <a:solidFill>
-                <a:srgbClr val="EEF1F5"/>
-              </a:solidFill>
-              <a:prstDash val="solid"/>
-              <a:round/>
-            </a:ln>
-          </c:spPr>
-        </c:majorGridlines>
-        <c:numFmt formatCode="General" sourceLinked="0"/>
-        <c:majorTickMark val="out"/>
-        <c:minorTickMark val="none"/>
-        <c:tickLblPos val="nextTo"/>
-        <c:spPr>
-          <a:ln w="12700" cap="flat">
-            <a:solidFill>
-              <a:srgbClr val="888888"/>
-            </a:solidFill>
-            <a:prstDash val="solid"/>
-            <a:round/>
-          </a:ln>
-        </c:spPr>
-        <c:txPr>
-          <a:bodyPr/>
-          <a:lstStyle/>
-          <a:p>
-            <a:pPr>
-              <a:defRPr sz="900" b="0" i="0" u="none" strike="noStrike">
-                <a:solidFill>
-                  <a:srgbClr val="6B7585"/>
-                </a:solidFill>
-                <a:latin typeface="Arial"/>
-              </a:defRPr>
-            </a:pPr>
-            <a:endParaRPr lang="en-US"/>
-          </a:p>
-        </c:txPr>
-        <c:crossAx val="2094734554"/>
-        <c:crosses val="autoZero"/>
-        <c:crossBetween val="between"/>
-      </c:valAx>
-      <c:spPr>
-        <a:noFill/>
-        <a:ln>
-          <a:noFill/>
-        </a:ln>
-        <a:effectLst/>
-      </c:spPr>
-    </c:plotArea>
-    <c:plotVisOnly val="1"/>
-    <c:dispBlanksAs val="span"/>
-    <c:showDLblsOverMax val="1"/>
   </c:chart>
   <c:spPr>
     <a:solidFill>
@@ -1147,10 +379,234 @@
           <a:chExt cx="0" cy="0"/>
         </a:xfrm>
       </p:grpSpPr>
+      <p:sp>
+        <p:nvSpPr>
+          <p:cNvPr id="2" name="Header Placeholder 1"/>
+          <p:cNvSpPr>
+            <a:spLocks noGrp="1"/>
+          </p:cNvSpPr>
+          <p:nvPr>
+            <p:ph type="hdr" sz="quarter"/>
+          </p:nvPr>
+        </p:nvSpPr>
+        <p:spPr>
+          <a:xfrm>
+            <a:off x="0" y="0"/>
+            <a:ext cx="2971800" cy="458788"/>
+          </a:xfrm>
+          <a:prstGeom prst="rect">
+            <a:avLst/>
+          </a:prstGeom>
+        </p:spPr>
+        <p:txBody>
+          <a:bodyPr vert="horz" lIns="91440" tIns="45720" rIns="91440" bIns="45720" rtlCol="0"/>
+          <a:lstStyle>
+            <a:lvl1pPr algn="l">
+              <a:defRPr sz="1200"/>
+            </a:lvl1pPr>
+          </a:lstStyle>
+          <a:p>
+            <a:endParaRPr lang="en-US"/>
+          </a:p>
+        </p:txBody>
+      </p:sp>
+      <p:sp>
+        <p:nvSpPr>
+          <p:cNvPr id="3" name="Date Placeholder 2"/>
+          <p:cNvSpPr>
+            <a:spLocks noGrp="1"/>
+          </p:cNvSpPr>
+          <p:nvPr>
+            <p:ph type="dt" idx="1"/>
+          </p:nvPr>
+        </p:nvSpPr>
+        <p:spPr>
+          <a:xfrm>
+            <a:off x="3884613" y="0"/>
+            <a:ext cx="2971800" cy="458788"/>
+          </a:xfrm>
+          <a:prstGeom prst="rect">
+            <a:avLst/>
+          </a:prstGeom>
+        </p:spPr>
+        <p:txBody>
+          <a:bodyPr vert="horz" lIns="91440" tIns="45720" rIns="91440" bIns="45720" rtlCol="0"/>
+          <a:lstStyle>
+            <a:lvl1pPr algn="r">
+              <a:defRPr sz="1200"/>
+            </a:lvl1pPr>
+          </a:lstStyle>
+          <a:p>
+            <a:fld id="{5282F153-3F37-0F45-9E97-73ACFA13230C}" type="datetimeFigureOut">
+              <a:rPr lang="en-US"/>
+              <a:t>7/23/19</a:t>
+            </a:fld>
+            <a:endParaRPr lang="en-US"/>
+          </a:p>
+        </p:txBody>
+      </p:sp>
+      <p:sp>
+        <p:nvSpPr>
+          <p:cNvPr id="4" name="Slide Image Placeholder 3"/>
+          <p:cNvSpPr>
+            <a:spLocks noGrp="1" noRot="1" noChangeAspect="1"/>
+          </p:cNvSpPr>
+          <p:nvPr>
+            <p:ph type="sldImg" idx="2"/>
+          </p:nvPr>
+        </p:nvSpPr>
+        <p:spPr>
+          <a:xfrm>
+            <a:off x="685800" y="1143000"/>
+            <a:ext cx="5486400" cy="3086100"/>
+          </a:xfrm>
+          <a:prstGeom prst="rect">
+            <a:avLst/>
+          </a:prstGeom>
+          <a:noFill/>
+          <a:ln w="12700">
+            <a:solidFill>
+              <a:prstClr val="black"/>
+            </a:solidFill>
+          </a:ln>
+        </p:spPr>
+        <p:txBody>
+          <a:bodyPr vert="horz" lIns="91440" tIns="45720" rIns="91440" bIns="45720" rtlCol="0" anchor="ctr"/>
+          <a:lstStyle/>
+          <a:p>
+            <a:endParaRPr lang="en-US"/>
+          </a:p>
+        </p:txBody>
+      </p:sp>
+      <p:sp>
+        <p:nvSpPr>
+          <p:cNvPr id="5" name="Notes Placeholder 4"/>
+          <p:cNvSpPr>
+            <a:spLocks noGrp="1"/>
+          </p:cNvSpPr>
+          <p:nvPr>
+            <p:ph type="body" sz="quarter" idx="3"/>
+          </p:nvPr>
+        </p:nvSpPr>
+        <p:spPr>
+          <a:xfrm>
+            <a:off x="685800" y="4400550"/>
+            <a:ext cx="5486400" cy="3600450"/>
+          </a:xfrm>
+          <a:prstGeom prst="rect">
+            <a:avLst/>
+          </a:prstGeom>
+        </p:spPr>
+        <p:txBody>
+          <a:bodyPr vert="horz" lIns="91440" tIns="45720" rIns="91440" bIns="45720" rtlCol="0"/>
+          <a:lstStyle/>
+          <a:p>
+            <a:pPr lvl="0"/>
+            <a:r>
+              <a:rPr lang="en-US"/>
+              <a:t>Click to edit Master text styles</a:t>
+            </a:r>
+          </a:p>
+          <a:p>
+            <a:pPr lvl="1"/>
+            <a:r>
+              <a:rPr lang="en-US"/>
+              <a:t>Second level</a:t>
+            </a:r>
+          </a:p>
+          <a:p>
+            <a:pPr lvl="2"/>
+            <a:r>
+              <a:rPr lang="en-US"/>
+              <a:t>Third level</a:t>
+            </a:r>
+          </a:p>
+          <a:p>
+            <a:pPr lvl="3"/>
+            <a:r>
+              <a:rPr lang="en-US"/>
+              <a:t>Fourth level</a:t>
+            </a:r>
+          </a:p>
+          <a:p>
+            <a:pPr lvl="4"/>
+            <a:r>
+              <a:rPr lang="en-US"/>
+              <a:t>Fifth level</a:t>
+            </a:r>
+          </a:p>
+        </p:txBody>
+      </p:sp>
+      <p:sp>
+        <p:nvSpPr>
+          <p:cNvPr id="6" name="Footer Placeholder 5"/>
+          <p:cNvSpPr>
+            <a:spLocks noGrp="1"/>
+          </p:cNvSpPr>
+          <p:nvPr>
+            <p:ph type="ftr" sz="quarter" idx="4"/>
+          </p:nvPr>
+        </p:nvSpPr>
+        <p:spPr>
+          <a:xfrm>
+            <a:off x="0" y="8685213"/>
+            <a:ext cx="2971800" cy="458787"/>
+          </a:xfrm>
+          <a:prstGeom prst="rect">
+            <a:avLst/>
+          </a:prstGeom>
+        </p:spPr>
+        <p:txBody>
+          <a:bodyPr vert="horz" lIns="91440" tIns="45720" rIns="91440" bIns="45720" rtlCol="0" anchor="b"/>
+          <a:lstStyle>
+            <a:lvl1pPr algn="l">
+              <a:defRPr sz="1200"/>
+            </a:lvl1pPr>
+          </a:lstStyle>
+          <a:p>
+            <a:endParaRPr lang="en-US"/>
+          </a:p>
+        </p:txBody>
+      </p:sp>
+      <p:sp>
+        <p:nvSpPr>
+          <p:cNvPr id="7" name="Slide Number Placeholder 6"/>
+          <p:cNvSpPr>
+            <a:spLocks noGrp="1"/>
+          </p:cNvSpPr>
+          <p:nvPr>
+            <p:ph type="sldNum" sz="quarter" idx="5"/>
+          </p:nvPr>
+        </p:nvSpPr>
+        <p:spPr>
+          <a:xfrm>
+            <a:off x="3884613" y="8685213"/>
+            <a:ext cx="2971800" cy="458787"/>
+          </a:xfrm>
+          <a:prstGeom prst="rect">
+            <a:avLst/>
+          </a:prstGeom>
+        </p:spPr>
+        <p:txBody>
+          <a:bodyPr vert="horz" lIns="91440" tIns="45720" rIns="91440" bIns="45720" rtlCol="0" anchor="b"/>
+          <a:lstStyle>
+            <a:lvl1pPr algn="r">
+              <a:defRPr sz="1200"/>
+            </a:lvl1pPr>
+          </a:lstStyle>
+          <a:p>
+            <a:fld id="{CE5E9CC1-C706-0F49-92D6-E571CC5EEA8F}" type="slidenum">
+              <a:rPr lang="en-US"/>
+              <a:t>‹#›</a:t>
+            </a:fld>
+            <a:endParaRPr lang="en-US"/>
+          </a:p>
+        </p:txBody>
+      </p:sp>
     </p:spTree>
     <p:extLst>
       <p:ext uri="{BB962C8B-B14F-4D97-AF65-F5344CB8AC3E}">
-        <p14:creationId xmlns:p14="http://schemas.microsoft.com/office/powerpoint/2010/main" val="679511969"/>
+        <p14:creationId xmlns:p14="http://schemas.microsoft.com/office/powerpoint/2010/main" val="1024086991"/>
       </p:ext>
     </p:extLst>
   </p:cSld>
@@ -1298,6 +754,7 @@
               <a:rPr lang="en-US" dirty="0"/>
               <a:t>Hook: relocating to Chicago for a job in the Loop, safety is the top concern. This project finds the safest neighborhoods that still have a reasonable commute, using two years of city crime data.</a:t>
             </a:r>
+            <a:endParaRPr lang="en-US" dirty="0"/>
           </a:p>
         </p:txBody>
       </p:sp>
@@ -1383,8 +840,9 @@
           <a:p>
             <a:r>
               <a:rPr lang="en-US" dirty="0"/>
-              <a:t>Five concrete recommendations, all safe AND commutable - proving there's no hard tradeoff. Edgewater is the all-around winner; Beverly is the commute winner with a Metra stop a block from Krasan.</a:t>
-            </a:r>
+              <a:t>Two time findings, both straight from the dashboard. Risk is lowest 2-7 AM and peaks midday through evening, but day of week is essentially flat (Friday barely highest), so it isn't worth acting on. The midnight spike is a data artifact - unknown times default to 00:00.</a:t>
+            </a:r>
+            <a:endParaRPr lang="en-US" dirty="0"/>
           </a:p>
         </p:txBody>
       </p:sp>
@@ -1470,8 +928,9 @@
           <a:p>
             <a:r>
               <a:rPr lang="en-US" dirty="0"/>
-              <a:t>The deliverable is an interactive dashboard, not a static report. Demo if time allows: type an address, show the ½-mile crime count and the commute card that recommends walk vs transit. This is what makes it reusable for any address.</a:t>
-            </a:r>
+              <a:t>This is the dashboard's map view - districts shaded by violent crime per month on the same green-to-red scale. The safe districts form a ring across the far north side; the higher-crime districts are mostly west and south, away from downtown. The HQ pin sits in the Loop, which is mid-range, reinforcing: live near good transit on the north side, not downtown.</a:t>
+            </a:r>
+            <a:endParaRPr lang="en-US" dirty="0"/>
           </a:p>
         </p:txBody>
       </p:sp>
@@ -1557,8 +1016,9 @@
           <a:p>
             <a:r>
               <a:rPr lang="en-US" dirty="0"/>
-              <a:t>Honest about limits: raw counts not per-capita, transit time via a link not in-app, only 2 years. With more time I'd normalize by population, add a transit API, extend the history, and layer in cost/amenities for a full livability score.</a:t>
-            </a:r>
+              <a:t>Five concrete recommendations, all safe AND commutable - proving there's no hard tradeoff. Edgewater is the all-around winner; Beverly is the commute winner with a Metra stop a block from Krasan.</a:t>
+            </a:r>
+            <a:endParaRPr lang="en-US" dirty="0"/>
           </a:p>
         </p:txBody>
       </p:sp>
@@ -1644,8 +1104,9 @@
           <a:p>
             <a:r>
               <a:rPr lang="en-US" dirty="0"/>
-              <a:t>Close on the one-line takeaway and invite questions. Recap: ranked on violent crime (not totals), proved closer isn't safer, and delivered both a recommendation and a reusable tool.</a:t>
-            </a:r>
+              <a:t>The deliverable is an interactive dashboard, not a static report. Demo if time allows: type an address, show the ½-mile crime count and the commute card that recommends walk vs transit. This is what makes it reusable for any address.</a:t>
+            </a:r>
+            <a:endParaRPr lang="en-US" dirty="0"/>
           </a:p>
         </p:txBody>
       </p:sp>
@@ -1667,6 +1128,182 @@
             <a:fld id="{F7021451-1387-4CA6-816F-3879F97B5CBC}" type="slidenum">
               <a:rPr lang="en-US"/>
               <a:t>13</a:t>
+            </a:fld>
+            <a:endParaRPr lang="en-US"/>
+          </a:p>
+        </p:txBody>
+      </p:sp>
+    </p:spTree>
+    <p:extLst>
+      <p:ext uri="{BB962C8B-B14F-4D97-AF65-F5344CB8AC3E}">
+        <p14:creationId xmlns:p14="http://schemas.microsoft.com/office/powerpoint/2010/main" val="1024086991"/>
+      </p:ext>
+    </p:extLst>
+  </p:cSld>
+  <p:clrMapOvr>
+    <a:masterClrMapping/>
+  </p:clrMapOvr>
+</p:notes>
+</file>
+
+<file path=ppt/notesSlides/notesSlide14.xml><?xml version="1.0" encoding="utf-8"?>
+<p:notes xmlns:a="http://schemas.openxmlformats.org/drawingml/2006/main" xmlns:r="http://schemas.openxmlformats.org/officeDocument/2006/relationships" xmlns:p="http://schemas.openxmlformats.org/presentationml/2006/main">
+  <p:cSld>
+    <p:spTree>
+      <p:nvGrpSpPr>
+        <p:cNvPr id="1" name=""/>
+        <p:cNvGrpSpPr/>
+        <p:nvPr/>
+      </p:nvGrpSpPr>
+      <p:grpSpPr>
+        <a:xfrm>
+          <a:off x="0" y="0"/>
+          <a:ext cx="0" cy="0"/>
+          <a:chOff x="0" y="0"/>
+          <a:chExt cx="0" cy="0"/>
+        </a:xfrm>
+      </p:grpSpPr>
+      <p:sp>
+        <p:nvSpPr>
+          <p:cNvPr id="2" name="Slide Image Placeholder 1"/>
+          <p:cNvSpPr>
+            <a:spLocks noGrp="1" noRot="1" noChangeAspect="1"/>
+          </p:cNvSpPr>
+          <p:nvPr>
+            <p:ph type="sldImg"/>
+          </p:nvPr>
+        </p:nvSpPr>
+        <p:spPr/>
+      </p:sp>
+      <p:sp>
+        <p:nvSpPr>
+          <p:cNvPr id="3" name="Notes Placeholder 2"/>
+          <p:cNvSpPr>
+            <a:spLocks noGrp="1"/>
+          </p:cNvSpPr>
+          <p:nvPr>
+            <p:ph type="body" idx="1"/>
+          </p:nvPr>
+        </p:nvSpPr>
+        <p:spPr/>
+        <p:txBody>
+          <a:bodyPr/>
+          <a:lstStyle/>
+          <a:p>
+            <a:r>
+              <a:rPr lang="en-US" dirty="0"/>
+              <a:t>Honest about limits: raw counts not per-capita, transit time via a link not in-app, only 2 years. With more time I'd normalize by population, add a transit API, extend the history, and layer in cost/amenities for a full livability score.</a:t>
+            </a:r>
+            <a:endParaRPr lang="en-US" dirty="0"/>
+          </a:p>
+        </p:txBody>
+      </p:sp>
+      <p:sp>
+        <p:nvSpPr>
+          <p:cNvPr id="4" name="Slide Number Placeholder 3"/>
+          <p:cNvSpPr>
+            <a:spLocks noGrp="1"/>
+          </p:cNvSpPr>
+          <p:nvPr>
+            <p:ph type="sldNum" sz="quarter" idx="10"/>
+          </p:nvPr>
+        </p:nvSpPr>
+        <p:spPr/>
+        <p:txBody>
+          <a:bodyPr/>
+          <a:lstStyle/>
+          <a:p>
+            <a:fld id="{F7021451-1387-4CA6-816F-3879F97B5CBC}" type="slidenum">
+              <a:rPr lang="en-US"/>
+              <a:t>14</a:t>
+            </a:fld>
+            <a:endParaRPr lang="en-US"/>
+          </a:p>
+        </p:txBody>
+      </p:sp>
+    </p:spTree>
+    <p:extLst>
+      <p:ext uri="{BB962C8B-B14F-4D97-AF65-F5344CB8AC3E}">
+        <p14:creationId xmlns:p14="http://schemas.microsoft.com/office/powerpoint/2010/main" val="1024086991"/>
+      </p:ext>
+    </p:extLst>
+  </p:cSld>
+  <p:clrMapOvr>
+    <a:masterClrMapping/>
+  </p:clrMapOvr>
+</p:notes>
+</file>
+
+<file path=ppt/notesSlides/notesSlide15.xml><?xml version="1.0" encoding="utf-8"?>
+<p:notes xmlns:a="http://schemas.openxmlformats.org/drawingml/2006/main" xmlns:r="http://schemas.openxmlformats.org/officeDocument/2006/relationships" xmlns:p="http://schemas.openxmlformats.org/presentationml/2006/main">
+  <p:cSld>
+    <p:spTree>
+      <p:nvGrpSpPr>
+        <p:cNvPr id="1" name=""/>
+        <p:cNvGrpSpPr/>
+        <p:nvPr/>
+      </p:nvGrpSpPr>
+      <p:grpSpPr>
+        <a:xfrm>
+          <a:off x="0" y="0"/>
+          <a:ext cx="0" cy="0"/>
+          <a:chOff x="0" y="0"/>
+          <a:chExt cx="0" cy="0"/>
+        </a:xfrm>
+      </p:grpSpPr>
+      <p:sp>
+        <p:nvSpPr>
+          <p:cNvPr id="2" name="Slide Image Placeholder 1"/>
+          <p:cNvSpPr>
+            <a:spLocks noGrp="1" noRot="1" noChangeAspect="1"/>
+          </p:cNvSpPr>
+          <p:nvPr>
+            <p:ph type="sldImg"/>
+          </p:nvPr>
+        </p:nvSpPr>
+        <p:spPr/>
+      </p:sp>
+      <p:sp>
+        <p:nvSpPr>
+          <p:cNvPr id="3" name="Notes Placeholder 2"/>
+          <p:cNvSpPr>
+            <a:spLocks noGrp="1"/>
+          </p:cNvSpPr>
+          <p:nvPr>
+            <p:ph type="body" idx="1"/>
+          </p:nvPr>
+        </p:nvSpPr>
+        <p:spPr/>
+        <p:txBody>
+          <a:bodyPr/>
+          <a:lstStyle/>
+          <a:p>
+            <a:r>
+              <a:rPr lang="en-US" dirty="0"/>
+              <a:t>Close on the one-line takeaway and invite questions. Recap: ranked on violent crime (not totals), proved closer isn't safer, and delivered both a recommendation and a reusable tool.</a:t>
+            </a:r>
+            <a:endParaRPr lang="en-US" dirty="0"/>
+          </a:p>
+        </p:txBody>
+      </p:sp>
+      <p:sp>
+        <p:nvSpPr>
+          <p:cNvPr id="4" name="Slide Number Placeholder 3"/>
+          <p:cNvSpPr>
+            <a:spLocks noGrp="1"/>
+          </p:cNvSpPr>
+          <p:nvPr>
+            <p:ph type="sldNum" sz="quarter" idx="10"/>
+          </p:nvPr>
+        </p:nvSpPr>
+        <p:spPr/>
+        <p:txBody>
+          <a:bodyPr/>
+          <a:lstStyle/>
+          <a:p>
+            <a:fld id="{F7021451-1387-4CA6-816F-3879F97B5CBC}" type="slidenum">
+              <a:rPr lang="en-US"/>
+              <a:t>15</a:t>
             </a:fld>
             <a:endParaRPr lang="en-US"/>
           </a:p>
@@ -1733,6 +1370,7 @@
               <a:rPr lang="en-US" dirty="0"/>
               <a:t>State the problem plainly. Emphasize: safety is priority one, but a safe place you can't commute from is useless - so we optimize for both. Audience is the employee, the HR team, and really anyone new to the city.</a:t>
             </a:r>
+            <a:endParaRPr lang="en-US" dirty="0"/>
           </a:p>
         </p:txBody>
       </p:sp>
@@ -1820,6 +1458,7 @@
               <a:rPr lang="en-US" dirty="0"/>
               <a:t>Three success criteria. The key analytical stance is the first one: we rank on violent crime, because total crime is misleading - which we prove a couple slides from now with Austin.</a:t>
             </a:r>
+            <a:endParaRPr lang="en-US" dirty="0"/>
           </a:p>
         </p:txBody>
       </p:sp>
@@ -1907,6 +1546,7 @@
               <a:rPr lang="en-US" dirty="0"/>
               <a:t>Public city data. Call out that I made deliberate cleaning choices - and that I caught a real data-quality bug: the day-of-week column was shifted/misaligned for ~75% of rows, so I recomputed it from each incident's date.</a:t>
             </a:r>
+            <a:endParaRPr lang="en-US" dirty="0"/>
           </a:p>
         </p:txBody>
       </p:sp>
@@ -1994,6 +1634,7 @@
               <a:rPr lang="en-US" dirty="0"/>
               <a:t>Walk the five workflow stages quickly. The point: this wasn't ad-hoc - it followed a standard analytics workflow from question to shareable product.</a:t>
             </a:r>
+            <a:endParaRPr lang="en-US" dirty="0"/>
           </a:p>
         </p:txBody>
       </p:sp>
@@ -2081,6 +1722,7 @@
               <a:rPr lang="en-US" dirty="0"/>
               <a:t>Lead with the answer: Edgewater (District 20). It's lowest on violent crime AND lowest on total crime. The North-side and far-Southwest edges form the safe cluster.</a:t>
             </a:r>
+            <a:endParaRPr lang="en-US" dirty="0"/>
           </a:p>
         </p:txBody>
       </p:sp>
@@ -2168,6 +1810,7 @@
               <a:rPr lang="en-US" dirty="0"/>
               <a:t>This is the analytical centerpiece. Austin has lower total crime than the Loop, yet 44% of its crime is violent vs 26% in the Loop. So ranking by total crime would wrongly call Austin 'safer.' That's why we rank on violent crime.</a:t>
             </a:r>
+            <a:endParaRPr lang="en-US" dirty="0"/>
           </a:p>
         </p:txBody>
       </p:sp>
@@ -2253,8 +1896,9 @@
           <a:p>
             <a:r>
               <a:rPr lang="en-US" dirty="0"/>
-              <a:t>Common assumption is that downtown = safe. The data says the opposite: the Loop runs about 2.3x Edgewater's violent crime. So you don't pay a safety premium to live near the office - you'd pay a penalty.</a:t>
-            </a:r>
+              <a:t>This is the dashboard's signature chart. The four quadrants make the point visually: the green corner is where you want to live, and Austin sits alone in the red 'deceptive' zone - low total crime but the highest violent share. Edgewater anchors the safe corner.</a:t>
+            </a:r>
+            <a:endParaRPr lang="en-US" dirty="0"/>
           </a:p>
         </p:txBody>
       </p:sp>
@@ -2340,8 +1984,9 @@
           <a:p>
             <a:r>
               <a:rPr lang="en-US" dirty="0"/>
-              <a:t>Two time findings. Risk is lowest 2-7 AM and peaks midday through evening. Day of week is essentially flat (Friday barely highest), so it's not worth acting on. Note the midnight spike is a data artifact - unknown times default to 00:00.</a:t>
-            </a:r>
+              <a:t>Common assumption is that downtown = safe. The data says the opposite: the Loop runs about 2.3x Edgewater's violent crime. So you don't pay a safety premium to live near the office - you'd pay a penalty.</a:t>
+            </a:r>
+            <a:endParaRPr lang="en-US" dirty="0"/>
           </a:p>
         </p:txBody>
       </p:sp>
@@ -2414,11 +2059,6 @@
 <file path=ppt/slideMasters/slideMaster1.xml><?xml version="1.0" encoding="utf-8"?>
 <p:sldMaster xmlns:a="http://schemas.openxmlformats.org/drawingml/2006/main" xmlns:r="http://schemas.openxmlformats.org/officeDocument/2006/relationships" xmlns:p="http://schemas.openxmlformats.org/presentationml/2006/main">
   <p:cSld>
-    <p:bg>
-      <p:bgRef idx="1001">
-        <a:schemeClr val="bg1"/>
-      </p:bgRef>
-    </p:bg>
     <p:spTree>
       <p:nvGrpSpPr>
         <p:cNvPr id="1" name=""/>
@@ -2701,7 +2341,6 @@
         <a:solidFill>
           <a:srgbClr val="14233A"/>
         </a:solidFill>
-        <a:effectLst/>
       </p:bgPr>
     </p:bg>
     <p:spTree>
@@ -2737,13 +2376,6 @@
           </a:solidFill>
           <a:ln/>
         </p:spPr>
-        <p:txBody>
-          <a:bodyPr/>
-          <a:lstStyle/>
-          <a:p>
-            <a:endParaRPr lang="en-US"/>
-          </a:p>
-        </p:txBody>
       </p:sp>
       <p:sp>
         <p:nvSpPr>
@@ -2764,13 +2396,6 @@
           </a:solidFill>
           <a:ln/>
         </p:spPr>
-        <p:txBody>
-          <a:bodyPr/>
-          <a:lstStyle/>
-          <a:p>
-            <a:endParaRPr lang="en-US"/>
-          </a:p>
-        </p:txBody>
       </p:sp>
       <p:sp>
         <p:nvSpPr>
@@ -2791,31 +2416,24 @@
           </a:solidFill>
           <a:ln/>
           <a:effectLst>
-            <a:outerShdw blurRad="88900" dist="38100" dir="5400000" algn="bl" rotWithShape="0">
+            <a:outerShdw sx="100000" sy="100000" kx="0" ky="0" algn="bl" rotWithShape="0" blurRad="88900" dist="38100" dir="5400000">
               <a:srgbClr val="8794A8">
                 <a:alpha val="22000"/>
               </a:srgbClr>
             </a:outerShdw>
           </a:effectLst>
         </p:spPr>
-        <p:txBody>
-          <a:bodyPr/>
-          <a:lstStyle/>
-          <a:p>
-            <a:endParaRPr lang="en-US"/>
-          </a:p>
-        </p:txBody>
       </p:sp>
       <p:pic>
         <p:nvPicPr>
-          <p:cNvPr id="5" name="Image 0" descr="preencoded.png"/>
+          <p:cNvPr id="5" name="Image 0" descr="preencoded.png">    </p:cNvPr>
           <p:cNvPicPr>
             <a:picLocks noChangeAspect="1"/>
           </p:cNvPicPr>
           <p:nvPr/>
         </p:nvPicPr>
         <p:blipFill>
-          <a:blip r:embed="rId3"/>
+          <a:blip r:embed="rId1"/>
           <a:stretch>
             <a:fillRect/>
           </a:stretch>
@@ -2851,11 +2469,11 @@
           <a:bodyPr wrap="square" lIns="0" tIns="0" rIns="0" bIns="0" rtlCol="0" anchor="ctr"/>
           <a:lstStyle/>
           <a:p>
-            <a:pPr marL="0" indent="0">
-              <a:buNone/>
-            </a:pPr>
-            <a:r>
-              <a:rPr lang="en-US" sz="1300" b="1" kern="0" spc="300" dirty="0">
+            <a:pPr indent="0" marL="0">
+              <a:buNone/>
+            </a:pPr>
+            <a:r>
+              <a:rPr lang="en-US" sz="1300" b="1" spc="300" kern="0" dirty="0">
                 <a:solidFill>
                   <a:srgbClr val="9FE3C8"/>
                 </a:solidFill>
@@ -2890,7 +2508,7 @@
           <a:bodyPr wrap="square" lIns="0" tIns="0" rIns="0" bIns="0" rtlCol="0" anchor="ctr"/>
           <a:lstStyle/>
           <a:p>
-            <a:pPr marL="0" indent="0">
+            <a:pPr indent="0" marL="0">
               <a:buNone/>
             </a:pPr>
             <a:r>
@@ -2929,7 +2547,7 @@
           <a:bodyPr wrap="square" lIns="0" tIns="0" rIns="0" bIns="0" rtlCol="0" anchor="ctr"/>
           <a:lstStyle/>
           <a:p>
-            <a:pPr marL="0" indent="0">
+            <a:pPr indent="0" marL="0">
               <a:buNone/>
             </a:pPr>
             <a:r>
@@ -2968,7 +2586,7 @@
           <a:bodyPr wrap="square" lIns="0" tIns="0" rIns="0" bIns="0" rtlCol="0" anchor="ctr"/>
           <a:lstStyle/>
           <a:p>
-            <a:pPr marL="0" indent="0">
+            <a:pPr indent="0" marL="0">
               <a:buNone/>
             </a:pPr>
             <a:r>
@@ -2982,6 +2600,9 @@
               </a:rPr>
               <a:t>Victoria</a:t>
             </a:r>
+            <a:pPr indent="0" marL="0">
+              <a:buNone/>
+            </a:pPr>
             <a:r>
               <a:rPr lang="en-US" sz="1300" dirty="0">
                 <a:solidFill>
@@ -3013,7 +2634,6 @@
         <a:solidFill>
           <a:srgbClr val="FFFFFF"/>
         </a:solidFill>
-        <a:effectLst/>
       </p:bgPr>
     </p:bg>
     <p:spTree>
@@ -3051,11 +2671,11 @@
           <a:bodyPr wrap="square" lIns="0" tIns="0" rIns="0" bIns="0" rtlCol="0" anchor="ctr"/>
           <a:lstStyle/>
           <a:p>
-            <a:pPr marL="0" indent="0">
-              <a:buNone/>
-            </a:pPr>
-            <a:r>
-              <a:rPr lang="en-US" sz="1200" b="1" kern="0" spc="200" dirty="0">
+            <a:pPr indent="0" marL="0">
+              <a:buNone/>
+            </a:pPr>
+            <a:r>
+              <a:rPr lang="en-US" sz="1200" b="1" spc="200" kern="0" dirty="0">
                 <a:solidFill>
                   <a:srgbClr val="1F9D6B"/>
                 </a:solidFill>
@@ -3063,7 +2683,7 @@
                 <a:ea typeface="Calibri" pitchFamily="34" charset="-122"/>
                 <a:cs typeface="Calibri" pitchFamily="34" charset="-120"/>
               </a:rPr>
-              <a:t>09  ·  RECOMMENDATIONS</a:t>
+              <a:t>08  ·  FINDING 4</a:t>
             </a:r>
             <a:endParaRPr lang="en-US" sz="1200" dirty="0"/>
           </a:p>
@@ -3090,7 +2710,7 @@
           <a:bodyPr wrap="square" lIns="0" tIns="0" rIns="0" bIns="0" rtlCol="0" anchor="ctr"/>
           <a:lstStyle/>
           <a:p>
-            <a:pPr marL="0" indent="0">
+            <a:pPr indent="0" marL="0">
               <a:buNone/>
             </a:pPr>
             <a:r>
@@ -3102,6 +2722,753 @@
                 <a:ea typeface="Cambria" pitchFamily="34" charset="-122"/>
                 <a:cs typeface="Cambria" pitchFamily="34" charset="-120"/>
               </a:rPr>
+              <a:t>Time of day matters more than day of week</a:t>
+            </a:r>
+            <a:endParaRPr lang="en-US" sz="3000" dirty="0"/>
+          </a:p>
+        </p:txBody>
+      </p:sp>
+      <p:pic>
+        <p:nvPicPr>
+          <p:cNvPr id="4" name="Image 0" descr="chart_hour.png">    </p:cNvPr>
+          <p:cNvPicPr>
+            <a:picLocks noChangeAspect="1"/>
+          </p:cNvPicPr>
+          <p:nvPr/>
+        </p:nvPicPr>
+        <p:blipFill>
+          <a:blip r:embed="rId1"/>
+          <a:stretch>
+            <a:fillRect/>
+          </a:stretch>
+        </p:blipFill>
+        <p:spPr>
+          <a:xfrm>
+            <a:off x="365760" y="1572768"/>
+            <a:ext cx="4343400" cy="2542032"/>
+          </a:xfrm>
+          <a:prstGeom prst="rect">
+            <a:avLst/>
+          </a:prstGeom>
+        </p:spPr>
+      </p:pic>
+      <p:pic>
+        <p:nvPicPr>
+          <p:cNvPr id="5" name="Image 1" descr="chart_dow.png">    </p:cNvPr>
+          <p:cNvPicPr>
+            <a:picLocks noChangeAspect="1"/>
+          </p:cNvPicPr>
+          <p:nvPr/>
+        </p:nvPicPr>
+        <p:blipFill>
+          <a:blip r:embed="rId2"/>
+          <a:stretch>
+            <a:fillRect/>
+          </a:stretch>
+        </p:blipFill>
+        <p:spPr>
+          <a:xfrm>
+            <a:off x="4892040" y="1572768"/>
+            <a:ext cx="3886200" cy="2450592"/>
+          </a:xfrm>
+          <a:prstGeom prst="rect">
+            <a:avLst/>
+          </a:prstGeom>
+        </p:spPr>
+      </p:pic>
+      <p:sp>
+        <p:nvSpPr>
+          <p:cNvPr id="6" name="Text 2"/>
+          <p:cNvSpPr/>
+          <p:nvPr/>
+        </p:nvSpPr>
+        <p:spPr>
+          <a:xfrm>
+            <a:off x="365760" y="4224528"/>
+            <a:ext cx="4343400" cy="457200"/>
+          </a:xfrm>
+          <a:prstGeom prst="rect">
+            <a:avLst/>
+          </a:prstGeom>
+          <a:noFill/>
+          <a:ln/>
+        </p:spPr>
+        <p:txBody>
+          <a:bodyPr wrap="square" lIns="0" tIns="0" rIns="0" bIns="0" rtlCol="0" anchor="ctr"/>
+          <a:lstStyle/>
+          <a:p>
+            <a:pPr indent="0" marL="0">
+              <a:lnSpc>
+                <a:spcPct val="105000"/>
+              </a:lnSpc>
+              <a:buNone/>
+            </a:pPr>
+            <a:r>
+              <a:rPr lang="en-US" sz="1200" dirty="0">
+                <a:solidFill>
+                  <a:srgbClr val="1A2230"/>
+                </a:solidFill>
+                <a:latin typeface="Calibri" pitchFamily="34" charset="0"/>
+                <a:ea typeface="Calibri" pitchFamily="34" charset="-122"/>
+                <a:cs typeface="Calibri" pitchFamily="34" charset="-120"/>
+              </a:rPr>
+              <a:t>By hour: deep dip 2-7 AM, then a midday-and-evening peak.</a:t>
+            </a:r>
+            <a:endParaRPr lang="en-US" sz="1200" dirty="0"/>
+          </a:p>
+        </p:txBody>
+      </p:sp>
+      <p:sp>
+        <p:nvSpPr>
+          <p:cNvPr id="7" name="Text 3"/>
+          <p:cNvSpPr/>
+          <p:nvPr/>
+        </p:nvSpPr>
+        <p:spPr>
+          <a:xfrm>
+            <a:off x="4892040" y="4224528"/>
+            <a:ext cx="3886200" cy="457200"/>
+          </a:xfrm>
+          <a:prstGeom prst="rect">
+            <a:avLst/>
+          </a:prstGeom>
+          <a:noFill/>
+          <a:ln/>
+        </p:spPr>
+        <p:txBody>
+          <a:bodyPr wrap="square" lIns="0" tIns="0" rIns="0" bIns="0" rtlCol="0" anchor="ctr"/>
+          <a:lstStyle/>
+          <a:p>
+            <a:pPr indent="0" marL="0">
+              <a:lnSpc>
+                <a:spcPct val="105000"/>
+              </a:lnSpc>
+              <a:buNone/>
+            </a:pPr>
+            <a:r>
+              <a:rPr lang="en-US" sz="1200" dirty="0">
+                <a:solidFill>
+                  <a:srgbClr val="1A2230"/>
+                </a:solidFill>
+                <a:latin typeface="Calibri" pitchFamily="34" charset="0"/>
+                <a:ea typeface="Calibri" pitchFamily="34" charset="-122"/>
+                <a:cs typeface="Calibri" pitchFamily="34" charset="-120"/>
+              </a:rPr>
+              <a:t>By day: nearly flat - Friday only barely highest.</a:t>
+            </a:r>
+            <a:endParaRPr lang="en-US" sz="1200" dirty="0"/>
+          </a:p>
+        </p:txBody>
+      </p:sp>
+      <p:sp>
+        <p:nvSpPr>
+          <p:cNvPr id="8" name="Text 4"/>
+          <p:cNvSpPr/>
+          <p:nvPr/>
+        </p:nvSpPr>
+        <p:spPr>
+          <a:xfrm>
+            <a:off x="365760" y="4736592"/>
+            <a:ext cx="8412480" cy="320040"/>
+          </a:xfrm>
+          <a:prstGeom prst="rect">
+            <a:avLst/>
+          </a:prstGeom>
+          <a:noFill/>
+          <a:ln/>
+        </p:spPr>
+        <p:txBody>
+          <a:bodyPr wrap="square" lIns="0" tIns="0" rIns="0" bIns="0" rtlCol="0" anchor="ctr"/>
+          <a:lstStyle/>
+          <a:p>
+            <a:pPr indent="0" marL="0">
+              <a:buNone/>
+            </a:pPr>
+            <a:r>
+              <a:rPr lang="en-US" sz="1100" b="1" i="1" dirty="0">
+                <a:solidFill>
+                  <a:srgbClr val="1F9D6B"/>
+                </a:solidFill>
+                <a:latin typeface="Calibri" pitchFamily="34" charset="0"/>
+                <a:ea typeface="Calibri" pitchFamily="34" charset="-122"/>
+                <a:cs typeface="Calibri" pitchFamily="34" charset="-120"/>
+              </a:rPr>
+              <a:t>Takeaway:  </a:t>
+            </a:r>
+            <a:pPr indent="0" marL="0">
+              <a:buNone/>
+            </a:pPr>
+            <a:r>
+              <a:rPr lang="en-US" sz="1100" i="1" dirty="0">
+                <a:solidFill>
+                  <a:srgbClr val="6B7585"/>
+                </a:solidFill>
+                <a:latin typeface="Calibri" pitchFamily="34" charset="0"/>
+                <a:ea typeface="Calibri" pitchFamily="34" charset="-122"/>
+                <a:cs typeface="Calibri" pitchFamily="34" charset="-120"/>
+              </a:rPr>
+              <a:t>plan around the hour, not the day. (The 00:00 point is inflated by unknown-time reports.)  Both charts from the live dashboard.</a:t>
+            </a:r>
+            <a:endParaRPr lang="en-US" sz="1100" dirty="0"/>
+          </a:p>
+        </p:txBody>
+      </p:sp>
+    </p:spTree>
+  </p:cSld>
+  <p:clrMapOvr>
+    <a:masterClrMapping/>
+  </p:clrMapOvr>
+</p:sld>
+</file>
+
+<file path=ppt/slides/slide11.xml><?xml version="1.0" encoding="utf-8"?>
+<p:sld xmlns:a="http://schemas.openxmlformats.org/drawingml/2006/main" xmlns:r="http://schemas.openxmlformats.org/officeDocument/2006/relationships" xmlns:p="http://schemas.openxmlformats.org/presentationml/2006/main">
+  <p:cSld name="Slide 11">
+    <p:bg>
+      <p:bgPr>
+        <a:solidFill>
+          <a:srgbClr val="FFFFFF"/>
+        </a:solidFill>
+      </p:bgPr>
+    </p:bg>
+    <p:spTree>
+      <p:nvGrpSpPr>
+        <p:cNvPr id="1" name=""/>
+        <p:cNvGrpSpPr/>
+        <p:nvPr/>
+      </p:nvGrpSpPr>
+      <p:grpSpPr>
+        <a:xfrm>
+          <a:off x="0" y="0"/>
+          <a:ext cx="0" cy="0"/>
+          <a:chOff x="0" y="0"/>
+          <a:chExt cx="0" cy="0"/>
+        </a:xfrm>
+      </p:grpSpPr>
+      <p:sp>
+        <p:nvSpPr>
+          <p:cNvPr id="2" name="Text 0"/>
+          <p:cNvSpPr/>
+          <p:nvPr/>
+        </p:nvSpPr>
+        <p:spPr>
+          <a:xfrm>
+            <a:off x="502920" y="384048"/>
+            <a:ext cx="8229600" cy="274320"/>
+          </a:xfrm>
+          <a:prstGeom prst="rect">
+            <a:avLst/>
+          </a:prstGeom>
+          <a:noFill/>
+          <a:ln/>
+        </p:spPr>
+        <p:txBody>
+          <a:bodyPr wrap="square" lIns="0" tIns="0" rIns="0" bIns="0" rtlCol="0" anchor="ctr"/>
+          <a:lstStyle/>
+          <a:p>
+            <a:pPr indent="0" marL="0">
+              <a:buNone/>
+            </a:pPr>
+            <a:r>
+              <a:rPr lang="en-US" sz="1200" b="1" spc="200" kern="0" dirty="0">
+                <a:solidFill>
+                  <a:srgbClr val="1F9D6B"/>
+                </a:solidFill>
+                <a:latin typeface="Calibri" pitchFamily="34" charset="0"/>
+                <a:ea typeface="Calibri" pitchFamily="34" charset="-122"/>
+                <a:cs typeface="Calibri" pitchFamily="34" charset="-120"/>
+              </a:rPr>
+              <a:t>FROM THE DASHBOARD</a:t>
+            </a:r>
+            <a:endParaRPr lang="en-US" sz="1200" dirty="0"/>
+          </a:p>
+        </p:txBody>
+      </p:sp>
+      <p:sp>
+        <p:nvSpPr>
+          <p:cNvPr id="3" name="Text 1"/>
+          <p:cNvSpPr/>
+          <p:nvPr/>
+        </p:nvSpPr>
+        <p:spPr>
+          <a:xfrm>
+            <a:off x="457200" y="603504"/>
+            <a:ext cx="8229600" cy="658368"/>
+          </a:xfrm>
+          <a:prstGeom prst="rect">
+            <a:avLst/>
+          </a:prstGeom>
+          <a:noFill/>
+          <a:ln/>
+        </p:spPr>
+        <p:txBody>
+          <a:bodyPr wrap="square" lIns="0" tIns="0" rIns="0" bIns="0" rtlCol="0" anchor="ctr"/>
+          <a:lstStyle/>
+          <a:p>
+            <a:pPr indent="0" marL="0">
+              <a:buNone/>
+            </a:pPr>
+            <a:r>
+              <a:rPr lang="en-US" sz="3000" b="1" dirty="0">
+                <a:solidFill>
+                  <a:srgbClr val="1A2230"/>
+                </a:solidFill>
+                <a:latin typeface="Cambria" pitchFamily="34" charset="0"/>
+                <a:ea typeface="Cambria" pitchFamily="34" charset="-122"/>
+                <a:cs typeface="Cambria" pitchFamily="34" charset="-120"/>
+              </a:rPr>
+              <a:t>The safety gradient, mapped</a:t>
+            </a:r>
+            <a:endParaRPr lang="en-US" sz="3000" dirty="0"/>
+          </a:p>
+        </p:txBody>
+      </p:sp>
+      <p:pic>
+        <p:nvPicPr>
+          <p:cNvPr id="4" name="Image 0" descr="chart_map.png">    </p:cNvPr>
+          <p:cNvPicPr>
+            <a:picLocks noChangeAspect="1"/>
+          </p:cNvPicPr>
+          <p:nvPr/>
+        </p:nvPicPr>
+        <p:blipFill>
+          <a:blip r:embed="rId1"/>
+          <a:stretch>
+            <a:fillRect/>
+          </a:stretch>
+        </p:blipFill>
+        <p:spPr>
+          <a:xfrm>
+            <a:off x="320040" y="1325880"/>
+            <a:ext cx="5852160" cy="3566160"/>
+          </a:xfrm>
+          <a:prstGeom prst="rect">
+            <a:avLst/>
+          </a:prstGeom>
+        </p:spPr>
+      </p:pic>
+      <p:sp>
+        <p:nvSpPr>
+          <p:cNvPr id="5" name="Text 2"/>
+          <p:cNvSpPr/>
+          <p:nvPr/>
+        </p:nvSpPr>
+        <p:spPr>
+          <a:xfrm>
+            <a:off x="6355080" y="1417320"/>
+            <a:ext cx="2468880" cy="868680"/>
+          </a:xfrm>
+          <a:prstGeom prst="rect">
+            <a:avLst/>
+          </a:prstGeom>
+          <a:noFill/>
+          <a:ln/>
+        </p:spPr>
+        <p:txBody>
+          <a:bodyPr wrap="square" lIns="0" tIns="0" rIns="0" bIns="0" rtlCol="0" anchor="ctr"/>
+          <a:lstStyle/>
+          <a:p>
+            <a:pPr indent="0" marL="0">
+              <a:lnSpc>
+                <a:spcPct val="112000"/>
+              </a:lnSpc>
+              <a:buNone/>
+            </a:pPr>
+            <a:r>
+              <a:rPr lang="en-US" sz="1250" dirty="0">
+                <a:solidFill>
+                  <a:srgbClr val="1A2230"/>
+                </a:solidFill>
+                <a:latin typeface="Calibri" pitchFamily="34" charset="0"/>
+                <a:ea typeface="Calibri" pitchFamily="34" charset="-122"/>
+                <a:cs typeface="Calibri" pitchFamily="34" charset="-120"/>
+              </a:rPr>
+              <a:t>Every police district shaded by violent crime per month - the same green-to-red scale as the live map.</a:t>
+            </a:r>
+            <a:endParaRPr lang="en-US" sz="1250" dirty="0"/>
+          </a:p>
+        </p:txBody>
+      </p:sp>
+      <p:sp>
+        <p:nvSpPr>
+          <p:cNvPr id="6" name="Shape 3"/>
+          <p:cNvSpPr/>
+          <p:nvPr/>
+        </p:nvSpPr>
+        <p:spPr>
+          <a:xfrm>
+            <a:off x="6355080" y="2496312"/>
+            <a:ext cx="146304" cy="146304"/>
+          </a:xfrm>
+          <a:prstGeom prst="ellipse">
+            <a:avLst/>
+          </a:prstGeom>
+          <a:solidFill>
+            <a:srgbClr val="1F9D6B"/>
+          </a:solidFill>
+          <a:ln/>
+        </p:spPr>
+      </p:sp>
+      <p:sp>
+        <p:nvSpPr>
+          <p:cNvPr id="7" name="Text 4"/>
+          <p:cNvSpPr/>
+          <p:nvPr/>
+        </p:nvSpPr>
+        <p:spPr>
+          <a:xfrm>
+            <a:off x="6583680" y="2423160"/>
+            <a:ext cx="2240280" cy="685800"/>
+          </a:xfrm>
+          <a:prstGeom prst="rect">
+            <a:avLst/>
+          </a:prstGeom>
+          <a:noFill/>
+          <a:ln/>
+        </p:spPr>
+        <p:txBody>
+          <a:bodyPr wrap="square" lIns="0" tIns="0" rIns="0" bIns="0" rtlCol="0" anchor="ctr"/>
+          <a:lstStyle/>
+          <a:p>
+            <a:pPr indent="0" marL="0">
+              <a:lnSpc>
+                <a:spcPct val="105000"/>
+              </a:lnSpc>
+              <a:buNone/>
+            </a:pPr>
+            <a:r>
+              <a:rPr lang="en-US" sz="1100" b="1" dirty="0">
+                <a:solidFill>
+                  <a:srgbClr val="1F9D6B"/>
+                </a:solidFill>
+                <a:latin typeface="Calibri" pitchFamily="34" charset="0"/>
+                <a:ea typeface="Calibri" pitchFamily="34" charset="-122"/>
+                <a:cs typeface="Calibri" pitchFamily="34" charset="-120"/>
+              </a:rPr>
+              <a:t>Safe ring up north  </a:t>
+            </a:r>
+            <a:pPr indent="0" marL="0">
+              <a:lnSpc>
+                <a:spcPct val="105000"/>
+              </a:lnSpc>
+              <a:buNone/>
+            </a:pPr>
+            <a:r>
+              <a:rPr lang="en-US" sz="1100" dirty="0">
+                <a:solidFill>
+                  <a:srgbClr val="6B7585"/>
+                </a:solidFill>
+                <a:latin typeface="Calibri" pitchFamily="34" charset="0"/>
+                <a:ea typeface="Calibri" pitchFamily="34" charset="-122"/>
+                <a:cs typeface="Calibri" pitchFamily="34" charset="-120"/>
+              </a:rPr>
+              <a:t>Edgewater, Jefferson Park, Albany Park, Logan Square - all green.</a:t>
+            </a:r>
+            <a:endParaRPr lang="en-US" sz="1100" dirty="0"/>
+          </a:p>
+        </p:txBody>
+      </p:sp>
+      <p:sp>
+        <p:nvSpPr>
+          <p:cNvPr id="8" name="Shape 5"/>
+          <p:cNvSpPr/>
+          <p:nvPr/>
+        </p:nvSpPr>
+        <p:spPr>
+          <a:xfrm>
+            <a:off x="6355080" y="3209544"/>
+            <a:ext cx="146304" cy="146304"/>
+          </a:xfrm>
+          <a:prstGeom prst="ellipse">
+            <a:avLst/>
+          </a:prstGeom>
+          <a:solidFill>
+            <a:srgbClr val="D64541"/>
+          </a:solidFill>
+          <a:ln/>
+        </p:spPr>
+      </p:sp>
+      <p:sp>
+        <p:nvSpPr>
+          <p:cNvPr id="9" name="Text 6"/>
+          <p:cNvSpPr/>
+          <p:nvPr/>
+        </p:nvSpPr>
+        <p:spPr>
+          <a:xfrm>
+            <a:off x="6583680" y="3136392"/>
+            <a:ext cx="2240280" cy="685800"/>
+          </a:xfrm>
+          <a:prstGeom prst="rect">
+            <a:avLst/>
+          </a:prstGeom>
+          <a:noFill/>
+          <a:ln/>
+        </p:spPr>
+        <p:txBody>
+          <a:bodyPr wrap="square" lIns="0" tIns="0" rIns="0" bIns="0" rtlCol="0" anchor="ctr"/>
+          <a:lstStyle/>
+          <a:p>
+            <a:pPr indent="0" marL="0">
+              <a:lnSpc>
+                <a:spcPct val="105000"/>
+              </a:lnSpc>
+              <a:buNone/>
+            </a:pPr>
+            <a:r>
+              <a:rPr lang="en-US" sz="1100" b="1" dirty="0">
+                <a:solidFill>
+                  <a:srgbClr val="D64541"/>
+                </a:solidFill>
+                <a:latin typeface="Calibri" pitchFamily="34" charset="0"/>
+                <a:ea typeface="Calibri" pitchFamily="34" charset="-122"/>
+                <a:cs typeface="Calibri" pitchFamily="34" charset="-120"/>
+              </a:rPr>
+              <a:t>Hotter west &amp; south  </a:t>
+            </a:r>
+            <a:pPr indent="0" marL="0">
+              <a:lnSpc>
+                <a:spcPct val="105000"/>
+              </a:lnSpc>
+              <a:buNone/>
+            </a:pPr>
+            <a:r>
+              <a:rPr lang="en-US" sz="1100" dirty="0">
+                <a:solidFill>
+                  <a:srgbClr val="6B7585"/>
+                </a:solidFill>
+                <a:latin typeface="Calibri" pitchFamily="34" charset="0"/>
+                <a:ea typeface="Calibri" pitchFamily="34" charset="-122"/>
+                <a:cs typeface="Calibri" pitchFamily="34" charset="-120"/>
+              </a:rPr>
+              <a:t>Most red districts sit far from the office anyway.</a:t>
+            </a:r>
+            <a:endParaRPr lang="en-US" sz="1100" dirty="0"/>
+          </a:p>
+        </p:txBody>
+      </p:sp>
+      <p:sp>
+        <p:nvSpPr>
+          <p:cNvPr id="10" name="Shape 7"/>
+          <p:cNvSpPr/>
+          <p:nvPr/>
+        </p:nvSpPr>
+        <p:spPr>
+          <a:xfrm>
+            <a:off x="6355080" y="3922776"/>
+            <a:ext cx="146304" cy="146304"/>
+          </a:xfrm>
+          <a:prstGeom prst="ellipse">
+            <a:avLst/>
+          </a:prstGeom>
+          <a:solidFill>
+            <a:srgbClr val="14233A"/>
+          </a:solidFill>
+          <a:ln/>
+        </p:spPr>
+      </p:sp>
+      <p:sp>
+        <p:nvSpPr>
+          <p:cNvPr id="11" name="Text 8"/>
+          <p:cNvSpPr/>
+          <p:nvPr/>
+        </p:nvSpPr>
+        <p:spPr>
+          <a:xfrm>
+            <a:off x="6583680" y="3849624"/>
+            <a:ext cx="2240280" cy="685800"/>
+          </a:xfrm>
+          <a:prstGeom prst="rect">
+            <a:avLst/>
+          </a:prstGeom>
+          <a:noFill/>
+          <a:ln/>
+        </p:spPr>
+        <p:txBody>
+          <a:bodyPr wrap="square" lIns="0" tIns="0" rIns="0" bIns="0" rtlCol="0" anchor="ctr"/>
+          <a:lstStyle/>
+          <a:p>
+            <a:pPr indent="0" marL="0">
+              <a:lnSpc>
+                <a:spcPct val="105000"/>
+              </a:lnSpc>
+              <a:buNone/>
+            </a:pPr>
+            <a:r>
+              <a:rPr lang="en-US" sz="1100" b="1" dirty="0">
+                <a:solidFill>
+                  <a:srgbClr val="1A2230"/>
+                </a:solidFill>
+                <a:latin typeface="Calibri" pitchFamily="34" charset="0"/>
+                <a:ea typeface="Calibri" pitchFamily="34" charset="-122"/>
+                <a:cs typeface="Calibri" pitchFamily="34" charset="-120"/>
+              </a:rPr>
+              <a:t>HQ in the Loop  </a:t>
+            </a:r>
+            <a:pPr indent="0" marL="0">
+              <a:lnSpc>
+                <a:spcPct val="105000"/>
+              </a:lnSpc>
+              <a:buNone/>
+            </a:pPr>
+            <a:r>
+              <a:rPr lang="en-US" sz="1100" dirty="0">
+                <a:solidFill>
+                  <a:srgbClr val="6B7585"/>
+                </a:solidFill>
+                <a:latin typeface="Calibri" pitchFamily="34" charset="0"/>
+                <a:ea typeface="Calibri" pitchFamily="34" charset="-122"/>
+                <a:cs typeface="Calibri" pitchFamily="34" charset="-120"/>
+              </a:rPr>
+              <a:t>Central, busy, mid-range on violence - live near transit, not here.</a:t>
+            </a:r>
+            <a:endParaRPr lang="en-US" sz="1100" dirty="0"/>
+          </a:p>
+        </p:txBody>
+      </p:sp>
+      <p:sp>
+        <p:nvSpPr>
+          <p:cNvPr id="12" name="Text 9"/>
+          <p:cNvSpPr/>
+          <p:nvPr/>
+        </p:nvSpPr>
+        <p:spPr>
+          <a:xfrm>
+            <a:off x="365760" y="4864608"/>
+            <a:ext cx="5760720" cy="274320"/>
+          </a:xfrm>
+          <a:prstGeom prst="rect">
+            <a:avLst/>
+          </a:prstGeom>
+          <a:noFill/>
+          <a:ln/>
+        </p:spPr>
+        <p:txBody>
+          <a:bodyPr wrap="square" lIns="0" tIns="0" rIns="0" bIns="0" rtlCol="0" anchor="ctr"/>
+          <a:lstStyle/>
+          <a:p>
+            <a:pPr indent="0" marL="0">
+              <a:buNone/>
+            </a:pPr>
+            <a:r>
+              <a:rPr lang="en-US" sz="950" i="1" dirty="0">
+                <a:solidFill>
+                  <a:srgbClr val="6B7585"/>
+                </a:solidFill>
+                <a:latin typeface="Calibri" pitchFamily="34" charset="0"/>
+                <a:ea typeface="Calibri" pitchFamily="34" charset="-122"/>
+                <a:cs typeface="Calibri" pitchFamily="34" charset="-120"/>
+              </a:rPr>
+              <a:t>Reproduced from the dashboard's district layer (street basemap not shown).</a:t>
+            </a:r>
+            <a:endParaRPr lang="en-US" sz="950" dirty="0"/>
+          </a:p>
+        </p:txBody>
+      </p:sp>
+    </p:spTree>
+  </p:cSld>
+  <p:clrMapOvr>
+    <a:masterClrMapping/>
+  </p:clrMapOvr>
+</p:sld>
+</file>
+
+<file path=ppt/slides/slide12.xml><?xml version="1.0" encoding="utf-8"?>
+<p:sld xmlns:a="http://schemas.openxmlformats.org/drawingml/2006/main" xmlns:r="http://schemas.openxmlformats.org/officeDocument/2006/relationships" xmlns:p="http://schemas.openxmlformats.org/presentationml/2006/main">
+  <p:cSld name="Slide 12">
+    <p:bg>
+      <p:bgPr>
+        <a:solidFill>
+          <a:srgbClr val="FFFFFF"/>
+        </a:solidFill>
+      </p:bgPr>
+    </p:bg>
+    <p:spTree>
+      <p:nvGrpSpPr>
+        <p:cNvPr id="1" name=""/>
+        <p:cNvGrpSpPr/>
+        <p:nvPr/>
+      </p:nvGrpSpPr>
+      <p:grpSpPr>
+        <a:xfrm>
+          <a:off x="0" y="0"/>
+          <a:ext cx="0" cy="0"/>
+          <a:chOff x="0" y="0"/>
+          <a:chExt cx="0" cy="0"/>
+        </a:xfrm>
+      </p:grpSpPr>
+      <p:sp>
+        <p:nvSpPr>
+          <p:cNvPr id="2" name="Text 0"/>
+          <p:cNvSpPr/>
+          <p:nvPr/>
+        </p:nvSpPr>
+        <p:spPr>
+          <a:xfrm>
+            <a:off x="502920" y="384048"/>
+            <a:ext cx="8229600" cy="274320"/>
+          </a:xfrm>
+          <a:prstGeom prst="rect">
+            <a:avLst/>
+          </a:prstGeom>
+          <a:noFill/>
+          <a:ln/>
+        </p:spPr>
+        <p:txBody>
+          <a:bodyPr wrap="square" lIns="0" tIns="0" rIns="0" bIns="0" rtlCol="0" anchor="ctr"/>
+          <a:lstStyle/>
+          <a:p>
+            <a:pPr indent="0" marL="0">
+              <a:buNone/>
+            </a:pPr>
+            <a:r>
+              <a:rPr lang="en-US" sz="1200" b="1" spc="200" kern="0" dirty="0">
+                <a:solidFill>
+                  <a:srgbClr val="1F9D6B"/>
+                </a:solidFill>
+                <a:latin typeface="Calibri" pitchFamily="34" charset="0"/>
+                <a:ea typeface="Calibri" pitchFamily="34" charset="-122"/>
+                <a:cs typeface="Calibri" pitchFamily="34" charset="-120"/>
+              </a:rPr>
+              <a:t>09  ·  RECOMMENDATIONS</a:t>
+            </a:r>
+            <a:endParaRPr lang="en-US" sz="1200" dirty="0"/>
+          </a:p>
+        </p:txBody>
+      </p:sp>
+      <p:sp>
+        <p:nvSpPr>
+          <p:cNvPr id="3" name="Text 1"/>
+          <p:cNvSpPr/>
+          <p:nvPr/>
+        </p:nvSpPr>
+        <p:spPr>
+          <a:xfrm>
+            <a:off x="457200" y="603504"/>
+            <a:ext cx="8229600" cy="658368"/>
+          </a:xfrm>
+          <a:prstGeom prst="rect">
+            <a:avLst/>
+          </a:prstGeom>
+          <a:noFill/>
+          <a:ln/>
+        </p:spPr>
+        <p:txBody>
+          <a:bodyPr wrap="square" lIns="0" tIns="0" rIns="0" bIns="0" rtlCol="0" anchor="ctr"/>
+          <a:lstStyle/>
+          <a:p>
+            <a:pPr indent="0" marL="0">
+              <a:buNone/>
+            </a:pPr>
+            <a:r>
+              <a:rPr lang="en-US" sz="3000" b="1" dirty="0">
+                <a:solidFill>
+                  <a:srgbClr val="1A2230"/>
+                </a:solidFill>
+                <a:latin typeface="Cambria" pitchFamily="34" charset="0"/>
+                <a:ea typeface="Cambria" pitchFamily="34" charset="-122"/>
+                <a:cs typeface="Cambria" pitchFamily="34" charset="-120"/>
+              </a:rPr>
               <a:t>Five neighborhoods that fit</a:t>
             </a:r>
             <a:endParaRPr lang="en-US" sz="3000" dirty="0"/>
@@ -3110,7 +3477,7 @@
       </p:sp>
       <p:graphicFrame>
         <p:nvGraphicFramePr>
-          <p:cNvPr id="11" name="Table 0"/>
+          <p:cNvPr id="13" name="Table 0"/>
           <p:cNvGraphicFramePr>
             <a:graphicFrameLocks noGrp="1"/>
           </p:cNvGraphicFramePr>
@@ -3124,55 +3491,19 @@
         </p:nvGraphicFramePr>
         <p:xfrm>
           <a:off x="457200" y="1463040"/>
-          <a:ext cx="8229600" cy="2898648"/>
+          <a:ext cx="8229600" cy="914400"/>
         </p:xfrm>
         <a:graphic>
           <a:graphicData uri="http://schemas.openxmlformats.org/drawingml/2006/table">
             <a:tbl>
               <a:tblPr/>
               <a:tblGrid>
-                <a:gridCol w="457200">
-                  <a:extLst>
-                    <a:ext uri="{9D8B030D-6E8A-4147-A177-3AD203B41FA5}">
-                      <a16:colId xmlns:a16="http://schemas.microsoft.com/office/drawing/2014/main" val="20000"/>
-                    </a:ext>
-                  </a:extLst>
-                </a:gridCol>
-                <a:gridCol w="1783080">
-                  <a:extLst>
-                    <a:ext uri="{9D8B030D-6E8A-4147-A177-3AD203B41FA5}">
-                      <a16:colId xmlns:a16="http://schemas.microsoft.com/office/drawing/2014/main" val="20001"/>
-                    </a:ext>
-                  </a:extLst>
-                </a:gridCol>
-                <a:gridCol w="640080">
-                  <a:extLst>
-                    <a:ext uri="{9D8B030D-6E8A-4147-A177-3AD203B41FA5}">
-                      <a16:colId xmlns:a16="http://schemas.microsoft.com/office/drawing/2014/main" val="20002"/>
-                    </a:ext>
-                  </a:extLst>
-                </a:gridCol>
-                <a:gridCol w="1143000">
-                  <a:extLst>
-                    <a:ext uri="{9D8B030D-6E8A-4147-A177-3AD203B41FA5}">
-                      <a16:colId xmlns:a16="http://schemas.microsoft.com/office/drawing/2014/main" val="20003"/>
-                    </a:ext>
-                  </a:extLst>
-                </a:gridCol>
-                <a:gridCol w="3017520">
-                  <a:extLst>
-                    <a:ext uri="{9D8B030D-6E8A-4147-A177-3AD203B41FA5}">
-                      <a16:colId xmlns:a16="http://schemas.microsoft.com/office/drawing/2014/main" val="20004"/>
-                    </a:ext>
-                  </a:extLst>
-                </a:gridCol>
-                <a:gridCol w="1188720">
-                  <a:extLst>
-                    <a:ext uri="{9D8B030D-6E8A-4147-A177-3AD203B41FA5}">
-                      <a16:colId xmlns:a16="http://schemas.microsoft.com/office/drawing/2014/main" val="20005"/>
-                    </a:ext>
-                  </a:extLst>
-                </a:gridCol>
+                <a:gridCol w="457200"/>
+                <a:gridCol w="1783080"/>
+                <a:gridCol w="640080"/>
+                <a:gridCol w="1143000"/>
+                <a:gridCol w="3017520"/>
+                <a:gridCol w="1188720"/>
               </a:tblGrid>
               <a:tr h="384048">
                 <a:tc>
@@ -3180,7 +3511,7 @@
                     <a:bodyPr/>
                     <a:lstStyle/>
                     <a:p>
-                      <a:pPr marL="0" indent="0" algn="l">
+                      <a:pPr algn="l" indent="0" marL="0">
                         <a:buNone/>
                       </a:pPr>
                       <a:r>
@@ -3248,7 +3579,7 @@
                     <a:bodyPr/>
                     <a:lstStyle/>
                     <a:p>
-                      <a:pPr marL="0" indent="0" algn="l">
+                      <a:pPr algn="l" indent="0" marL="0">
                         <a:buNone/>
                       </a:pPr>
                       <a:r>
@@ -3316,7 +3647,7 @@
                     <a:bodyPr/>
                     <a:lstStyle/>
                     <a:p>
-                      <a:pPr marL="0" indent="0" algn="l">
+                      <a:pPr algn="l" indent="0" marL="0">
                         <a:buNone/>
                       </a:pPr>
                       <a:r>
@@ -3384,7 +3715,7 @@
                     <a:bodyPr/>
                     <a:lstStyle/>
                     <a:p>
-                      <a:pPr marL="0" indent="0" algn="l">
+                      <a:pPr algn="l" indent="0" marL="0">
                         <a:buNone/>
                       </a:pPr>
                       <a:r>
@@ -3452,7 +3783,7 @@
                     <a:bodyPr/>
                     <a:lstStyle/>
                     <a:p>
-                      <a:pPr marL="0" indent="0" algn="l">
+                      <a:pPr algn="l" indent="0" marL="0">
                         <a:buNone/>
                       </a:pPr>
                       <a:r>
@@ -3520,7 +3851,7 @@
                     <a:bodyPr/>
                     <a:lstStyle/>
                     <a:p>
-                      <a:pPr marL="0" indent="0" algn="l">
+                      <a:pPr algn="l" indent="0" marL="0">
                         <a:buNone/>
                       </a:pPr>
                       <a:r>
@@ -3583,11 +3914,6 @@
                     </a:solidFill>
                   </a:tcPr>
                 </a:tc>
-                <a:extLst>
-                  <a:ext uri="{0D108BD9-81ED-4DB2-BD59-A6C34878D82A}">
-                    <a16:rowId xmlns:a16="http://schemas.microsoft.com/office/drawing/2014/main" val="10000"/>
-                  </a:ext>
-                </a:extLst>
               </a:tr>
               <a:tr h="502920">
                 <a:tc>
@@ -3595,7 +3921,7 @@
                     <a:bodyPr/>
                     <a:lstStyle/>
                     <a:p>
-                      <a:pPr marL="0" indent="0" algn="l">
+                      <a:pPr algn="l" indent="0" marL="0">
                         <a:buNone/>
                       </a:pPr>
                       <a:r>
@@ -3663,7 +3989,7 @@
                     <a:bodyPr/>
                     <a:lstStyle/>
                     <a:p>
-                      <a:pPr marL="0" indent="0" algn="l">
+                      <a:pPr algn="l" indent="0" marL="0">
                         <a:buNone/>
                       </a:pPr>
                       <a:r>
@@ -3731,7 +4057,7 @@
                     <a:bodyPr/>
                     <a:lstStyle/>
                     <a:p>
-                      <a:pPr marL="0" indent="0" algn="l">
+                      <a:pPr algn="l" indent="0" marL="0">
                         <a:buNone/>
                       </a:pPr>
                       <a:r>
@@ -3799,7 +4125,7 @@
                     <a:bodyPr/>
                     <a:lstStyle/>
                     <a:p>
-                      <a:pPr marL="0" indent="0" algn="l">
+                      <a:pPr algn="l" indent="0" marL="0">
                         <a:buNone/>
                       </a:pPr>
                       <a:r>
@@ -3867,7 +4193,7 @@
                     <a:bodyPr/>
                     <a:lstStyle/>
                     <a:p>
-                      <a:pPr marL="0" indent="0" algn="l">
+                      <a:pPr algn="l" indent="0" marL="0">
                         <a:buNone/>
                       </a:pPr>
                       <a:r>
@@ -3935,7 +4261,7 @@
                     <a:bodyPr/>
                     <a:lstStyle/>
                     <a:p>
-                      <a:pPr marL="0" indent="0" algn="l">
+                      <a:pPr algn="l" indent="0" marL="0">
                         <a:buNone/>
                       </a:pPr>
                       <a:r>
@@ -3998,11 +4324,6 @@
                     </a:solidFill>
                   </a:tcPr>
                 </a:tc>
-                <a:extLst>
-                  <a:ext uri="{0D108BD9-81ED-4DB2-BD59-A6C34878D82A}">
-                    <a16:rowId xmlns:a16="http://schemas.microsoft.com/office/drawing/2014/main" val="10001"/>
-                  </a:ext>
-                </a:extLst>
               </a:tr>
               <a:tr h="502920">
                 <a:tc>
@@ -4010,7 +4331,7 @@
                     <a:bodyPr/>
                     <a:lstStyle/>
                     <a:p>
-                      <a:pPr marL="0" indent="0" algn="l">
+                      <a:pPr algn="l" indent="0" marL="0">
                         <a:buNone/>
                       </a:pPr>
                       <a:r>
@@ -4078,7 +4399,7 @@
                     <a:bodyPr/>
                     <a:lstStyle/>
                     <a:p>
-                      <a:pPr marL="0" indent="0" algn="l">
+                      <a:pPr algn="l" indent="0" marL="0">
                         <a:buNone/>
                       </a:pPr>
                       <a:r>
@@ -4146,7 +4467,7 @@
                     <a:bodyPr/>
                     <a:lstStyle/>
                     <a:p>
-                      <a:pPr marL="0" indent="0" algn="l">
+                      <a:pPr algn="l" indent="0" marL="0">
                         <a:buNone/>
                       </a:pPr>
                       <a:r>
@@ -4214,7 +4535,7 @@
                     <a:bodyPr/>
                     <a:lstStyle/>
                     <a:p>
-                      <a:pPr marL="0" indent="0" algn="l">
+                      <a:pPr algn="l" indent="0" marL="0">
                         <a:buNone/>
                       </a:pPr>
                       <a:r>
@@ -4282,7 +4603,7 @@
                     <a:bodyPr/>
                     <a:lstStyle/>
                     <a:p>
-                      <a:pPr marL="0" indent="0" algn="l">
+                      <a:pPr algn="l" indent="0" marL="0">
                         <a:buNone/>
                       </a:pPr>
                       <a:r>
@@ -4350,7 +4671,7 @@
                     <a:bodyPr/>
                     <a:lstStyle/>
                     <a:p>
-                      <a:pPr marL="0" indent="0" algn="l">
+                      <a:pPr algn="l" indent="0" marL="0">
                         <a:buNone/>
                       </a:pPr>
                       <a:r>
@@ -4413,11 +4734,6 @@
                     </a:solidFill>
                   </a:tcPr>
                 </a:tc>
-                <a:extLst>
-                  <a:ext uri="{0D108BD9-81ED-4DB2-BD59-A6C34878D82A}">
-                    <a16:rowId xmlns:a16="http://schemas.microsoft.com/office/drawing/2014/main" val="10002"/>
-                  </a:ext>
-                </a:extLst>
               </a:tr>
               <a:tr h="502920">
                 <a:tc>
@@ -4425,7 +4741,7 @@
                     <a:bodyPr/>
                     <a:lstStyle/>
                     <a:p>
-                      <a:pPr marL="0" indent="0" algn="l">
+                      <a:pPr algn="l" indent="0" marL="0">
                         <a:buNone/>
                       </a:pPr>
                       <a:r>
@@ -4493,7 +4809,7 @@
                     <a:bodyPr/>
                     <a:lstStyle/>
                     <a:p>
-                      <a:pPr marL="0" indent="0" algn="l">
+                      <a:pPr algn="l" indent="0" marL="0">
                         <a:buNone/>
                       </a:pPr>
                       <a:r>
@@ -4561,7 +4877,7 @@
                     <a:bodyPr/>
                     <a:lstStyle/>
                     <a:p>
-                      <a:pPr marL="0" indent="0" algn="l">
+                      <a:pPr algn="l" indent="0" marL="0">
                         <a:buNone/>
                       </a:pPr>
                       <a:r>
@@ -4629,7 +4945,7 @@
                     <a:bodyPr/>
                     <a:lstStyle/>
                     <a:p>
-                      <a:pPr marL="0" indent="0" algn="l">
+                      <a:pPr algn="l" indent="0" marL="0">
                         <a:buNone/>
                       </a:pPr>
                       <a:r>
@@ -4697,7 +5013,7 @@
                     <a:bodyPr/>
                     <a:lstStyle/>
                     <a:p>
-                      <a:pPr marL="0" indent="0" algn="l">
+                      <a:pPr algn="l" indent="0" marL="0">
                         <a:buNone/>
                       </a:pPr>
                       <a:r>
@@ -4765,7 +5081,7 @@
                     <a:bodyPr/>
                     <a:lstStyle/>
                     <a:p>
-                      <a:pPr marL="0" indent="0" algn="l">
+                      <a:pPr algn="l" indent="0" marL="0">
                         <a:buNone/>
                       </a:pPr>
                       <a:r>
@@ -4828,11 +5144,6 @@
                     </a:solidFill>
                   </a:tcPr>
                 </a:tc>
-                <a:extLst>
-                  <a:ext uri="{0D108BD9-81ED-4DB2-BD59-A6C34878D82A}">
-                    <a16:rowId xmlns:a16="http://schemas.microsoft.com/office/drawing/2014/main" val="10003"/>
-                  </a:ext>
-                </a:extLst>
               </a:tr>
               <a:tr h="502920">
                 <a:tc>
@@ -4840,7 +5151,7 @@
                     <a:bodyPr/>
                     <a:lstStyle/>
                     <a:p>
-                      <a:pPr marL="0" indent="0" algn="l">
+                      <a:pPr algn="l" indent="0" marL="0">
                         <a:buNone/>
                       </a:pPr>
                       <a:r>
@@ -4908,7 +5219,7 @@
                     <a:bodyPr/>
                     <a:lstStyle/>
                     <a:p>
-                      <a:pPr marL="0" indent="0" algn="l">
+                      <a:pPr algn="l" indent="0" marL="0">
                         <a:buNone/>
                       </a:pPr>
                       <a:r>
@@ -4976,7 +5287,7 @@
                     <a:bodyPr/>
                     <a:lstStyle/>
                     <a:p>
-                      <a:pPr marL="0" indent="0" algn="l">
+                      <a:pPr algn="l" indent="0" marL="0">
                         <a:buNone/>
                       </a:pPr>
                       <a:r>
@@ -5044,7 +5355,7 @@
                     <a:bodyPr/>
                     <a:lstStyle/>
                     <a:p>
-                      <a:pPr marL="0" indent="0" algn="l">
+                      <a:pPr algn="l" indent="0" marL="0">
                         <a:buNone/>
                       </a:pPr>
                       <a:r>
@@ -5112,7 +5423,7 @@
                     <a:bodyPr/>
                     <a:lstStyle/>
                     <a:p>
-                      <a:pPr marL="0" indent="0" algn="l">
+                      <a:pPr algn="l" indent="0" marL="0">
                         <a:buNone/>
                       </a:pPr>
                       <a:r>
@@ -5180,7 +5491,7 @@
                     <a:bodyPr/>
                     <a:lstStyle/>
                     <a:p>
-                      <a:pPr marL="0" indent="0" algn="l">
+                      <a:pPr algn="l" indent="0" marL="0">
                         <a:buNone/>
                       </a:pPr>
                       <a:r>
@@ -5243,11 +5554,6 @@
                     </a:solidFill>
                   </a:tcPr>
                 </a:tc>
-                <a:extLst>
-                  <a:ext uri="{0D108BD9-81ED-4DB2-BD59-A6C34878D82A}">
-                    <a16:rowId xmlns:a16="http://schemas.microsoft.com/office/drawing/2014/main" val="10004"/>
-                  </a:ext>
-                </a:extLst>
               </a:tr>
               <a:tr h="502920">
                 <a:tc>
@@ -5255,7 +5561,7 @@
                     <a:bodyPr/>
                     <a:lstStyle/>
                     <a:p>
-                      <a:pPr marL="0" indent="0" algn="l">
+                      <a:pPr algn="l" indent="0" marL="0">
                         <a:buNone/>
                       </a:pPr>
                       <a:r>
@@ -5323,7 +5629,7 @@
                     <a:bodyPr/>
                     <a:lstStyle/>
                     <a:p>
-                      <a:pPr marL="0" indent="0" algn="l">
+                      <a:pPr algn="l" indent="0" marL="0">
                         <a:buNone/>
                       </a:pPr>
                       <a:r>
@@ -5391,7 +5697,7 @@
                     <a:bodyPr/>
                     <a:lstStyle/>
                     <a:p>
-                      <a:pPr marL="0" indent="0" algn="l">
+                      <a:pPr algn="l" indent="0" marL="0">
                         <a:buNone/>
                       </a:pPr>
                       <a:r>
@@ -5459,7 +5765,7 @@
                     <a:bodyPr/>
                     <a:lstStyle/>
                     <a:p>
-                      <a:pPr marL="0" indent="0" algn="l">
+                      <a:pPr algn="l" indent="0" marL="0">
                         <a:buNone/>
                       </a:pPr>
                       <a:r>
@@ -5527,7 +5833,7 @@
                     <a:bodyPr/>
                     <a:lstStyle/>
                     <a:p>
-                      <a:pPr marL="0" indent="0" algn="l">
+                      <a:pPr algn="l" indent="0" marL="0">
                         <a:buNone/>
                       </a:pPr>
                       <a:r>
@@ -5595,7 +5901,7 @@
                     <a:bodyPr/>
                     <a:lstStyle/>
                     <a:p>
-                      <a:pPr marL="0" indent="0" algn="l">
+                      <a:pPr algn="l" indent="0" marL="0">
                         <a:buNone/>
                       </a:pPr>
                       <a:r>
@@ -5658,11 +5964,6 @@
                     </a:solidFill>
                   </a:tcPr>
                 </a:tc>
-                <a:extLst>
-                  <a:ext uri="{0D108BD9-81ED-4DB2-BD59-A6C34878D82A}">
-                    <a16:rowId xmlns:a16="http://schemas.microsoft.com/office/drawing/2014/main" val="10005"/>
-                  </a:ext>
-                </a:extLst>
               </a:tr>
             </a:tbl>
           </a:graphicData>
@@ -5689,7 +5990,7 @@
           <a:bodyPr wrap="square" lIns="0" tIns="0" rIns="0" bIns="0" rtlCol="0" anchor="ctr"/>
           <a:lstStyle/>
           <a:p>
-            <a:pPr marL="0" indent="0">
+            <a:pPr indent="0" marL="0">
               <a:buNone/>
             </a:pPr>
             <a:r>
@@ -5703,6 +6004,9 @@
               </a:rPr>
               <a:t>Top pick: Edgewater</a:t>
             </a:r>
+            <a:pPr indent="0" marL="0">
+              <a:buNone/>
+            </a:pPr>
             <a:r>
               <a:rPr lang="en-US" sz="1250" dirty="0">
                 <a:solidFill>
@@ -5714,6 +6018,9 @@
               </a:rPr>
               <a:t>  - safest overall.   </a:t>
             </a:r>
+            <a:pPr indent="0" marL="0">
+              <a:buNone/>
+            </a:pPr>
             <a:r>
               <a:rPr lang="en-US" sz="1250" b="1" dirty="0">
                 <a:solidFill>
@@ -5725,6 +6032,9 @@
               </a:rPr>
               <a:t>Easiest commute: Beverly</a:t>
             </a:r>
+            <a:pPr indent="0" marL="0">
+              <a:buNone/>
+            </a:pPr>
             <a:r>
               <a:rPr lang="en-US" sz="1250" dirty="0">
                 <a:solidFill>
@@ -5748,15 +6058,14 @@
 </p:sld>
 </file>
 
-<file path=ppt/slides/slide11.xml><?xml version="1.0" encoding="utf-8"?>
+<file path=ppt/slides/slide13.xml><?xml version="1.0" encoding="utf-8"?>
 <p:sld xmlns:a="http://schemas.openxmlformats.org/drawingml/2006/main" xmlns:r="http://schemas.openxmlformats.org/officeDocument/2006/relationships" xmlns:p="http://schemas.openxmlformats.org/presentationml/2006/main">
-  <p:cSld name="Slide 11">
+  <p:cSld name="Slide 13">
     <p:bg>
       <p:bgPr>
         <a:solidFill>
           <a:srgbClr val="14233A"/>
         </a:solidFill>
-        <a:effectLst/>
       </p:bgPr>
     </p:bg>
     <p:spTree>
@@ -5794,11 +6103,11 @@
           <a:bodyPr wrap="square" lIns="0" tIns="0" rIns="0" bIns="0" rtlCol="0" anchor="ctr"/>
           <a:lstStyle/>
           <a:p>
-            <a:pPr marL="0" indent="0">
-              <a:buNone/>
-            </a:pPr>
-            <a:r>
-              <a:rPr lang="en-US" sz="1200" b="1" kern="0" spc="200" dirty="0">
+            <a:pPr indent="0" marL="0">
+              <a:buNone/>
+            </a:pPr>
+            <a:r>
+              <a:rPr lang="en-US" sz="1200" b="1" spc="200" kern="0" dirty="0">
                 <a:solidFill>
                   <a:srgbClr val="9FE3C8"/>
                 </a:solidFill>
@@ -5833,7 +6142,7 @@
           <a:bodyPr wrap="square" lIns="0" tIns="0" rIns="0" bIns="0" rtlCol="0" anchor="ctr"/>
           <a:lstStyle/>
           <a:p>
-            <a:pPr marL="0" indent="0">
+            <a:pPr indent="0" marL="0">
               <a:buNone/>
             </a:pPr>
             <a:r>
@@ -5872,13 +6181,6 @@
           </a:solidFill>
           <a:ln/>
         </p:spPr>
-        <p:txBody>
-          <a:bodyPr/>
-          <a:lstStyle/>
-          <a:p>
-            <a:endParaRPr lang="en-US"/>
-          </a:p>
-        </p:txBody>
       </p:sp>
       <p:sp>
         <p:nvSpPr>
@@ -5899,24 +6201,325 @@
           </a:solidFill>
           <a:ln/>
           <a:effectLst>
-            <a:outerShdw blurRad="88900" dist="38100" dir="5400000" algn="bl" rotWithShape="0">
+            <a:outerShdw sx="100000" sy="100000" kx="0" ky="0" algn="bl" rotWithShape="0" blurRad="88900" dist="38100" dir="5400000">
               <a:srgbClr val="8794A8">
                 <a:alpha val="22000"/>
               </a:srgbClr>
             </a:outerShdw>
           </a:effectLst>
         </p:spPr>
-        <p:txBody>
-          <a:bodyPr/>
-          <a:lstStyle/>
-          <a:p>
-            <a:endParaRPr lang="en-US"/>
-          </a:p>
-        </p:txBody>
       </p:sp>
       <p:pic>
         <p:nvPicPr>
-          <p:cNvPr id="6" name="Image 0" descr="preencoded.png"/>
+          <p:cNvPr id="6" name="Image 0" descr="preencoded.png">    </p:cNvPr>
+          <p:cNvPicPr>
+            <a:picLocks noChangeAspect="1"/>
+          </p:cNvPicPr>
+          <p:nvPr/>
+        </p:nvPicPr>
+        <p:blipFill>
+          <a:blip r:embed="rId1"/>
+          <a:stretch>
+            <a:fillRect/>
+          </a:stretch>
+        </p:blipFill>
+        <p:spPr>
+          <a:xfrm>
+            <a:off x="882396" y="1961388"/>
+            <a:ext cx="329184" cy="329184"/>
+          </a:xfrm>
+          <a:prstGeom prst="rect">
+            <a:avLst/>
+          </a:prstGeom>
+        </p:spPr>
+      </p:pic>
+      <p:sp>
+        <p:nvSpPr>
+          <p:cNvPr id="7" name="Text 4"/>
+          <p:cNvSpPr/>
+          <p:nvPr/>
+        </p:nvSpPr>
+        <p:spPr>
+          <a:xfrm>
+            <a:off x="1554480" y="1709928"/>
+            <a:ext cx="2788920" cy="365760"/>
+          </a:xfrm>
+          <a:prstGeom prst="rect">
+            <a:avLst/>
+          </a:prstGeom>
+          <a:noFill/>
+          <a:ln/>
+        </p:spPr>
+        <p:txBody>
+          <a:bodyPr wrap="square" lIns="0" tIns="0" rIns="0" bIns="0" rtlCol="0" anchor="ctr"/>
+          <a:lstStyle/>
+          <a:p>
+            <a:pPr indent="0" marL="0">
+              <a:buNone/>
+            </a:pPr>
+            <a:r>
+              <a:rPr lang="en-US" sz="1600" b="1" dirty="0">
+                <a:solidFill>
+                  <a:srgbClr val="FFFFFF"/>
+                </a:solidFill>
+                <a:latin typeface="Cambria" pitchFamily="34" charset="0"/>
+                <a:ea typeface="Cambria" pitchFamily="34" charset="-122"/>
+                <a:cs typeface="Cambria" pitchFamily="34" charset="-120"/>
+              </a:rPr>
+              <a:t>Map any layer</a:t>
+            </a:r>
+            <a:endParaRPr lang="en-US" sz="1600" dirty="0"/>
+          </a:p>
+        </p:txBody>
+      </p:sp>
+      <p:sp>
+        <p:nvSpPr>
+          <p:cNvPr id="8" name="Text 5"/>
+          <p:cNvSpPr/>
+          <p:nvPr/>
+        </p:nvSpPr>
+        <p:spPr>
+          <a:xfrm>
+            <a:off x="1554480" y="2075688"/>
+            <a:ext cx="2834640" cy="548640"/>
+          </a:xfrm>
+          <a:prstGeom prst="rect">
+            <a:avLst/>
+          </a:prstGeom>
+          <a:noFill/>
+          <a:ln/>
+        </p:spPr>
+        <p:txBody>
+          <a:bodyPr wrap="square" lIns="0" tIns="0" rIns="0" bIns="0" rtlCol="0" anchor="ctr"/>
+          <a:lstStyle/>
+          <a:p>
+            <a:pPr indent="0" marL="0">
+              <a:lnSpc>
+                <a:spcPct val="108000"/>
+              </a:lnSpc>
+              <a:buNone/>
+            </a:pPr>
+            <a:r>
+              <a:rPr lang="en-US" sz="1150" dirty="0">
+                <a:solidFill>
+                  <a:srgbClr val="DCE6F5"/>
+                </a:solidFill>
+                <a:latin typeface="Calibri" pitchFamily="34" charset="0"/>
+                <a:ea typeface="Calibri" pitchFamily="34" charset="-122"/>
+                <a:cs typeface="Calibri" pitchFamily="34" charset="-120"/>
+              </a:rPr>
+              <a:t>Shade districts, wards, or beats by violent or total crime.</a:t>
+            </a:r>
+            <a:endParaRPr lang="en-US" sz="1150" dirty="0"/>
+          </a:p>
+        </p:txBody>
+      </p:sp>
+      <p:sp>
+        <p:nvSpPr>
+          <p:cNvPr id="9" name="Shape 6"/>
+          <p:cNvSpPr/>
+          <p:nvPr/>
+        </p:nvSpPr>
+        <p:spPr>
+          <a:xfrm>
+            <a:off x="4754880" y="1508760"/>
+            <a:ext cx="4023360" cy="1234440"/>
+          </a:xfrm>
+          <a:prstGeom prst="roundRect">
+            <a:avLst>
+              <a:gd name="adj" fmla="val 5926"/>
+            </a:avLst>
+          </a:prstGeom>
+          <a:solidFill>
+            <a:srgbClr val="223456"/>
+          </a:solidFill>
+          <a:ln/>
+        </p:spPr>
+      </p:sp>
+      <p:sp>
+        <p:nvSpPr>
+          <p:cNvPr id="10" name="Shape 7"/>
+          <p:cNvSpPr/>
+          <p:nvPr/>
+        </p:nvSpPr>
+        <p:spPr>
+          <a:xfrm>
+            <a:off x="4956048" y="1783080"/>
+            <a:ext cx="685800" cy="685800"/>
+          </a:xfrm>
+          <a:prstGeom prst="ellipse">
+            <a:avLst/>
+          </a:prstGeom>
+          <a:solidFill>
+            <a:srgbClr val="16314F"/>
+          </a:solidFill>
+          <a:ln/>
+          <a:effectLst>
+            <a:outerShdw sx="100000" sy="100000" kx="0" ky="0" algn="bl" rotWithShape="0" blurRad="88900" dist="38100" dir="5400000">
+              <a:srgbClr val="8794A8">
+                <a:alpha val="22000"/>
+              </a:srgbClr>
+            </a:outerShdw>
+          </a:effectLst>
+        </p:spPr>
+      </p:sp>
+      <p:pic>
+        <p:nvPicPr>
+          <p:cNvPr id="11" name="Image 1" descr="preencoded.png">    </p:cNvPr>
+          <p:cNvPicPr>
+            <a:picLocks noChangeAspect="1"/>
+          </p:cNvPicPr>
+          <p:nvPr/>
+        </p:nvPicPr>
+        <p:blipFill>
+          <a:blip r:embed="rId2"/>
+          <a:stretch>
+            <a:fillRect/>
+          </a:stretch>
+        </p:blipFill>
+        <p:spPr>
+          <a:xfrm>
+            <a:off x="5134356" y="1961388"/>
+            <a:ext cx="329184" cy="329184"/>
+          </a:xfrm>
+          <a:prstGeom prst="rect">
+            <a:avLst/>
+          </a:prstGeom>
+        </p:spPr>
+      </p:pic>
+      <p:sp>
+        <p:nvSpPr>
+          <p:cNvPr id="12" name="Text 8"/>
+          <p:cNvSpPr/>
+          <p:nvPr/>
+        </p:nvSpPr>
+        <p:spPr>
+          <a:xfrm>
+            <a:off x="5806440" y="1709928"/>
+            <a:ext cx="2788920" cy="365760"/>
+          </a:xfrm>
+          <a:prstGeom prst="rect">
+            <a:avLst/>
+          </a:prstGeom>
+          <a:noFill/>
+          <a:ln/>
+        </p:spPr>
+        <p:txBody>
+          <a:bodyPr wrap="square" lIns="0" tIns="0" rIns="0" bIns="0" rtlCol="0" anchor="ctr"/>
+          <a:lstStyle/>
+          <a:p>
+            <a:pPr indent="0" marL="0">
+              <a:buNone/>
+            </a:pPr>
+            <a:r>
+              <a:rPr lang="en-US" sz="1600" b="1" dirty="0">
+                <a:solidFill>
+                  <a:srgbClr val="FFFFFF"/>
+                </a:solidFill>
+                <a:latin typeface="Cambria" pitchFamily="34" charset="0"/>
+                <a:ea typeface="Cambria" pitchFamily="34" charset="-122"/>
+                <a:cs typeface="Cambria" pitchFamily="34" charset="-120"/>
+              </a:rPr>
+              <a:t>Search any address</a:t>
+            </a:r>
+            <a:endParaRPr lang="en-US" sz="1600" dirty="0"/>
+          </a:p>
+        </p:txBody>
+      </p:sp>
+      <p:sp>
+        <p:nvSpPr>
+          <p:cNvPr id="13" name="Text 9"/>
+          <p:cNvSpPr/>
+          <p:nvPr/>
+        </p:nvSpPr>
+        <p:spPr>
+          <a:xfrm>
+            <a:off x="5806440" y="2075688"/>
+            <a:ext cx="2834640" cy="548640"/>
+          </a:xfrm>
+          <a:prstGeom prst="rect">
+            <a:avLst/>
+          </a:prstGeom>
+          <a:noFill/>
+          <a:ln/>
+        </p:spPr>
+        <p:txBody>
+          <a:bodyPr wrap="square" lIns="0" tIns="0" rIns="0" bIns="0" rtlCol="0" anchor="ctr"/>
+          <a:lstStyle/>
+          <a:p>
+            <a:pPr indent="0" marL="0">
+              <a:lnSpc>
+                <a:spcPct val="108000"/>
+              </a:lnSpc>
+              <a:buNone/>
+            </a:pPr>
+            <a:r>
+              <a:rPr lang="en-US" sz="1150" dirty="0">
+                <a:solidFill>
+                  <a:srgbClr val="DCE6F5"/>
+                </a:solidFill>
+                <a:latin typeface="Calibri" pitchFamily="34" charset="0"/>
+                <a:ea typeface="Calibri" pitchFamily="34" charset="-122"/>
+                <a:cs typeface="Calibri" pitchFamily="34" charset="-120"/>
+              </a:rPr>
+              <a:t>Get its ½-mile crime count and nearest CTA/Metra stop.</a:t>
+            </a:r>
+            <a:endParaRPr lang="en-US" sz="1150" dirty="0"/>
+          </a:p>
+        </p:txBody>
+      </p:sp>
+      <p:sp>
+        <p:nvSpPr>
+          <p:cNvPr id="14" name="Shape 10"/>
+          <p:cNvSpPr/>
+          <p:nvPr/>
+        </p:nvSpPr>
+        <p:spPr>
+          <a:xfrm>
+            <a:off x="502920" y="2926080"/>
+            <a:ext cx="4023360" cy="1234440"/>
+          </a:xfrm>
+          <a:prstGeom prst="roundRect">
+            <a:avLst>
+              <a:gd name="adj" fmla="val 5926"/>
+            </a:avLst>
+          </a:prstGeom>
+          <a:solidFill>
+            <a:srgbClr val="223456"/>
+          </a:solidFill>
+          <a:ln/>
+        </p:spPr>
+      </p:sp>
+      <p:sp>
+        <p:nvSpPr>
+          <p:cNvPr id="15" name="Shape 11"/>
+          <p:cNvSpPr/>
+          <p:nvPr/>
+        </p:nvSpPr>
+        <p:spPr>
+          <a:xfrm>
+            <a:off x="704088" y="3200400"/>
+            <a:ext cx="685800" cy="685800"/>
+          </a:xfrm>
+          <a:prstGeom prst="ellipse">
+            <a:avLst/>
+          </a:prstGeom>
+          <a:solidFill>
+            <a:srgbClr val="16314F"/>
+          </a:solidFill>
+          <a:ln/>
+          <a:effectLst>
+            <a:outerShdw sx="100000" sy="100000" kx="0" ky="0" algn="bl" rotWithShape="0" blurRad="88900" dist="38100" dir="5400000">
+              <a:srgbClr val="8794A8">
+                <a:alpha val="22000"/>
+              </a:srgbClr>
+            </a:outerShdw>
+          </a:effectLst>
+        </p:spPr>
+      </p:sp>
+      <p:pic>
+        <p:nvPicPr>
+          <p:cNvPr id="16" name="Image 2" descr="preencoded.png">    </p:cNvPr>
           <p:cNvPicPr>
             <a:picLocks noChangeAspect="1"/>
           </p:cNvPicPr>
@@ -5930,7 +6533,7 @@
         </p:blipFill>
         <p:spPr>
           <a:xfrm>
-            <a:off x="882396" y="1961388"/>
+            <a:off x="882396" y="3378708"/>
             <a:ext cx="329184" cy="329184"/>
           </a:xfrm>
           <a:prstGeom prst="rect">
@@ -5940,13 +6543,13 @@
       </p:pic>
       <p:sp>
         <p:nvSpPr>
-          <p:cNvPr id="7" name="Text 4"/>
-          <p:cNvSpPr/>
-          <p:nvPr/>
-        </p:nvSpPr>
-        <p:spPr>
-          <a:xfrm>
-            <a:off x="1554480" y="1709928"/>
+          <p:cNvPr id="17" name="Text 12"/>
+          <p:cNvSpPr/>
+          <p:nvPr/>
+        </p:nvSpPr>
+        <p:spPr>
+          <a:xfrm>
+            <a:off x="1554480" y="3127248"/>
             <a:ext cx="2788920" cy="365760"/>
           </a:xfrm>
           <a:prstGeom prst="rect">
@@ -5959,7 +6562,7 @@
           <a:bodyPr wrap="square" lIns="0" tIns="0" rIns="0" bIns="0" rtlCol="0" anchor="ctr"/>
           <a:lstStyle/>
           <a:p>
-            <a:pPr marL="0" indent="0">
+            <a:pPr indent="0" marL="0">
               <a:buNone/>
             </a:pPr>
             <a:r>
@@ -5971,7 +6574,7 @@
                 <a:ea typeface="Cambria" pitchFamily="34" charset="-122"/>
                 <a:cs typeface="Cambria" pitchFamily="34" charset="-120"/>
               </a:rPr>
-              <a:t>Map any layer</a:t>
+              <a:t>Compare the commute</a:t>
             </a:r>
             <a:endParaRPr lang="en-US" sz="1600" dirty="0"/>
           </a:p>
@@ -5979,13 +6582,13 @@
       </p:sp>
       <p:sp>
         <p:nvSpPr>
-          <p:cNvPr id="8" name="Text 5"/>
-          <p:cNvSpPr/>
-          <p:nvPr/>
-        </p:nvSpPr>
-        <p:spPr>
-          <a:xfrm>
-            <a:off x="1554480" y="2075688"/>
+          <p:cNvPr id="18" name="Text 13"/>
+          <p:cNvSpPr/>
+          <p:nvPr/>
+        </p:nvSpPr>
+        <p:spPr>
+          <a:xfrm>
+            <a:off x="1554480" y="3493008"/>
             <a:ext cx="2834640" cy="548640"/>
           </a:xfrm>
           <a:prstGeom prst="rect">
@@ -5998,7 +6601,7 @@
           <a:bodyPr wrap="square" lIns="0" tIns="0" rIns="0" bIns="0" rtlCol="0" anchor="ctr"/>
           <a:lstStyle/>
           <a:p>
-            <a:pPr marL="0" indent="0">
+            <a:pPr indent="0" marL="0">
               <a:lnSpc>
                 <a:spcPct val="108000"/>
               </a:lnSpc>
@@ -6013,7 +6616,7 @@
                 <a:ea typeface="Calibri" pitchFamily="34" charset="-122"/>
                 <a:cs typeface="Calibri" pitchFamily="34" charset="-120"/>
               </a:rPr>
-              <a:t>Shade districts, wards, or beats by violent or total crime.</a:t>
+              <a:t>Live driving route + walk + transit time to the Loop.</a:t>
             </a:r>
             <a:endParaRPr lang="en-US" sz="1150" dirty="0"/>
           </a:p>
@@ -6021,13 +6624,13 @@
       </p:sp>
       <p:sp>
         <p:nvSpPr>
-          <p:cNvPr id="9" name="Shape 6"/>
-          <p:cNvSpPr/>
-          <p:nvPr/>
-        </p:nvSpPr>
-        <p:spPr>
-          <a:xfrm>
-            <a:off x="4754880" y="1508760"/>
+          <p:cNvPr id="19" name="Shape 14"/>
+          <p:cNvSpPr/>
+          <p:nvPr/>
+        </p:nvSpPr>
+        <p:spPr>
+          <a:xfrm>
+            <a:off x="4754880" y="2926080"/>
             <a:ext cx="4023360" cy="1234440"/>
           </a:xfrm>
           <a:prstGeom prst="roundRect">
@@ -6040,23 +6643,16 @@
           </a:solidFill>
           <a:ln/>
         </p:spPr>
-        <p:txBody>
-          <a:bodyPr/>
-          <a:lstStyle/>
-          <a:p>
-            <a:endParaRPr lang="en-US"/>
-          </a:p>
-        </p:txBody>
-      </p:sp>
-      <p:sp>
-        <p:nvSpPr>
-          <p:cNvPr id="10" name="Shape 7"/>
-          <p:cNvSpPr/>
-          <p:nvPr/>
-        </p:nvSpPr>
-        <p:spPr>
-          <a:xfrm>
-            <a:off x="4956048" y="1783080"/>
+      </p:sp>
+      <p:sp>
+        <p:nvSpPr>
+          <p:cNvPr id="20" name="Shape 15"/>
+          <p:cNvSpPr/>
+          <p:nvPr/>
+        </p:nvSpPr>
+        <p:spPr>
+          <a:xfrm>
+            <a:off x="4956048" y="3200400"/>
             <a:ext cx="685800" cy="685800"/>
           </a:xfrm>
           <a:prstGeom prst="ellipse">
@@ -6067,24 +6663,17 @@
           </a:solidFill>
           <a:ln/>
           <a:effectLst>
-            <a:outerShdw blurRad="88900" dist="38100" dir="5400000" algn="bl" rotWithShape="0">
+            <a:outerShdw sx="100000" sy="100000" kx="0" ky="0" algn="bl" rotWithShape="0" blurRad="88900" dist="38100" dir="5400000">
               <a:srgbClr val="8794A8">
                 <a:alpha val="22000"/>
               </a:srgbClr>
             </a:outerShdw>
           </a:effectLst>
         </p:spPr>
-        <p:txBody>
-          <a:bodyPr/>
-          <a:lstStyle/>
-          <a:p>
-            <a:endParaRPr lang="en-US"/>
-          </a:p>
-        </p:txBody>
       </p:sp>
       <p:pic>
         <p:nvPicPr>
-          <p:cNvPr id="11" name="Image 1" descr="preencoded.png"/>
+          <p:cNvPr id="21" name="Image 3" descr="preencoded.png">    </p:cNvPr>
           <p:cNvPicPr>
             <a:picLocks noChangeAspect="1"/>
           </p:cNvPicPr>
@@ -6098,7 +6687,7 @@
         </p:blipFill>
         <p:spPr>
           <a:xfrm>
-            <a:off x="5134356" y="1961388"/>
+            <a:off x="5134356" y="3378708"/>
             <a:ext cx="329184" cy="329184"/>
           </a:xfrm>
           <a:prstGeom prst="rect">
@@ -6108,13 +6697,13 @@
       </p:pic>
       <p:sp>
         <p:nvSpPr>
-          <p:cNvPr id="12" name="Text 8"/>
-          <p:cNvSpPr/>
-          <p:nvPr/>
-        </p:nvSpPr>
-        <p:spPr>
-          <a:xfrm>
-            <a:off x="5806440" y="1709928"/>
+          <p:cNvPr id="22" name="Text 16"/>
+          <p:cNvSpPr/>
+          <p:nvPr/>
+        </p:nvSpPr>
+        <p:spPr>
+          <a:xfrm>
+            <a:off x="5806440" y="3127248"/>
             <a:ext cx="2788920" cy="365760"/>
           </a:xfrm>
           <a:prstGeom prst="rect">
@@ -6127,7 +6716,7 @@
           <a:bodyPr wrap="square" lIns="0" tIns="0" rIns="0" bIns="0" rtlCol="0" anchor="ctr"/>
           <a:lstStyle/>
           <a:p>
-            <a:pPr marL="0" indent="0">
+            <a:pPr indent="0" marL="0">
               <a:buNone/>
             </a:pPr>
             <a:r>
@@ -6139,7 +6728,7 @@
                 <a:ea typeface="Cambria" pitchFamily="34" charset="-122"/>
                 <a:cs typeface="Cambria" pitchFamily="34" charset="-120"/>
               </a:rPr>
-              <a:t>Search any address</a:t>
+              <a:t>Smart recommendation</a:t>
             </a:r>
             <a:endParaRPr lang="en-US" sz="1600" dirty="0"/>
           </a:p>
@@ -6147,13 +6736,13 @@
       </p:sp>
       <p:sp>
         <p:nvSpPr>
-          <p:cNvPr id="13" name="Text 9"/>
-          <p:cNvSpPr/>
-          <p:nvPr/>
-        </p:nvSpPr>
-        <p:spPr>
-          <a:xfrm>
-            <a:off x="5806440" y="2075688"/>
+          <p:cNvPr id="23" name="Text 17"/>
+          <p:cNvSpPr/>
+          <p:nvPr/>
+        </p:nvSpPr>
+        <p:spPr>
+          <a:xfrm>
+            <a:off x="5806440" y="3493008"/>
             <a:ext cx="2834640" cy="548640"/>
           </a:xfrm>
           <a:prstGeom prst="rect">
@@ -6166,7 +6755,7 @@
           <a:bodyPr wrap="square" lIns="0" tIns="0" rIns="0" bIns="0" rtlCol="0" anchor="ctr"/>
           <a:lstStyle/>
           <a:p>
-            <a:pPr marL="0" indent="0">
+            <a:pPr indent="0" marL="0">
               <a:lnSpc>
                 <a:spcPct val="108000"/>
               </a:lnSpc>
@@ -6181,342 +6770,6 @@
                 <a:ea typeface="Calibri" pitchFamily="34" charset="-122"/>
                 <a:cs typeface="Calibri" pitchFamily="34" charset="-120"/>
               </a:rPr>
-              <a:t>Get its ½-mile crime count and nearest CTA/Metra stop.</a:t>
-            </a:r>
-            <a:endParaRPr lang="en-US" sz="1150" dirty="0"/>
-          </a:p>
-        </p:txBody>
-      </p:sp>
-      <p:sp>
-        <p:nvSpPr>
-          <p:cNvPr id="14" name="Shape 10"/>
-          <p:cNvSpPr/>
-          <p:nvPr/>
-        </p:nvSpPr>
-        <p:spPr>
-          <a:xfrm>
-            <a:off x="502920" y="2926080"/>
-            <a:ext cx="4023360" cy="1234440"/>
-          </a:xfrm>
-          <a:prstGeom prst="roundRect">
-            <a:avLst>
-              <a:gd name="adj" fmla="val 5926"/>
-            </a:avLst>
-          </a:prstGeom>
-          <a:solidFill>
-            <a:srgbClr val="223456"/>
-          </a:solidFill>
-          <a:ln/>
-        </p:spPr>
-        <p:txBody>
-          <a:bodyPr/>
-          <a:lstStyle/>
-          <a:p>
-            <a:endParaRPr lang="en-US"/>
-          </a:p>
-        </p:txBody>
-      </p:sp>
-      <p:sp>
-        <p:nvSpPr>
-          <p:cNvPr id="15" name="Shape 11"/>
-          <p:cNvSpPr/>
-          <p:nvPr/>
-        </p:nvSpPr>
-        <p:spPr>
-          <a:xfrm>
-            <a:off x="704088" y="3200400"/>
-            <a:ext cx="685800" cy="685800"/>
-          </a:xfrm>
-          <a:prstGeom prst="ellipse">
-            <a:avLst/>
-          </a:prstGeom>
-          <a:solidFill>
-            <a:srgbClr val="16314F"/>
-          </a:solidFill>
-          <a:ln/>
-          <a:effectLst>
-            <a:outerShdw blurRad="88900" dist="38100" dir="5400000" algn="bl" rotWithShape="0">
-              <a:srgbClr val="8794A8">
-                <a:alpha val="22000"/>
-              </a:srgbClr>
-            </a:outerShdw>
-          </a:effectLst>
-        </p:spPr>
-        <p:txBody>
-          <a:bodyPr/>
-          <a:lstStyle/>
-          <a:p>
-            <a:endParaRPr lang="en-US"/>
-          </a:p>
-        </p:txBody>
-      </p:sp>
-      <p:pic>
-        <p:nvPicPr>
-          <p:cNvPr id="16" name="Image 2" descr="preencoded.png"/>
-          <p:cNvPicPr>
-            <a:picLocks noChangeAspect="1"/>
-          </p:cNvPicPr>
-          <p:nvPr/>
-        </p:nvPicPr>
-        <p:blipFill>
-          <a:blip r:embed="rId5"/>
-          <a:stretch>
-            <a:fillRect/>
-          </a:stretch>
-        </p:blipFill>
-        <p:spPr>
-          <a:xfrm>
-            <a:off x="882396" y="3378708"/>
-            <a:ext cx="329184" cy="329184"/>
-          </a:xfrm>
-          <a:prstGeom prst="rect">
-            <a:avLst/>
-          </a:prstGeom>
-        </p:spPr>
-      </p:pic>
-      <p:sp>
-        <p:nvSpPr>
-          <p:cNvPr id="17" name="Text 12"/>
-          <p:cNvSpPr/>
-          <p:nvPr/>
-        </p:nvSpPr>
-        <p:spPr>
-          <a:xfrm>
-            <a:off x="1554480" y="3127248"/>
-            <a:ext cx="2788920" cy="365760"/>
-          </a:xfrm>
-          <a:prstGeom prst="rect">
-            <a:avLst/>
-          </a:prstGeom>
-          <a:noFill/>
-          <a:ln/>
-        </p:spPr>
-        <p:txBody>
-          <a:bodyPr wrap="square" lIns="0" tIns="0" rIns="0" bIns="0" rtlCol="0" anchor="ctr"/>
-          <a:lstStyle/>
-          <a:p>
-            <a:pPr marL="0" indent="0">
-              <a:buNone/>
-            </a:pPr>
-            <a:r>
-              <a:rPr lang="en-US" sz="1600" b="1" dirty="0">
-                <a:solidFill>
-                  <a:srgbClr val="FFFFFF"/>
-                </a:solidFill>
-                <a:latin typeface="Cambria" pitchFamily="34" charset="0"/>
-                <a:ea typeface="Cambria" pitchFamily="34" charset="-122"/>
-                <a:cs typeface="Cambria" pitchFamily="34" charset="-120"/>
-              </a:rPr>
-              <a:t>Compare the commute</a:t>
-            </a:r>
-            <a:endParaRPr lang="en-US" sz="1600" dirty="0"/>
-          </a:p>
-        </p:txBody>
-      </p:sp>
-      <p:sp>
-        <p:nvSpPr>
-          <p:cNvPr id="18" name="Text 13"/>
-          <p:cNvSpPr/>
-          <p:nvPr/>
-        </p:nvSpPr>
-        <p:spPr>
-          <a:xfrm>
-            <a:off x="1554480" y="3493008"/>
-            <a:ext cx="2834640" cy="548640"/>
-          </a:xfrm>
-          <a:prstGeom prst="rect">
-            <a:avLst/>
-          </a:prstGeom>
-          <a:noFill/>
-          <a:ln/>
-        </p:spPr>
-        <p:txBody>
-          <a:bodyPr wrap="square" lIns="0" tIns="0" rIns="0" bIns="0" rtlCol="0" anchor="ctr"/>
-          <a:lstStyle/>
-          <a:p>
-            <a:pPr marL="0" indent="0">
-              <a:lnSpc>
-                <a:spcPct val="108000"/>
-              </a:lnSpc>
-              <a:buNone/>
-            </a:pPr>
-            <a:r>
-              <a:rPr lang="en-US" sz="1150" dirty="0">
-                <a:solidFill>
-                  <a:srgbClr val="DCE6F5"/>
-                </a:solidFill>
-                <a:latin typeface="Calibri" pitchFamily="34" charset="0"/>
-                <a:ea typeface="Calibri" pitchFamily="34" charset="-122"/>
-                <a:cs typeface="Calibri" pitchFamily="34" charset="-120"/>
-              </a:rPr>
-              <a:t>Live driving route + walk + transit time to the Loop.</a:t>
-            </a:r>
-            <a:endParaRPr lang="en-US" sz="1150" dirty="0"/>
-          </a:p>
-        </p:txBody>
-      </p:sp>
-      <p:sp>
-        <p:nvSpPr>
-          <p:cNvPr id="19" name="Shape 14"/>
-          <p:cNvSpPr/>
-          <p:nvPr/>
-        </p:nvSpPr>
-        <p:spPr>
-          <a:xfrm>
-            <a:off x="4754880" y="2926080"/>
-            <a:ext cx="4023360" cy="1234440"/>
-          </a:xfrm>
-          <a:prstGeom prst="roundRect">
-            <a:avLst>
-              <a:gd name="adj" fmla="val 5926"/>
-            </a:avLst>
-          </a:prstGeom>
-          <a:solidFill>
-            <a:srgbClr val="223456"/>
-          </a:solidFill>
-          <a:ln/>
-        </p:spPr>
-        <p:txBody>
-          <a:bodyPr/>
-          <a:lstStyle/>
-          <a:p>
-            <a:endParaRPr lang="en-US"/>
-          </a:p>
-        </p:txBody>
-      </p:sp>
-      <p:sp>
-        <p:nvSpPr>
-          <p:cNvPr id="20" name="Shape 15"/>
-          <p:cNvSpPr/>
-          <p:nvPr/>
-        </p:nvSpPr>
-        <p:spPr>
-          <a:xfrm>
-            <a:off x="4956048" y="3200400"/>
-            <a:ext cx="685800" cy="685800"/>
-          </a:xfrm>
-          <a:prstGeom prst="ellipse">
-            <a:avLst/>
-          </a:prstGeom>
-          <a:solidFill>
-            <a:srgbClr val="16314F"/>
-          </a:solidFill>
-          <a:ln/>
-          <a:effectLst>
-            <a:outerShdw blurRad="88900" dist="38100" dir="5400000" algn="bl" rotWithShape="0">
-              <a:srgbClr val="8794A8">
-                <a:alpha val="22000"/>
-              </a:srgbClr>
-            </a:outerShdw>
-          </a:effectLst>
-        </p:spPr>
-        <p:txBody>
-          <a:bodyPr/>
-          <a:lstStyle/>
-          <a:p>
-            <a:endParaRPr lang="en-US"/>
-          </a:p>
-        </p:txBody>
-      </p:sp>
-      <p:pic>
-        <p:nvPicPr>
-          <p:cNvPr id="21" name="Image 3" descr="preencoded.png"/>
-          <p:cNvPicPr>
-            <a:picLocks noChangeAspect="1"/>
-          </p:cNvPicPr>
-          <p:nvPr/>
-        </p:nvPicPr>
-        <p:blipFill>
-          <a:blip r:embed="rId6"/>
-          <a:stretch>
-            <a:fillRect/>
-          </a:stretch>
-        </p:blipFill>
-        <p:spPr>
-          <a:xfrm>
-            <a:off x="5134356" y="3378708"/>
-            <a:ext cx="329184" cy="329184"/>
-          </a:xfrm>
-          <a:prstGeom prst="rect">
-            <a:avLst/>
-          </a:prstGeom>
-        </p:spPr>
-      </p:pic>
-      <p:sp>
-        <p:nvSpPr>
-          <p:cNvPr id="22" name="Text 16"/>
-          <p:cNvSpPr/>
-          <p:nvPr/>
-        </p:nvSpPr>
-        <p:spPr>
-          <a:xfrm>
-            <a:off x="5806440" y="3127248"/>
-            <a:ext cx="2788920" cy="365760"/>
-          </a:xfrm>
-          <a:prstGeom prst="rect">
-            <a:avLst/>
-          </a:prstGeom>
-          <a:noFill/>
-          <a:ln/>
-        </p:spPr>
-        <p:txBody>
-          <a:bodyPr wrap="square" lIns="0" tIns="0" rIns="0" bIns="0" rtlCol="0" anchor="ctr"/>
-          <a:lstStyle/>
-          <a:p>
-            <a:pPr marL="0" indent="0">
-              <a:buNone/>
-            </a:pPr>
-            <a:r>
-              <a:rPr lang="en-US" sz="1600" b="1" dirty="0">
-                <a:solidFill>
-                  <a:srgbClr val="FFFFFF"/>
-                </a:solidFill>
-                <a:latin typeface="Cambria" pitchFamily="34" charset="0"/>
-                <a:ea typeface="Cambria" pitchFamily="34" charset="-122"/>
-                <a:cs typeface="Cambria" pitchFamily="34" charset="-120"/>
-              </a:rPr>
-              <a:t>Smart recommendation</a:t>
-            </a:r>
-            <a:endParaRPr lang="en-US" sz="1600" dirty="0"/>
-          </a:p>
-        </p:txBody>
-      </p:sp>
-      <p:sp>
-        <p:nvSpPr>
-          <p:cNvPr id="23" name="Text 17"/>
-          <p:cNvSpPr/>
-          <p:nvPr/>
-        </p:nvSpPr>
-        <p:spPr>
-          <a:xfrm>
-            <a:off x="5806440" y="3493008"/>
-            <a:ext cx="2834640" cy="548640"/>
-          </a:xfrm>
-          <a:prstGeom prst="rect">
-            <a:avLst/>
-          </a:prstGeom>
-          <a:noFill/>
-          <a:ln/>
-        </p:spPr>
-        <p:txBody>
-          <a:bodyPr wrap="square" lIns="0" tIns="0" rIns="0" bIns="0" rtlCol="0" anchor="ctr"/>
-          <a:lstStyle/>
-          <a:p>
-            <a:pPr marL="0" indent="0">
-              <a:lnSpc>
-                <a:spcPct val="108000"/>
-              </a:lnSpc>
-              <a:buNone/>
-            </a:pPr>
-            <a:r>
-              <a:rPr lang="en-US" sz="1150" dirty="0">
-                <a:solidFill>
-                  <a:srgbClr val="DCE6F5"/>
-                </a:solidFill>
-                <a:latin typeface="Calibri" pitchFamily="34" charset="0"/>
-                <a:ea typeface="Calibri" pitchFamily="34" charset="-122"/>
-                <a:cs typeface="Calibri" pitchFamily="34" charset="-120"/>
-              </a:rPr>
               <a:t>Suggests walk vs. transit automatically by distance.</a:t>
             </a:r>
             <a:endParaRPr lang="en-US" sz="1150" dirty="0"/>
@@ -6544,7 +6797,7 @@
           <a:bodyPr wrap="square" lIns="0" tIns="0" rIns="0" bIns="0" rtlCol="0" anchor="ctr"/>
           <a:lstStyle/>
           <a:p>
-            <a:pPr marL="0" indent="0" algn="ctr">
+            <a:pPr algn="ctr" indent="0" marL="0">
               <a:buNone/>
             </a:pPr>
             <a:r>
@@ -6570,15 +6823,14 @@
 </p:sld>
 </file>
 
-<file path=ppt/slides/slide12.xml><?xml version="1.0" encoding="utf-8"?>
+<file path=ppt/slides/slide14.xml><?xml version="1.0" encoding="utf-8"?>
 <p:sld xmlns:a="http://schemas.openxmlformats.org/drawingml/2006/main" xmlns:r="http://schemas.openxmlformats.org/officeDocument/2006/relationships" xmlns:p="http://schemas.openxmlformats.org/presentationml/2006/main">
-  <p:cSld name="Slide 12">
+  <p:cSld name="Slide 14">
     <p:bg>
       <p:bgPr>
         <a:solidFill>
           <a:srgbClr val="FFFFFF"/>
         </a:solidFill>
-        <a:effectLst/>
       </p:bgPr>
     </p:bg>
     <p:spTree>
@@ -6616,11 +6868,11 @@
           <a:bodyPr wrap="square" lIns="0" tIns="0" rIns="0" bIns="0" rtlCol="0" anchor="ctr"/>
           <a:lstStyle/>
           <a:p>
-            <a:pPr marL="0" indent="0">
-              <a:buNone/>
-            </a:pPr>
-            <a:r>
-              <a:rPr lang="en-US" sz="1200" b="1" kern="0" spc="200" dirty="0">
+            <a:pPr indent="0" marL="0">
+              <a:buNone/>
+            </a:pPr>
+            <a:r>
+              <a:rPr lang="en-US" sz="1200" b="1" spc="200" kern="0" dirty="0">
                 <a:solidFill>
                   <a:srgbClr val="1F9D6B"/>
                 </a:solidFill>
@@ -6655,7 +6907,7 @@
           <a:bodyPr wrap="square" lIns="0" tIns="0" rIns="0" bIns="0" rtlCol="0" anchor="ctr"/>
           <a:lstStyle/>
           <a:p>
-            <a:pPr marL="0" indent="0">
+            <a:pPr indent="0" marL="0">
               <a:buNone/>
             </a:pPr>
             <a:r>
@@ -6699,20 +6951,13 @@
             <a:prstDash val="solid"/>
           </a:ln>
           <a:effectLst>
-            <a:outerShdw blurRad="88900" dist="38100" dir="5400000" algn="bl" rotWithShape="0">
+            <a:outerShdw sx="100000" sy="100000" kx="0" ky="0" algn="bl" rotWithShape="0" blurRad="88900" dist="38100" dir="5400000">
               <a:srgbClr val="8794A8">
                 <a:alpha val="22000"/>
               </a:srgbClr>
             </a:outerShdw>
           </a:effectLst>
         </p:spPr>
-        <p:txBody>
-          <a:bodyPr/>
-          <a:lstStyle/>
-          <a:p>
-            <a:endParaRPr lang="en-US"/>
-          </a:p>
-        </p:txBody>
       </p:sp>
       <p:sp>
         <p:nvSpPr>
@@ -6733,31 +6978,24 @@
           </a:solidFill>
           <a:ln/>
           <a:effectLst>
-            <a:outerShdw blurRad="88900" dist="38100" dir="5400000" algn="bl" rotWithShape="0">
+            <a:outerShdw sx="100000" sy="100000" kx="0" ky="0" algn="bl" rotWithShape="0" blurRad="88900" dist="38100" dir="5400000">
               <a:srgbClr val="8794A8">
                 <a:alpha val="22000"/>
               </a:srgbClr>
             </a:outerShdw>
           </a:effectLst>
         </p:spPr>
-        <p:txBody>
-          <a:bodyPr/>
-          <a:lstStyle/>
-          <a:p>
-            <a:endParaRPr lang="en-US"/>
-          </a:p>
-        </p:txBody>
       </p:sp>
       <p:pic>
         <p:nvPicPr>
-          <p:cNvPr id="6" name="Image 0" descr="preencoded.png"/>
+          <p:cNvPr id="6" name="Image 0" descr="preencoded.png">    </p:cNvPr>
           <p:cNvPicPr>
             <a:picLocks noChangeAspect="1"/>
           </p:cNvPicPr>
           <p:nvPr/>
         </p:nvPicPr>
         <p:blipFill>
-          <a:blip r:embed="rId3"/>
+          <a:blip r:embed="rId1"/>
           <a:stretch>
             <a:fillRect/>
           </a:stretch>
@@ -6793,7 +7031,7 @@
           <a:bodyPr wrap="square" lIns="0" tIns="0" rIns="0" bIns="0" rtlCol="0" anchor="ctr"/>
           <a:lstStyle/>
           <a:p>
-            <a:pPr marL="0" indent="0">
+            <a:pPr indent="0" marL="0">
               <a:buNone/>
             </a:pPr>
             <a:r>
@@ -6832,7 +7070,7 @@
           <a:bodyPr wrap="square" lIns="0" tIns="0" rIns="0" bIns="0" rtlCol="0" anchor="ctr"/>
           <a:lstStyle/>
           <a:p>
-            <a:pPr marL="0" indent="0">
+            <a:pPr indent="0" marL="0">
               <a:lnSpc>
                 <a:spcPct val="108000"/>
               </a:lnSpc>
@@ -6879,20 +7117,13 @@
             <a:prstDash val="solid"/>
           </a:ln>
           <a:effectLst>
-            <a:outerShdw blurRad="88900" dist="38100" dir="5400000" algn="bl" rotWithShape="0">
+            <a:outerShdw sx="100000" sy="100000" kx="0" ky="0" algn="bl" rotWithShape="0" blurRad="88900" dist="38100" dir="5400000">
               <a:srgbClr val="8794A8">
                 <a:alpha val="22000"/>
               </a:srgbClr>
             </a:outerShdw>
           </a:effectLst>
         </p:spPr>
-        <p:txBody>
-          <a:bodyPr/>
-          <a:lstStyle/>
-          <a:p>
-            <a:endParaRPr lang="en-US"/>
-          </a:p>
-        </p:txBody>
       </p:sp>
       <p:sp>
         <p:nvSpPr>
@@ -6913,31 +7144,24 @@
           </a:solidFill>
           <a:ln/>
           <a:effectLst>
-            <a:outerShdw blurRad="88900" dist="38100" dir="5400000" algn="bl" rotWithShape="0">
+            <a:outerShdw sx="100000" sy="100000" kx="0" ky="0" algn="bl" rotWithShape="0" blurRad="88900" dist="38100" dir="5400000">
               <a:srgbClr val="8794A8">
                 <a:alpha val="22000"/>
               </a:srgbClr>
             </a:outerShdw>
           </a:effectLst>
         </p:spPr>
-        <p:txBody>
-          <a:bodyPr/>
-          <a:lstStyle/>
-          <a:p>
-            <a:endParaRPr lang="en-US"/>
-          </a:p>
-        </p:txBody>
       </p:sp>
       <p:pic>
         <p:nvPicPr>
-          <p:cNvPr id="11" name="Image 1" descr="preencoded.png"/>
+          <p:cNvPr id="11" name="Image 1" descr="preencoded.png">    </p:cNvPr>
           <p:cNvPicPr>
             <a:picLocks noChangeAspect="1"/>
           </p:cNvPicPr>
           <p:nvPr/>
         </p:nvPicPr>
         <p:blipFill>
-          <a:blip r:embed="rId4"/>
+          <a:blip r:embed="rId2"/>
           <a:stretch>
             <a:fillRect/>
           </a:stretch>
@@ -6973,7 +7197,7 @@
           <a:bodyPr wrap="square" lIns="0" tIns="0" rIns="0" bIns="0" rtlCol="0" anchor="ctr"/>
           <a:lstStyle/>
           <a:p>
-            <a:pPr marL="0" indent="0">
+            <a:pPr indent="0" marL="0">
               <a:buNone/>
             </a:pPr>
             <a:r>
@@ -7012,7 +7236,7 @@
           <a:bodyPr wrap="square" lIns="0" tIns="0" rIns="0" bIns="0" rtlCol="0" anchor="ctr"/>
           <a:lstStyle/>
           <a:p>
-            <a:pPr marL="0" indent="0">
+            <a:pPr indent="0" marL="0">
               <a:lnSpc>
                 <a:spcPct val="108000"/>
               </a:lnSpc>
@@ -7059,20 +7283,13 @@
             <a:prstDash val="solid"/>
           </a:ln>
           <a:effectLst>
-            <a:outerShdw blurRad="88900" dist="38100" dir="5400000" algn="bl" rotWithShape="0">
+            <a:outerShdw sx="100000" sy="100000" kx="0" ky="0" algn="bl" rotWithShape="0" blurRad="88900" dist="38100" dir="5400000">
               <a:srgbClr val="8794A8">
                 <a:alpha val="22000"/>
               </a:srgbClr>
             </a:outerShdw>
           </a:effectLst>
         </p:spPr>
-        <p:txBody>
-          <a:bodyPr/>
-          <a:lstStyle/>
-          <a:p>
-            <a:endParaRPr lang="en-US"/>
-          </a:p>
-        </p:txBody>
       </p:sp>
       <p:sp>
         <p:nvSpPr>
@@ -7093,31 +7310,24 @@
           </a:solidFill>
           <a:ln/>
           <a:effectLst>
-            <a:outerShdw blurRad="88900" dist="38100" dir="5400000" algn="bl" rotWithShape="0">
+            <a:outerShdw sx="100000" sy="100000" kx="0" ky="0" algn="bl" rotWithShape="0" blurRad="88900" dist="38100" dir="5400000">
               <a:srgbClr val="8794A8">
                 <a:alpha val="22000"/>
               </a:srgbClr>
             </a:outerShdw>
           </a:effectLst>
         </p:spPr>
-        <p:txBody>
-          <a:bodyPr/>
-          <a:lstStyle/>
-          <a:p>
-            <a:endParaRPr lang="en-US"/>
-          </a:p>
-        </p:txBody>
       </p:sp>
       <p:pic>
         <p:nvPicPr>
-          <p:cNvPr id="16" name="Image 2" descr="preencoded.png"/>
+          <p:cNvPr id="16" name="Image 2" descr="preencoded.png">    </p:cNvPr>
           <p:cNvPicPr>
             <a:picLocks noChangeAspect="1"/>
           </p:cNvPicPr>
           <p:nvPr/>
         </p:nvPicPr>
         <p:blipFill>
-          <a:blip r:embed="rId5"/>
+          <a:blip r:embed="rId3"/>
           <a:stretch>
             <a:fillRect/>
           </a:stretch>
@@ -7153,7 +7363,7 @@
           <a:bodyPr wrap="square" lIns="0" tIns="0" rIns="0" bIns="0" rtlCol="0" anchor="ctr"/>
           <a:lstStyle/>
           <a:p>
-            <a:pPr marL="0" indent="0">
+            <a:pPr indent="0" marL="0">
               <a:buNone/>
             </a:pPr>
             <a:r>
@@ -7192,7 +7402,7 @@
           <a:bodyPr wrap="square" lIns="0" tIns="0" rIns="0" bIns="0" rtlCol="0" anchor="ctr"/>
           <a:lstStyle/>
           <a:p>
-            <a:pPr marL="0" indent="0">
+            <a:pPr indent="0" marL="0">
               <a:lnSpc>
                 <a:spcPct val="108000"/>
               </a:lnSpc>
@@ -7239,20 +7449,13 @@
             <a:prstDash val="solid"/>
           </a:ln>
           <a:effectLst>
-            <a:outerShdw blurRad="88900" dist="38100" dir="5400000" algn="bl" rotWithShape="0">
+            <a:outerShdw sx="100000" sy="100000" kx="0" ky="0" algn="bl" rotWithShape="0" blurRad="88900" dist="38100" dir="5400000">
               <a:srgbClr val="8794A8">
                 <a:alpha val="22000"/>
               </a:srgbClr>
             </a:outerShdw>
           </a:effectLst>
         </p:spPr>
-        <p:txBody>
-          <a:bodyPr/>
-          <a:lstStyle/>
-          <a:p>
-            <a:endParaRPr lang="en-US"/>
-          </a:p>
-        </p:txBody>
       </p:sp>
       <p:sp>
         <p:nvSpPr>
@@ -7273,31 +7476,24 @@
           </a:solidFill>
           <a:ln/>
           <a:effectLst>
-            <a:outerShdw blurRad="88900" dist="38100" dir="5400000" algn="bl" rotWithShape="0">
+            <a:outerShdw sx="100000" sy="100000" kx="0" ky="0" algn="bl" rotWithShape="0" blurRad="88900" dist="38100" dir="5400000">
               <a:srgbClr val="8794A8">
                 <a:alpha val="22000"/>
               </a:srgbClr>
             </a:outerShdw>
           </a:effectLst>
         </p:spPr>
-        <p:txBody>
-          <a:bodyPr/>
-          <a:lstStyle/>
-          <a:p>
-            <a:endParaRPr lang="en-US"/>
-          </a:p>
-        </p:txBody>
       </p:sp>
       <p:pic>
         <p:nvPicPr>
-          <p:cNvPr id="21" name="Image 3" descr="preencoded.png"/>
+          <p:cNvPr id="21" name="Image 3" descr="preencoded.png">    </p:cNvPr>
           <p:cNvPicPr>
             <a:picLocks noChangeAspect="1"/>
           </p:cNvPicPr>
           <p:nvPr/>
         </p:nvPicPr>
         <p:blipFill>
-          <a:blip r:embed="rId6"/>
+          <a:blip r:embed="rId4"/>
           <a:stretch>
             <a:fillRect/>
           </a:stretch>
@@ -7333,7 +7529,7 @@
           <a:bodyPr wrap="square" lIns="0" tIns="0" rIns="0" bIns="0" rtlCol="0" anchor="ctr"/>
           <a:lstStyle/>
           <a:p>
-            <a:pPr marL="0" indent="0">
+            <a:pPr indent="0" marL="0">
               <a:buNone/>
             </a:pPr>
             <a:r>
@@ -7372,7 +7568,7 @@
           <a:bodyPr wrap="square" lIns="0" tIns="0" rIns="0" bIns="0" rtlCol="0" anchor="ctr"/>
           <a:lstStyle/>
           <a:p>
-            <a:pPr marL="0" indent="0">
+            <a:pPr indent="0" marL="0">
               <a:lnSpc>
                 <a:spcPct val="108000"/>
               </a:lnSpc>
@@ -7401,15 +7597,14 @@
 </p:sld>
 </file>
 
-<file path=ppt/slides/slide13.xml><?xml version="1.0" encoding="utf-8"?>
+<file path=ppt/slides/slide15.xml><?xml version="1.0" encoding="utf-8"?>
 <p:sld xmlns:a="http://schemas.openxmlformats.org/drawingml/2006/main" xmlns:r="http://schemas.openxmlformats.org/officeDocument/2006/relationships" xmlns:p="http://schemas.openxmlformats.org/presentationml/2006/main">
-  <p:cSld name="Slide 13">
+  <p:cSld name="Slide 15">
     <p:bg>
       <p:bgPr>
         <a:solidFill>
           <a:srgbClr val="14233A"/>
         </a:solidFill>
-        <a:effectLst/>
       </p:bgPr>
     </p:bg>
     <p:spTree>
@@ -7445,13 +7640,6 @@
           </a:solidFill>
           <a:ln/>
         </p:spPr>
-        <p:txBody>
-          <a:bodyPr/>
-          <a:lstStyle/>
-          <a:p>
-            <a:endParaRPr lang="en-US"/>
-          </a:p>
-        </p:txBody>
       </p:sp>
       <p:sp>
         <p:nvSpPr>
@@ -7472,13 +7660,6 @@
           </a:solidFill>
           <a:ln/>
         </p:spPr>
-        <p:txBody>
-          <a:bodyPr/>
-          <a:lstStyle/>
-          <a:p>
-            <a:endParaRPr lang="en-US"/>
-          </a:p>
-        </p:txBody>
       </p:sp>
       <p:sp>
         <p:nvSpPr>
@@ -7499,31 +7680,24 @@
           </a:solidFill>
           <a:ln/>
           <a:effectLst>
-            <a:outerShdw blurRad="88900" dist="38100" dir="5400000" algn="bl" rotWithShape="0">
+            <a:outerShdw sx="100000" sy="100000" kx="0" ky="0" algn="bl" rotWithShape="0" blurRad="88900" dist="38100" dir="5400000">
               <a:srgbClr val="8794A8">
                 <a:alpha val="22000"/>
               </a:srgbClr>
             </a:outerShdw>
           </a:effectLst>
         </p:spPr>
-        <p:txBody>
-          <a:bodyPr/>
-          <a:lstStyle/>
-          <a:p>
-            <a:endParaRPr lang="en-US"/>
-          </a:p>
-        </p:txBody>
       </p:sp>
       <p:pic>
         <p:nvPicPr>
-          <p:cNvPr id="5" name="Image 0" descr="preencoded.png"/>
+          <p:cNvPr id="5" name="Image 0" descr="preencoded.png">    </p:cNvPr>
           <p:cNvPicPr>
             <a:picLocks noChangeAspect="1"/>
           </p:cNvPicPr>
           <p:nvPr/>
         </p:nvPicPr>
         <p:blipFill>
-          <a:blip r:embed="rId3"/>
+          <a:blip r:embed="rId1"/>
           <a:stretch>
             <a:fillRect/>
           </a:stretch>
@@ -7559,11 +7733,11 @@
           <a:bodyPr wrap="square" lIns="0" tIns="0" rIns="0" bIns="0" rtlCol="0" anchor="ctr"/>
           <a:lstStyle/>
           <a:p>
-            <a:pPr marL="0" indent="0">
-              <a:buNone/>
-            </a:pPr>
-            <a:r>
-              <a:rPr lang="en-US" sz="1300" b="1" kern="0" spc="200" dirty="0">
+            <a:pPr indent="0" marL="0">
+              <a:buNone/>
+            </a:pPr>
+            <a:r>
+              <a:rPr lang="en-US" sz="1300" b="1" spc="200" kern="0" dirty="0">
                 <a:solidFill>
                   <a:srgbClr val="9FE3C8"/>
                 </a:solidFill>
@@ -7598,7 +7772,7 @@
           <a:bodyPr wrap="square" lIns="0" tIns="0" rIns="0" bIns="0" rtlCol="0" anchor="ctr"/>
           <a:lstStyle/>
           <a:p>
-            <a:pPr marL="0" indent="0">
+            <a:pPr indent="0" marL="0">
               <a:lnSpc>
                 <a:spcPct val="108000"/>
               </a:lnSpc>
@@ -7640,7 +7814,7 @@
           <a:bodyPr wrap="square" lIns="0" tIns="0" rIns="0" bIns="0" rtlCol="0" anchor="ctr"/>
           <a:lstStyle/>
           <a:p>
-            <a:pPr marL="0" indent="0">
+            <a:pPr indent="0" marL="0">
               <a:buNone/>
             </a:pPr>
             <a:r>
@@ -7679,7 +7853,7 @@
           <a:bodyPr wrap="square" lIns="0" tIns="0" rIns="0" bIns="0" rtlCol="0" anchor="ctr"/>
           <a:lstStyle/>
           <a:p>
-            <a:pPr marL="0" indent="0">
+            <a:pPr indent="0" marL="0">
               <a:buNone/>
             </a:pPr>
             <a:r>
@@ -7693,6 +7867,9 @@
               </a:rPr>
               <a:t>Thank you   </a:t>
             </a:r>
+            <a:pPr indent="0" marL="0">
+              <a:buNone/>
+            </a:pPr>
             <a:r>
               <a:rPr lang="en-US" sz="1400" dirty="0">
                 <a:solidFill>
@@ -7724,7 +7901,6 @@
         <a:solidFill>
           <a:srgbClr val="FFFFFF"/>
         </a:solidFill>
-        <a:effectLst/>
       </p:bgPr>
     </p:bg>
     <p:spTree>
@@ -7762,11 +7938,11 @@
           <a:bodyPr wrap="square" lIns="0" tIns="0" rIns="0" bIns="0" rtlCol="0" anchor="ctr"/>
           <a:lstStyle/>
           <a:p>
-            <a:pPr marL="0" indent="0">
-              <a:buNone/>
-            </a:pPr>
-            <a:r>
-              <a:rPr lang="en-US" sz="1200" b="1" kern="0" spc="200" dirty="0">
+            <a:pPr indent="0" marL="0">
+              <a:buNone/>
+            </a:pPr>
+            <a:r>
+              <a:rPr lang="en-US" sz="1200" b="1" spc="200" kern="0" dirty="0">
                 <a:solidFill>
                   <a:srgbClr val="1F9D6B"/>
                 </a:solidFill>
@@ -7801,7 +7977,7 @@
           <a:bodyPr wrap="square" lIns="0" tIns="0" rIns="0" bIns="0" rtlCol="0" anchor="ctr"/>
           <a:lstStyle/>
           <a:p>
-            <a:pPr marL="0" indent="0">
+            <a:pPr indent="0" marL="0">
               <a:buNone/>
             </a:pPr>
             <a:r>
@@ -7840,7 +8016,7 @@
           <a:bodyPr wrap="square" lIns="0" tIns="0" rIns="0" bIns="0" rtlCol="0" anchor="ctr"/>
           <a:lstStyle/>
           <a:p>
-            <a:pPr marL="0" indent="0">
+            <a:pPr indent="0" marL="0">
               <a:lnSpc>
                 <a:spcPct val="118000"/>
               </a:lnSpc>
@@ -7887,20 +8063,13 @@
             <a:prstDash val="solid"/>
           </a:ln>
           <a:effectLst>
-            <a:outerShdw blurRad="88900" dist="38100" dir="5400000" algn="bl" rotWithShape="0">
+            <a:outerShdw sx="100000" sy="100000" kx="0" ky="0" algn="bl" rotWithShape="0" blurRad="88900" dist="38100" dir="5400000">
               <a:srgbClr val="8794A8">
                 <a:alpha val="22000"/>
               </a:srgbClr>
             </a:outerShdw>
           </a:effectLst>
         </p:spPr>
-        <p:txBody>
-          <a:bodyPr/>
-          <a:lstStyle/>
-          <a:p>
-            <a:endParaRPr lang="en-US"/>
-          </a:p>
-        </p:txBody>
       </p:sp>
       <p:sp>
         <p:nvSpPr>
@@ -7923,11 +8092,11 @@
           <a:bodyPr wrap="square" lIns="0" tIns="0" rIns="0" bIns="0" rtlCol="0" anchor="ctr"/>
           <a:lstStyle/>
           <a:p>
-            <a:pPr marL="0" indent="0">
-              <a:buNone/>
-            </a:pPr>
-            <a:r>
-              <a:rPr lang="en-US" sz="1100" b="1" kern="0" spc="200" dirty="0">
+            <a:pPr indent="0" marL="0">
+              <a:buNone/>
+            </a:pPr>
+            <a:r>
+              <a:rPr lang="en-US" sz="1100" b="1" spc="200" kern="0" dirty="0">
                 <a:solidFill>
                   <a:srgbClr val="1F9D6B"/>
                 </a:solidFill>
@@ -7962,7 +8131,7 @@
           <a:bodyPr wrap="square" lIns="0" tIns="0" rIns="0" bIns="0" rtlCol="0" anchor="ctr"/>
           <a:lstStyle/>
           <a:p>
-            <a:pPr marL="0" indent="0">
+            <a:pPr indent="0" marL="0">
               <a:buNone/>
             </a:pPr>
             <a:r>
@@ -8001,7 +8170,7 @@
           <a:bodyPr wrap="square" lIns="0" tIns="0" rIns="0" bIns="0" rtlCol="0" anchor="ctr"/>
           <a:lstStyle/>
           <a:p>
-            <a:pPr marL="0" indent="0">
+            <a:pPr indent="0" marL="0">
               <a:buNone/>
             </a:pPr>
             <a:r>
@@ -8040,7 +8209,7 @@
           <a:bodyPr wrap="square" lIns="0" tIns="0" rIns="0" bIns="0" rtlCol="0" anchor="ctr"/>
           <a:lstStyle/>
           <a:p>
-            <a:pPr marL="0" indent="0">
+            <a:pPr indent="0" marL="0">
               <a:buNone/>
             </a:pPr>
             <a:r>
@@ -8079,7 +8248,7 @@
           <a:bodyPr wrap="square" lIns="0" tIns="0" rIns="0" bIns="0" rtlCol="0" anchor="ctr"/>
           <a:lstStyle/>
           <a:p>
-            <a:pPr marL="0" indent="0">
+            <a:pPr indent="0" marL="0">
               <a:buNone/>
             </a:pPr>
             <a:r>
@@ -8118,7 +8287,7 @@
           <a:bodyPr wrap="square" lIns="0" tIns="0" rIns="0" bIns="0" rtlCol="0" anchor="ctr"/>
           <a:lstStyle/>
           <a:p>
-            <a:pPr marL="0" indent="0">
+            <a:pPr indent="0" marL="0">
               <a:buNone/>
             </a:pPr>
             <a:r>
@@ -8157,7 +8326,7 @@
           <a:bodyPr wrap="square" lIns="0" tIns="0" rIns="0" bIns="0" rtlCol="0" anchor="ctr"/>
           <a:lstStyle/>
           <a:p>
-            <a:pPr marL="0" indent="0">
+            <a:pPr indent="0" marL="0">
               <a:buNone/>
             </a:pPr>
             <a:r>
@@ -8198,7 +8367,7 @@
           <a:bodyPr wrap="square" lIns="0" tIns="0" rIns="0" bIns="0" rtlCol="0" anchor="ctr"/>
           <a:lstStyle/>
           <a:p>
-            <a:pPr marL="0" indent="0">
+            <a:pPr indent="0" marL="0">
               <a:lnSpc>
                 <a:spcPct val="112000"/>
               </a:lnSpc>
@@ -8215,6 +8384,12 @@
               </a:rPr>
               <a:t>The question:  </a:t>
             </a:r>
+            <a:pPr indent="0" marL="0">
+              <a:lnSpc>
+                <a:spcPct val="112000"/>
+              </a:lnSpc>
+              <a:buNone/>
+            </a:pPr>
             <a:r>
               <a:rPr lang="en-US" sz="1550" i="1" dirty="0">
                 <a:solidFill>
@@ -8246,7 +8421,6 @@
         <a:solidFill>
           <a:srgbClr val="FFFFFF"/>
         </a:solidFill>
-        <a:effectLst/>
       </p:bgPr>
     </p:bg>
     <p:spTree>
@@ -8284,11 +8458,11 @@
           <a:bodyPr wrap="square" lIns="0" tIns="0" rIns="0" bIns="0" rtlCol="0" anchor="ctr"/>
           <a:lstStyle/>
           <a:p>
-            <a:pPr marL="0" indent="0">
-              <a:buNone/>
-            </a:pPr>
-            <a:r>
-              <a:rPr lang="en-US" sz="1200" b="1" kern="0" spc="200" dirty="0">
+            <a:pPr indent="0" marL="0">
+              <a:buNone/>
+            </a:pPr>
+            <a:r>
+              <a:rPr lang="en-US" sz="1200" b="1" spc="200" kern="0" dirty="0">
                 <a:solidFill>
                   <a:srgbClr val="1F9D6B"/>
                 </a:solidFill>
@@ -8323,7 +8497,7 @@
           <a:bodyPr wrap="square" lIns="0" tIns="0" rIns="0" bIns="0" rtlCol="0" anchor="ctr"/>
           <a:lstStyle/>
           <a:p>
-            <a:pPr marL="0" indent="0">
+            <a:pPr indent="0" marL="0">
               <a:buNone/>
             </a:pPr>
             <a:r>
@@ -8367,20 +8541,13 @@
             <a:prstDash val="solid"/>
           </a:ln>
           <a:effectLst>
-            <a:outerShdw blurRad="88900" dist="38100" dir="5400000" algn="bl" rotWithShape="0">
+            <a:outerShdw sx="100000" sy="100000" kx="0" ky="0" algn="bl" rotWithShape="0" blurRad="88900" dist="38100" dir="5400000">
               <a:srgbClr val="8794A8">
                 <a:alpha val="22000"/>
               </a:srgbClr>
             </a:outerShdw>
           </a:effectLst>
         </p:spPr>
-        <p:txBody>
-          <a:bodyPr/>
-          <a:lstStyle/>
-          <a:p>
-            <a:endParaRPr lang="en-US"/>
-          </a:p>
-        </p:txBody>
       </p:sp>
       <p:sp>
         <p:nvSpPr>
@@ -8401,31 +8568,24 @@
           </a:solidFill>
           <a:ln/>
           <a:effectLst>
-            <a:outerShdw blurRad="88900" dist="38100" dir="5400000" algn="bl" rotWithShape="0">
+            <a:outerShdw sx="100000" sy="100000" kx="0" ky="0" algn="bl" rotWithShape="0" blurRad="88900" dist="38100" dir="5400000">
               <a:srgbClr val="8794A8">
                 <a:alpha val="22000"/>
               </a:srgbClr>
             </a:outerShdw>
           </a:effectLst>
         </p:spPr>
-        <p:txBody>
-          <a:bodyPr/>
-          <a:lstStyle/>
-          <a:p>
-            <a:endParaRPr lang="en-US"/>
-          </a:p>
-        </p:txBody>
       </p:sp>
       <p:pic>
         <p:nvPicPr>
-          <p:cNvPr id="6" name="Image 0" descr="preencoded.png"/>
+          <p:cNvPr id="6" name="Image 0" descr="preencoded.png">    </p:cNvPr>
           <p:cNvPicPr>
             <a:picLocks noChangeAspect="1"/>
           </p:cNvPicPr>
           <p:nvPr/>
         </p:nvPicPr>
         <p:blipFill>
-          <a:blip r:embed="rId3"/>
+          <a:blip r:embed="rId1"/>
           <a:stretch>
             <a:fillRect/>
           </a:stretch>
@@ -8461,7 +8621,7 @@
           <a:bodyPr wrap="square" lIns="0" tIns="0" rIns="0" bIns="0" rtlCol="0" anchor="ctr"/>
           <a:lstStyle/>
           <a:p>
-            <a:pPr marL="0" indent="0">
+            <a:pPr indent="0" marL="0">
               <a:buNone/>
             </a:pPr>
             <a:r>
@@ -8500,7 +8660,7 @@
           <a:bodyPr wrap="square" lIns="0" tIns="0" rIns="0" bIns="0" rtlCol="0" anchor="ctr"/>
           <a:lstStyle/>
           <a:p>
-            <a:pPr marL="0" indent="0">
+            <a:pPr indent="0" marL="0">
               <a:lnSpc>
                 <a:spcPct val="112000"/>
               </a:lnSpc>
@@ -8547,20 +8707,13 @@
             <a:prstDash val="solid"/>
           </a:ln>
           <a:effectLst>
-            <a:outerShdw blurRad="88900" dist="38100" dir="5400000" algn="bl" rotWithShape="0">
+            <a:outerShdw sx="100000" sy="100000" kx="0" ky="0" algn="bl" rotWithShape="0" blurRad="88900" dist="38100" dir="5400000">
               <a:srgbClr val="8794A8">
                 <a:alpha val="22000"/>
               </a:srgbClr>
             </a:outerShdw>
           </a:effectLst>
         </p:spPr>
-        <p:txBody>
-          <a:bodyPr/>
-          <a:lstStyle/>
-          <a:p>
-            <a:endParaRPr lang="en-US"/>
-          </a:p>
-        </p:txBody>
       </p:sp>
       <p:sp>
         <p:nvSpPr>
@@ -8581,31 +8734,24 @@
           </a:solidFill>
           <a:ln/>
           <a:effectLst>
-            <a:outerShdw blurRad="88900" dist="38100" dir="5400000" algn="bl" rotWithShape="0">
+            <a:outerShdw sx="100000" sy="100000" kx="0" ky="0" algn="bl" rotWithShape="0" blurRad="88900" dist="38100" dir="5400000">
               <a:srgbClr val="8794A8">
                 <a:alpha val="22000"/>
               </a:srgbClr>
             </a:outerShdw>
           </a:effectLst>
         </p:spPr>
-        <p:txBody>
-          <a:bodyPr/>
-          <a:lstStyle/>
-          <a:p>
-            <a:endParaRPr lang="en-US"/>
-          </a:p>
-        </p:txBody>
       </p:sp>
       <p:pic>
         <p:nvPicPr>
-          <p:cNvPr id="11" name="Image 1" descr="preencoded.png"/>
+          <p:cNvPr id="11" name="Image 1" descr="preencoded.png">    </p:cNvPr>
           <p:cNvPicPr>
             <a:picLocks noChangeAspect="1"/>
           </p:cNvPicPr>
           <p:nvPr/>
         </p:nvPicPr>
         <p:blipFill>
-          <a:blip r:embed="rId4"/>
+          <a:blip r:embed="rId2"/>
           <a:stretch>
             <a:fillRect/>
           </a:stretch>
@@ -8641,7 +8787,7 @@
           <a:bodyPr wrap="square" lIns="0" tIns="0" rIns="0" bIns="0" rtlCol="0" anchor="ctr"/>
           <a:lstStyle/>
           <a:p>
-            <a:pPr marL="0" indent="0">
+            <a:pPr indent="0" marL="0">
               <a:buNone/>
             </a:pPr>
             <a:r>
@@ -8680,7 +8826,7 @@
           <a:bodyPr wrap="square" lIns="0" tIns="0" rIns="0" bIns="0" rtlCol="0" anchor="ctr"/>
           <a:lstStyle/>
           <a:p>
-            <a:pPr marL="0" indent="0">
+            <a:pPr indent="0" marL="0">
               <a:lnSpc>
                 <a:spcPct val="112000"/>
               </a:lnSpc>
@@ -8727,20 +8873,13 @@
             <a:prstDash val="solid"/>
           </a:ln>
           <a:effectLst>
-            <a:outerShdw blurRad="88900" dist="38100" dir="5400000" algn="bl" rotWithShape="0">
+            <a:outerShdw sx="100000" sy="100000" kx="0" ky="0" algn="bl" rotWithShape="0" blurRad="88900" dist="38100" dir="5400000">
               <a:srgbClr val="8794A8">
                 <a:alpha val="22000"/>
               </a:srgbClr>
             </a:outerShdw>
           </a:effectLst>
         </p:spPr>
-        <p:txBody>
-          <a:bodyPr/>
-          <a:lstStyle/>
-          <a:p>
-            <a:endParaRPr lang="en-US"/>
-          </a:p>
-        </p:txBody>
       </p:sp>
       <p:sp>
         <p:nvSpPr>
@@ -8761,31 +8900,24 @@
           </a:solidFill>
           <a:ln/>
           <a:effectLst>
-            <a:outerShdw blurRad="88900" dist="38100" dir="5400000" algn="bl" rotWithShape="0">
+            <a:outerShdw sx="100000" sy="100000" kx="0" ky="0" algn="bl" rotWithShape="0" blurRad="88900" dist="38100" dir="5400000">
               <a:srgbClr val="8794A8">
                 <a:alpha val="22000"/>
               </a:srgbClr>
             </a:outerShdw>
           </a:effectLst>
         </p:spPr>
-        <p:txBody>
-          <a:bodyPr/>
-          <a:lstStyle/>
-          <a:p>
-            <a:endParaRPr lang="en-US"/>
-          </a:p>
-        </p:txBody>
       </p:sp>
       <p:pic>
         <p:nvPicPr>
-          <p:cNvPr id="16" name="Image 2" descr="preencoded.png"/>
+          <p:cNvPr id="16" name="Image 2" descr="preencoded.png">    </p:cNvPr>
           <p:cNvPicPr>
             <a:picLocks noChangeAspect="1"/>
           </p:cNvPicPr>
           <p:nvPr/>
         </p:nvPicPr>
         <p:blipFill>
-          <a:blip r:embed="rId5"/>
+          <a:blip r:embed="rId3"/>
           <a:stretch>
             <a:fillRect/>
           </a:stretch>
@@ -8821,7 +8953,7 @@
           <a:bodyPr wrap="square" lIns="0" tIns="0" rIns="0" bIns="0" rtlCol="0" anchor="ctr"/>
           <a:lstStyle/>
           <a:p>
-            <a:pPr marL="0" indent="0">
+            <a:pPr indent="0" marL="0">
               <a:buNone/>
             </a:pPr>
             <a:r>
@@ -8860,7 +8992,7 @@
           <a:bodyPr wrap="square" lIns="0" tIns="0" rIns="0" bIns="0" rtlCol="0" anchor="ctr"/>
           <a:lstStyle/>
           <a:p>
-            <a:pPr marL="0" indent="0">
+            <a:pPr indent="0" marL="0">
               <a:lnSpc>
                 <a:spcPct val="112000"/>
               </a:lnSpc>
@@ -8897,7 +9029,6 @@
         <a:solidFill>
           <a:srgbClr val="FFFFFF"/>
         </a:solidFill>
-        <a:effectLst/>
       </p:bgPr>
     </p:bg>
     <p:spTree>
@@ -8935,11 +9066,11 @@
           <a:bodyPr wrap="square" lIns="0" tIns="0" rIns="0" bIns="0" rtlCol="0" anchor="ctr"/>
           <a:lstStyle/>
           <a:p>
-            <a:pPr marL="0" indent="0">
-              <a:buNone/>
-            </a:pPr>
-            <a:r>
-              <a:rPr lang="en-US" sz="1200" b="1" kern="0" spc="200" dirty="0">
+            <a:pPr indent="0" marL="0">
+              <a:buNone/>
+            </a:pPr>
+            <a:r>
+              <a:rPr lang="en-US" sz="1200" b="1" spc="200" kern="0" dirty="0">
                 <a:solidFill>
                   <a:srgbClr val="1F9D6B"/>
                 </a:solidFill>
@@ -8974,7 +9105,7 @@
           <a:bodyPr wrap="square" lIns="0" tIns="0" rIns="0" bIns="0" rtlCol="0" anchor="ctr"/>
           <a:lstStyle/>
           <a:p>
-            <a:pPr marL="0" indent="0">
+            <a:pPr indent="0" marL="0">
               <a:buNone/>
             </a:pPr>
             <a:r>
@@ -9013,7 +9144,7 @@
           <a:bodyPr wrap="square" lIns="0" tIns="0" rIns="0" bIns="0" rtlCol="0" anchor="ctr"/>
           <a:lstStyle/>
           <a:p>
-            <a:pPr marL="0" indent="0">
+            <a:pPr indent="0" marL="0">
               <a:buNone/>
             </a:pPr>
             <a:r>
@@ -9052,7 +9183,7 @@
           <a:bodyPr wrap="square" lIns="0" tIns="0" rIns="0" bIns="0" rtlCol="0" anchor="ctr"/>
           <a:lstStyle/>
           <a:p>
-            <a:pPr marL="0" indent="0">
+            <a:pPr indent="0" marL="0">
               <a:buNone/>
             </a:pPr>
             <a:r>
@@ -9091,7 +9222,7 @@
           <a:bodyPr wrap="square" lIns="0" tIns="0" rIns="0" bIns="0" rtlCol="0" anchor="ctr"/>
           <a:lstStyle/>
           <a:p>
-            <a:pPr marL="0" indent="0">
+            <a:pPr indent="0" marL="0">
               <a:buNone/>
             </a:pPr>
             <a:r>
@@ -9130,7 +9261,7 @@
           <a:bodyPr wrap="square" lIns="0" tIns="0" rIns="0" bIns="0" rtlCol="0" anchor="ctr"/>
           <a:lstStyle/>
           <a:p>
-            <a:pPr marL="0" indent="0">
+            <a:pPr indent="0" marL="0">
               <a:buNone/>
             </a:pPr>
             <a:r>
@@ -9169,7 +9300,7 @@
           <a:bodyPr wrap="square" lIns="0" tIns="0" rIns="0" bIns="0" rtlCol="0" anchor="ctr"/>
           <a:lstStyle/>
           <a:p>
-            <a:pPr marL="0" indent="0">
+            <a:pPr indent="0" marL="0">
               <a:buNone/>
             </a:pPr>
             <a:r>
@@ -9208,7 +9339,7 @@
           <a:bodyPr wrap="square" lIns="0" tIns="0" rIns="0" bIns="0" rtlCol="0" anchor="ctr"/>
           <a:lstStyle/>
           <a:p>
-            <a:pPr marL="0" indent="0">
+            <a:pPr indent="0" marL="0">
               <a:buNone/>
             </a:pPr>
             <a:r>
@@ -9252,20 +9383,13 @@
             <a:prstDash val="solid"/>
           </a:ln>
           <a:effectLst>
-            <a:outerShdw blurRad="88900" dist="38100" dir="5400000" algn="bl" rotWithShape="0">
+            <a:outerShdw sx="100000" sy="100000" kx="0" ky="0" algn="bl" rotWithShape="0" blurRad="88900" dist="38100" dir="5400000">
               <a:srgbClr val="8794A8">
                 <a:alpha val="22000"/>
               </a:srgbClr>
             </a:outerShdw>
           </a:effectLst>
         </p:spPr>
-        <p:txBody>
-          <a:bodyPr/>
-          <a:lstStyle/>
-          <a:p>
-            <a:endParaRPr lang="en-US"/>
-          </a:p>
-        </p:txBody>
       </p:sp>
       <p:sp>
         <p:nvSpPr>
@@ -9288,11 +9412,11 @@
           <a:bodyPr wrap="square" lIns="0" tIns="0" rIns="0" bIns="0" rtlCol="0" anchor="ctr"/>
           <a:lstStyle/>
           <a:p>
-            <a:pPr marL="0" indent="0">
-              <a:buNone/>
-            </a:pPr>
-            <a:r>
-              <a:rPr lang="en-US" sz="1100" b="1" kern="0" spc="200" dirty="0">
+            <a:pPr indent="0" marL="0">
+              <a:buNone/>
+            </a:pPr>
+            <a:r>
+              <a:rPr lang="en-US" sz="1100" b="1" spc="200" kern="0" dirty="0">
                 <a:solidFill>
                   <a:srgbClr val="1F9D6B"/>
                 </a:solidFill>
@@ -9327,7 +9451,7 @@
           <a:bodyPr wrap="square" lIns="0" tIns="0" rIns="0" bIns="0" rtlCol="0" anchor="ctr"/>
           <a:lstStyle/>
           <a:p>
-            <a:pPr marL="0" indent="0">
+            <a:pPr indent="0" marL="0">
               <a:buNone/>
             </a:pPr>
             <a:r>
@@ -9366,7 +9490,7 @@
           <a:bodyPr wrap="square" lIns="0" tIns="0" rIns="0" bIns="0" rtlCol="0" anchor="ctr"/>
           <a:lstStyle/>
           <a:p>
-            <a:pPr marL="0" indent="0">
+            <a:pPr indent="0" marL="0">
               <a:lnSpc>
                 <a:spcPct val="105000"/>
               </a:lnSpc>
@@ -9383,6 +9507,12 @@
               </a:rPr>
               <a:t>Defined violent crime  </a:t>
             </a:r>
+            <a:pPr indent="0" marL="0">
+              <a:lnSpc>
+                <a:spcPct val="105000"/>
+              </a:lnSpc>
+              <a:buNone/>
+            </a:pPr>
             <a:r>
               <a:rPr lang="en-US" sz="1150" dirty="0">
                 <a:solidFill>
@@ -9419,7 +9549,7 @@
           <a:bodyPr wrap="square" lIns="0" tIns="0" rIns="0" bIns="0" rtlCol="0" anchor="ctr"/>
           <a:lstStyle/>
           <a:p>
-            <a:pPr marL="0" indent="0">
+            <a:pPr indent="0" marL="0">
               <a:buNone/>
             </a:pPr>
             <a:r>
@@ -9458,7 +9588,7 @@
           <a:bodyPr wrap="square" lIns="0" tIns="0" rIns="0" bIns="0" rtlCol="0" anchor="ctr"/>
           <a:lstStyle/>
           <a:p>
-            <a:pPr marL="0" indent="0">
+            <a:pPr indent="0" marL="0">
               <a:lnSpc>
                 <a:spcPct val="105000"/>
               </a:lnSpc>
@@ -9475,6 +9605,12 @@
               </a:rPr>
               <a:t>Excluded District 31  </a:t>
             </a:r>
+            <a:pPr indent="0" marL="0">
+              <a:lnSpc>
+                <a:spcPct val="105000"/>
+              </a:lnSpc>
+              <a:buNone/>
+            </a:pPr>
             <a:r>
               <a:rPr lang="en-US" sz="1150" dirty="0">
                 <a:solidFill>
@@ -9511,7 +9647,7 @@
           <a:bodyPr wrap="square" lIns="0" tIns="0" rIns="0" bIns="0" rtlCol="0" anchor="ctr"/>
           <a:lstStyle/>
           <a:p>
-            <a:pPr marL="0" indent="0">
+            <a:pPr indent="0" marL="0">
               <a:buNone/>
             </a:pPr>
             <a:r>
@@ -9550,7 +9686,7 @@
           <a:bodyPr wrap="square" lIns="0" tIns="0" rIns="0" bIns="0" rtlCol="0" anchor="ctr"/>
           <a:lstStyle/>
           <a:p>
-            <a:pPr marL="0" indent="0">
+            <a:pPr indent="0" marL="0">
               <a:lnSpc>
                 <a:spcPct val="105000"/>
               </a:lnSpc>
@@ -9567,6 +9703,12 @@
               </a:rPr>
               <a:t>Monthly averages ÷ 24  </a:t>
             </a:r>
+            <a:pPr indent="0" marL="0">
+              <a:lnSpc>
+                <a:spcPct val="105000"/>
+              </a:lnSpc>
+              <a:buNone/>
+            </a:pPr>
             <a:r>
               <a:rPr lang="en-US" sz="1150" dirty="0">
                 <a:solidFill>
@@ -9584,6 +9726,45 @@
       </p:sp>
       <p:sp>
         <p:nvSpPr>
+          <p:cNvPr id="18" name="Text 16"/>
+          <p:cNvSpPr/>
+          <p:nvPr/>
+        </p:nvSpPr>
+        <p:spPr>
+          <a:xfrm>
+            <a:off x="5577840" y="3803904"/>
+            <a:ext cx="182880" cy="274320"/>
+          </a:xfrm>
+          <a:prstGeom prst="rect">
+            <a:avLst/>
+          </a:prstGeom>
+          <a:noFill/>
+          <a:ln/>
+        </p:spPr>
+        <p:txBody>
+          <a:bodyPr wrap="square" lIns="0" tIns="0" rIns="0" bIns="0" rtlCol="0" anchor="ctr"/>
+          <a:lstStyle/>
+          <a:p>
+            <a:pPr indent="0" marL="0">
+              <a:buNone/>
+            </a:pPr>
+            <a:r>
+              <a:rPr lang="en-US" sz="1300" b="1" dirty="0">
+                <a:solidFill>
+                  <a:srgbClr val="1F9D6B"/>
+                </a:solidFill>
+                <a:latin typeface="Calibri" pitchFamily="34" charset="0"/>
+                <a:ea typeface="Calibri" pitchFamily="34" charset="-122"/>
+                <a:cs typeface="Calibri" pitchFamily="34" charset="-120"/>
+              </a:rPr>
+              <a:t>•</a:t>
+            </a:r>
+            <a:endParaRPr lang="en-US" sz="1300" dirty="0"/>
+          </a:p>
+        </p:txBody>
+      </p:sp>
+      <p:sp>
+        <p:nvSpPr>
           <p:cNvPr id="19" name="Text 17"/>
           <p:cNvSpPr/>
           <p:nvPr/>
@@ -9603,12 +9784,40 @@
           <a:bodyPr wrap="square" lIns="0" tIns="0" rIns="0" bIns="0" rtlCol="0" anchor="ctr"/>
           <a:lstStyle/>
           <a:p>
-            <a:pPr marL="0" indent="0">
+            <a:pPr indent="0" marL="0">
               <a:lnSpc>
                 <a:spcPct val="105000"/>
               </a:lnSpc>
               <a:buNone/>
             </a:pPr>
+            <a:r>
+              <a:rPr lang="en-US" sz="1150" b="1" dirty="0">
+                <a:solidFill>
+                  <a:srgbClr val="1A2230"/>
+                </a:solidFill>
+                <a:latin typeface="Calibri" pitchFamily="34" charset="0"/>
+                <a:ea typeface="Calibri" pitchFamily="34" charset="-122"/>
+                <a:cs typeface="Calibri" pitchFamily="34" charset="-120"/>
+              </a:rPr>
+              <a:t>Rebuilt day-of-week  </a:t>
+            </a:r>
+            <a:pPr indent="0" marL="0">
+              <a:lnSpc>
+                <a:spcPct val="105000"/>
+              </a:lnSpc>
+              <a:buNone/>
+            </a:pPr>
+            <a:r>
+              <a:rPr lang="en-US" sz="1150" dirty="0">
+                <a:solidFill>
+                  <a:srgbClr val="6B7585"/>
+                </a:solidFill>
+                <a:latin typeface="Calibri" pitchFamily="34" charset="0"/>
+                <a:ea typeface="Calibri" pitchFamily="34" charset="-122"/>
+                <a:cs typeface="Calibri" pitchFamily="34" charset="-120"/>
+              </a:rPr>
+              <a:t>- Source column was misaligned - fixed from the date</a:t>
+            </a:r>
             <a:endParaRPr lang="en-US" sz="1150" dirty="0"/>
           </a:p>
         </p:txBody>
@@ -9634,7 +9843,7 @@
           <a:bodyPr wrap="square" lIns="0" tIns="0" rIns="0" bIns="0" rtlCol="0" anchor="ctr"/>
           <a:lstStyle/>
           <a:p>
-            <a:pPr marL="0" indent="0">
+            <a:pPr indent="0" marL="0">
               <a:buNone/>
             </a:pPr>
             <a:r>
@@ -9668,7 +9877,6 @@
         <a:solidFill>
           <a:srgbClr val="14233A"/>
         </a:solidFill>
-        <a:effectLst/>
       </p:bgPr>
     </p:bg>
     <p:spTree>
@@ -9706,11 +9914,11 @@
           <a:bodyPr wrap="square" lIns="0" tIns="0" rIns="0" bIns="0" rtlCol="0" anchor="ctr"/>
           <a:lstStyle/>
           <a:p>
-            <a:pPr marL="0" indent="0">
-              <a:buNone/>
-            </a:pPr>
-            <a:r>
-              <a:rPr lang="en-US" sz="1200" b="1" kern="0" spc="200" dirty="0">
+            <a:pPr indent="0" marL="0">
+              <a:buNone/>
+            </a:pPr>
+            <a:r>
+              <a:rPr lang="en-US" sz="1200" b="1" spc="200" kern="0" dirty="0">
                 <a:solidFill>
                   <a:srgbClr val="9FE3C8"/>
                 </a:solidFill>
@@ -9745,7 +9953,7 @@
           <a:bodyPr wrap="square" lIns="0" tIns="0" rIns="0" bIns="0" rtlCol="0" anchor="ctr"/>
           <a:lstStyle/>
           <a:p>
-            <a:pPr marL="0" indent="0">
+            <a:pPr indent="0" marL="0">
               <a:buNone/>
             </a:pPr>
             <a:r>
@@ -9782,24 +9990,407 @@
           </a:solidFill>
           <a:ln/>
           <a:effectLst>
-            <a:outerShdw blurRad="88900" dist="38100" dir="5400000" algn="bl" rotWithShape="0">
+            <a:outerShdw sx="100000" sy="100000" kx="0" ky="0" algn="bl" rotWithShape="0" blurRad="88900" dist="38100" dir="5400000">
               <a:srgbClr val="8794A8">
                 <a:alpha val="22000"/>
               </a:srgbClr>
             </a:outerShdw>
           </a:effectLst>
         </p:spPr>
-        <p:txBody>
-          <a:bodyPr/>
-          <a:lstStyle/>
-          <a:p>
-            <a:endParaRPr lang="en-US"/>
-          </a:p>
-        </p:txBody>
       </p:sp>
       <p:pic>
         <p:nvPicPr>
-          <p:cNvPr id="5" name="Image 0" descr="preencoded.png"/>
+          <p:cNvPr id="5" name="Image 0" descr="preencoded.png">    </p:cNvPr>
+          <p:cNvPicPr>
+            <a:picLocks noChangeAspect="1"/>
+          </p:cNvPicPr>
+          <p:nvPr/>
+        </p:nvPicPr>
+        <p:blipFill>
+          <a:blip r:embed="rId1"/>
+          <a:stretch>
+            <a:fillRect/>
+          </a:stretch>
+        </p:blipFill>
+        <p:spPr>
+          <a:xfrm>
+            <a:off x="1060704" y="1837944"/>
+            <a:ext cx="438912" cy="438912"/>
+          </a:xfrm>
+          <a:prstGeom prst="rect">
+            <a:avLst/>
+          </a:prstGeom>
+        </p:spPr>
+      </p:pic>
+      <p:sp>
+        <p:nvSpPr>
+          <p:cNvPr id="6" name="Text 3"/>
+          <p:cNvSpPr/>
+          <p:nvPr/>
+        </p:nvSpPr>
+        <p:spPr>
+          <a:xfrm>
+            <a:off x="822960" y="1600200"/>
+            <a:ext cx="914400" cy="914400"/>
+          </a:xfrm>
+          <a:prstGeom prst="rect">
+            <a:avLst/>
+          </a:prstGeom>
+          <a:noFill/>
+          <a:ln/>
+        </p:spPr>
+        <p:txBody>
+          <a:bodyPr wrap="square" lIns="0" tIns="0" rIns="0" bIns="0" rtlCol="0" anchor="ctr"/>
+          <a:lstStyle/>
+          <a:p>
+            <a:pPr algn="ctr" indent="0" marL="0">
+              <a:buNone/>
+            </a:pPr>
+            <a:r>
+              <a:rPr lang="en-US" sz="1100" b="1" dirty="0">
+                <a:solidFill>
+                  <a:srgbClr val="FFFFFF"/>
+                </a:solidFill>
+                <a:latin typeface="Cambria" pitchFamily="34" charset="0"/>
+                <a:ea typeface="Cambria" pitchFamily="34" charset="-122"/>
+                <a:cs typeface="Cambria" pitchFamily="34" charset="-120"/>
+              </a:rPr>
+              <a:t>1</a:t>
+            </a:r>
+            <a:endParaRPr lang="en-US" sz="1100" dirty="0"/>
+          </a:p>
+        </p:txBody>
+      </p:sp>
+      <p:sp>
+        <p:nvSpPr>
+          <p:cNvPr id="7" name="Text 4"/>
+          <p:cNvSpPr/>
+          <p:nvPr/>
+        </p:nvSpPr>
+        <p:spPr>
+          <a:xfrm>
+            <a:off x="502920" y="2697480"/>
+            <a:ext cx="1554480" cy="320040"/>
+          </a:xfrm>
+          <a:prstGeom prst="rect">
+            <a:avLst/>
+          </a:prstGeom>
+          <a:noFill/>
+          <a:ln/>
+        </p:spPr>
+        <p:txBody>
+          <a:bodyPr wrap="square" lIns="0" tIns="0" rIns="0" bIns="0" rtlCol="0" anchor="ctr"/>
+          <a:lstStyle/>
+          <a:p>
+            <a:pPr algn="ctr" indent="0" marL="0">
+              <a:buNone/>
+            </a:pPr>
+            <a:r>
+              <a:rPr lang="en-US" sz="1600" b="1" dirty="0">
+                <a:solidFill>
+                  <a:srgbClr val="FFFFFF"/>
+                </a:solidFill>
+                <a:latin typeface="Cambria" pitchFamily="34" charset="0"/>
+                <a:ea typeface="Cambria" pitchFamily="34" charset="-122"/>
+                <a:cs typeface="Cambria" pitchFamily="34" charset="-120"/>
+              </a:rPr>
+              <a:t>Ask</a:t>
+            </a:r>
+            <a:endParaRPr lang="en-US" sz="1600" dirty="0"/>
+          </a:p>
+        </p:txBody>
+      </p:sp>
+      <p:sp>
+        <p:nvSpPr>
+          <p:cNvPr id="8" name="Text 5"/>
+          <p:cNvSpPr/>
+          <p:nvPr/>
+        </p:nvSpPr>
+        <p:spPr>
+          <a:xfrm>
+            <a:off x="457200" y="3063240"/>
+            <a:ext cx="1645920" cy="914400"/>
+          </a:xfrm>
+          <a:prstGeom prst="rect">
+            <a:avLst/>
+          </a:prstGeom>
+          <a:noFill/>
+          <a:ln/>
+        </p:spPr>
+        <p:txBody>
+          <a:bodyPr wrap="square" lIns="0" tIns="0" rIns="0" bIns="0" rtlCol="0" anchor="ctr"/>
+          <a:lstStyle/>
+          <a:p>
+            <a:pPr algn="ctr" indent="0" marL="0">
+              <a:lnSpc>
+                <a:spcPct val="108000"/>
+              </a:lnSpc>
+              <a:buNone/>
+            </a:pPr>
+            <a:r>
+              <a:rPr lang="en-US" sz="1100" dirty="0">
+                <a:solidFill>
+                  <a:srgbClr val="DCE6F5"/>
+                </a:solidFill>
+                <a:latin typeface="Calibri" pitchFamily="34" charset="0"/>
+                <a:ea typeface="Calibri" pitchFamily="34" charset="-122"/>
+                <a:cs typeface="Calibri" pitchFamily="34" charset="-120"/>
+              </a:rPr>
+              <a:t>Frame the safe-+-commutable question</a:t>
+            </a:r>
+            <a:endParaRPr lang="en-US" sz="1100" dirty="0"/>
+          </a:p>
+        </p:txBody>
+      </p:sp>
+      <p:sp>
+        <p:nvSpPr>
+          <p:cNvPr id="9" name="Shape 6"/>
+          <p:cNvSpPr/>
+          <p:nvPr/>
+        </p:nvSpPr>
+        <p:spPr>
+          <a:xfrm>
+            <a:off x="1783080" y="2057400"/>
+            <a:ext cx="411480" cy="0"/>
+          </a:xfrm>
+          <a:prstGeom prst="line">
+            <a:avLst/>
+          </a:prstGeom>
+          <a:noFill/>
+          <a:ln w="19050">
+            <a:solidFill>
+              <a:srgbClr val="4A5E80"/>
+            </a:solidFill>
+            <a:prstDash val="solid"/>
+            <a:tailEnd type="triangle"/>
+          </a:ln>
+        </p:spPr>
+      </p:sp>
+      <p:sp>
+        <p:nvSpPr>
+          <p:cNvPr id="10" name="Shape 7"/>
+          <p:cNvSpPr/>
+          <p:nvPr/>
+        </p:nvSpPr>
+        <p:spPr>
+          <a:xfrm>
+            <a:off x="2523744" y="1600200"/>
+            <a:ext cx="914400" cy="914400"/>
+          </a:xfrm>
+          <a:prstGeom prst="ellipse">
+            <a:avLst/>
+          </a:prstGeom>
+          <a:solidFill>
+            <a:srgbClr val="2D5BA8"/>
+          </a:solidFill>
+          <a:ln/>
+          <a:effectLst>
+            <a:outerShdw sx="100000" sy="100000" kx="0" ky="0" algn="bl" rotWithShape="0" blurRad="88900" dist="38100" dir="5400000">
+              <a:srgbClr val="8794A8">
+                <a:alpha val="22000"/>
+              </a:srgbClr>
+            </a:outerShdw>
+          </a:effectLst>
+        </p:spPr>
+      </p:sp>
+      <p:pic>
+        <p:nvPicPr>
+          <p:cNvPr id="11" name="Image 1" descr="preencoded.png">    </p:cNvPr>
+          <p:cNvPicPr>
+            <a:picLocks noChangeAspect="1"/>
+          </p:cNvPicPr>
+          <p:nvPr/>
+        </p:nvPicPr>
+        <p:blipFill>
+          <a:blip r:embed="rId2"/>
+          <a:stretch>
+            <a:fillRect/>
+          </a:stretch>
+        </p:blipFill>
+        <p:spPr>
+          <a:xfrm>
+            <a:off x="2761488" y="1837944"/>
+            <a:ext cx="438912" cy="438912"/>
+          </a:xfrm>
+          <a:prstGeom prst="rect">
+            <a:avLst/>
+          </a:prstGeom>
+        </p:spPr>
+      </p:pic>
+      <p:sp>
+        <p:nvSpPr>
+          <p:cNvPr id="12" name="Text 8"/>
+          <p:cNvSpPr/>
+          <p:nvPr/>
+        </p:nvSpPr>
+        <p:spPr>
+          <a:xfrm>
+            <a:off x="2523744" y="1600200"/>
+            <a:ext cx="914400" cy="914400"/>
+          </a:xfrm>
+          <a:prstGeom prst="rect">
+            <a:avLst/>
+          </a:prstGeom>
+          <a:noFill/>
+          <a:ln/>
+        </p:spPr>
+        <p:txBody>
+          <a:bodyPr wrap="square" lIns="0" tIns="0" rIns="0" bIns="0" rtlCol="0" anchor="ctr"/>
+          <a:lstStyle/>
+          <a:p>
+            <a:pPr algn="ctr" indent="0" marL="0">
+              <a:buNone/>
+            </a:pPr>
+            <a:r>
+              <a:rPr lang="en-US" sz="1100" b="1" dirty="0">
+                <a:solidFill>
+                  <a:srgbClr val="FFFFFF"/>
+                </a:solidFill>
+                <a:latin typeface="Cambria" pitchFamily="34" charset="0"/>
+                <a:ea typeface="Cambria" pitchFamily="34" charset="-122"/>
+                <a:cs typeface="Cambria" pitchFamily="34" charset="-120"/>
+              </a:rPr>
+              <a:t>2</a:t>
+            </a:r>
+            <a:endParaRPr lang="en-US" sz="1100" dirty="0"/>
+          </a:p>
+        </p:txBody>
+      </p:sp>
+      <p:sp>
+        <p:nvSpPr>
+          <p:cNvPr id="13" name="Text 9"/>
+          <p:cNvSpPr/>
+          <p:nvPr/>
+        </p:nvSpPr>
+        <p:spPr>
+          <a:xfrm>
+            <a:off x="2203704" y="2697480"/>
+            <a:ext cx="1554480" cy="320040"/>
+          </a:xfrm>
+          <a:prstGeom prst="rect">
+            <a:avLst/>
+          </a:prstGeom>
+          <a:noFill/>
+          <a:ln/>
+        </p:spPr>
+        <p:txBody>
+          <a:bodyPr wrap="square" lIns="0" tIns="0" rIns="0" bIns="0" rtlCol="0" anchor="ctr"/>
+          <a:lstStyle/>
+          <a:p>
+            <a:pPr algn="ctr" indent="0" marL="0">
+              <a:buNone/>
+            </a:pPr>
+            <a:r>
+              <a:rPr lang="en-US" sz="1600" b="1" dirty="0">
+                <a:solidFill>
+                  <a:srgbClr val="FFFFFF"/>
+                </a:solidFill>
+                <a:latin typeface="Cambria" pitchFamily="34" charset="0"/>
+                <a:ea typeface="Cambria" pitchFamily="34" charset="-122"/>
+                <a:cs typeface="Cambria" pitchFamily="34" charset="-120"/>
+              </a:rPr>
+              <a:t>Prepare</a:t>
+            </a:r>
+            <a:endParaRPr lang="en-US" sz="1600" dirty="0"/>
+          </a:p>
+        </p:txBody>
+      </p:sp>
+      <p:sp>
+        <p:nvSpPr>
+          <p:cNvPr id="14" name="Text 10"/>
+          <p:cNvSpPr/>
+          <p:nvPr/>
+        </p:nvSpPr>
+        <p:spPr>
+          <a:xfrm>
+            <a:off x="2157984" y="3063240"/>
+            <a:ext cx="1645920" cy="914400"/>
+          </a:xfrm>
+          <a:prstGeom prst="rect">
+            <a:avLst/>
+          </a:prstGeom>
+          <a:noFill/>
+          <a:ln/>
+        </p:spPr>
+        <p:txBody>
+          <a:bodyPr wrap="square" lIns="0" tIns="0" rIns="0" bIns="0" rtlCol="0" anchor="ctr"/>
+          <a:lstStyle/>
+          <a:p>
+            <a:pPr algn="ctr" indent="0" marL="0">
+              <a:lnSpc>
+                <a:spcPct val="108000"/>
+              </a:lnSpc>
+              <a:buNone/>
+            </a:pPr>
+            <a:r>
+              <a:rPr lang="en-US" sz="1100" dirty="0">
+                <a:solidFill>
+                  <a:srgbClr val="DCE6F5"/>
+                </a:solidFill>
+                <a:latin typeface="Calibri" pitchFamily="34" charset="0"/>
+                <a:ea typeface="Calibri" pitchFamily="34" charset="-122"/>
+                <a:cs typeface="Calibri" pitchFamily="34" charset="-120"/>
+              </a:rPr>
+              <a:t>Pull &amp; clean 2 yrs of city data</a:t>
+            </a:r>
+            <a:endParaRPr lang="en-US" sz="1100" dirty="0"/>
+          </a:p>
+        </p:txBody>
+      </p:sp>
+      <p:sp>
+        <p:nvSpPr>
+          <p:cNvPr id="15" name="Shape 11"/>
+          <p:cNvSpPr/>
+          <p:nvPr/>
+        </p:nvSpPr>
+        <p:spPr>
+          <a:xfrm>
+            <a:off x="3483864" y="2057400"/>
+            <a:ext cx="411480" cy="0"/>
+          </a:xfrm>
+          <a:prstGeom prst="line">
+            <a:avLst/>
+          </a:prstGeom>
+          <a:noFill/>
+          <a:ln w="19050">
+            <a:solidFill>
+              <a:srgbClr val="4A5E80"/>
+            </a:solidFill>
+            <a:prstDash val="solid"/>
+            <a:tailEnd type="triangle"/>
+          </a:ln>
+        </p:spPr>
+      </p:sp>
+      <p:sp>
+        <p:nvSpPr>
+          <p:cNvPr id="16" name="Shape 12"/>
+          <p:cNvSpPr/>
+          <p:nvPr/>
+        </p:nvSpPr>
+        <p:spPr>
+          <a:xfrm>
+            <a:off x="4224528" y="1600200"/>
+            <a:ext cx="914400" cy="914400"/>
+          </a:xfrm>
+          <a:prstGeom prst="ellipse">
+            <a:avLst/>
+          </a:prstGeom>
+          <a:solidFill>
+            <a:srgbClr val="2D5BA8"/>
+          </a:solidFill>
+          <a:ln/>
+          <a:effectLst>
+            <a:outerShdw sx="100000" sy="100000" kx="0" ky="0" algn="bl" rotWithShape="0" blurRad="88900" dist="38100" dir="5400000">
+              <a:srgbClr val="8794A8">
+                <a:alpha val="22000"/>
+              </a:srgbClr>
+            </a:outerShdw>
+          </a:effectLst>
+        </p:spPr>
+      </p:sp>
+      <p:pic>
+        <p:nvPicPr>
+          <p:cNvPr id="17" name="Image 2" descr="preencoded.png">    </p:cNvPr>
           <p:cNvPicPr>
             <a:picLocks noChangeAspect="1"/>
           </p:cNvPicPr>
@@ -9813,7 +10404,7 @@
         </p:blipFill>
         <p:spPr>
           <a:xfrm>
-            <a:off x="1060704" y="1837944"/>
+            <a:off x="4462272" y="1837944"/>
             <a:ext cx="438912" cy="438912"/>
           </a:xfrm>
           <a:prstGeom prst="rect">
@@ -9823,13 +10414,13 @@
       </p:pic>
       <p:sp>
         <p:nvSpPr>
-          <p:cNvPr id="6" name="Text 3"/>
-          <p:cNvSpPr/>
-          <p:nvPr/>
-        </p:nvSpPr>
-        <p:spPr>
-          <a:xfrm>
-            <a:off x="822960" y="1600200"/>
+          <p:cNvPr id="18" name="Text 13"/>
+          <p:cNvSpPr/>
+          <p:nvPr/>
+        </p:nvSpPr>
+        <p:spPr>
+          <a:xfrm>
+            <a:off x="4224528" y="1600200"/>
             <a:ext cx="914400" cy="914400"/>
           </a:xfrm>
           <a:prstGeom prst="rect">
@@ -9842,7 +10433,7 @@
           <a:bodyPr wrap="square" lIns="0" tIns="0" rIns="0" bIns="0" rtlCol="0" anchor="ctr"/>
           <a:lstStyle/>
           <a:p>
-            <a:pPr marL="0" indent="0" algn="ctr">
+            <a:pPr algn="ctr" indent="0" marL="0">
               <a:buNone/>
             </a:pPr>
             <a:r>
@@ -9854,7 +10445,7 @@
                 <a:ea typeface="Cambria" pitchFamily="34" charset="-122"/>
                 <a:cs typeface="Cambria" pitchFamily="34" charset="-120"/>
               </a:rPr>
-              <a:t>1</a:t>
+              <a:t>3</a:t>
             </a:r>
             <a:endParaRPr lang="en-US" sz="1100" dirty="0"/>
           </a:p>
@@ -9862,13 +10453,13 @@
       </p:sp>
       <p:sp>
         <p:nvSpPr>
-          <p:cNvPr id="7" name="Text 4"/>
-          <p:cNvSpPr/>
-          <p:nvPr/>
-        </p:nvSpPr>
-        <p:spPr>
-          <a:xfrm>
-            <a:off x="502920" y="2697480"/>
+          <p:cNvPr id="19" name="Text 14"/>
+          <p:cNvSpPr/>
+          <p:nvPr/>
+        </p:nvSpPr>
+        <p:spPr>
+          <a:xfrm>
+            <a:off x="3904488" y="2697480"/>
             <a:ext cx="1554480" cy="320040"/>
           </a:xfrm>
           <a:prstGeom prst="rect">
@@ -9881,7 +10472,7 @@
           <a:bodyPr wrap="square" lIns="0" tIns="0" rIns="0" bIns="0" rtlCol="0" anchor="ctr"/>
           <a:lstStyle/>
           <a:p>
-            <a:pPr marL="0" indent="0" algn="ctr">
+            <a:pPr algn="ctr" indent="0" marL="0">
               <a:buNone/>
             </a:pPr>
             <a:r>
@@ -9893,7 +10484,7 @@
                 <a:ea typeface="Cambria" pitchFamily="34" charset="-122"/>
                 <a:cs typeface="Cambria" pitchFamily="34" charset="-120"/>
               </a:rPr>
-              <a:t>Ask</a:t>
+              <a:t>Process</a:t>
             </a:r>
             <a:endParaRPr lang="en-US" sz="1600" dirty="0"/>
           </a:p>
@@ -9901,13 +10492,13 @@
       </p:sp>
       <p:sp>
         <p:nvSpPr>
-          <p:cNvPr id="8" name="Text 5"/>
-          <p:cNvSpPr/>
-          <p:nvPr/>
-        </p:nvSpPr>
-        <p:spPr>
-          <a:xfrm>
-            <a:off x="457200" y="3063240"/>
+          <p:cNvPr id="20" name="Text 15"/>
+          <p:cNvSpPr/>
+          <p:nvPr/>
+        </p:nvSpPr>
+        <p:spPr>
+          <a:xfrm>
+            <a:off x="3858768" y="3063240"/>
             <a:ext cx="1645920" cy="914400"/>
           </a:xfrm>
           <a:prstGeom prst="rect">
@@ -9920,7 +10511,7 @@
           <a:bodyPr wrap="square" lIns="0" tIns="0" rIns="0" bIns="0" rtlCol="0" anchor="ctr"/>
           <a:lstStyle/>
           <a:p>
-            <a:pPr marL="0" indent="0" algn="ctr">
+            <a:pPr algn="ctr" indent="0" marL="0">
               <a:lnSpc>
                 <a:spcPct val="108000"/>
               </a:lnSpc>
@@ -9935,7 +10526,7 @@
                 <a:ea typeface="Calibri" pitchFamily="34" charset="-122"/>
                 <a:cs typeface="Calibri" pitchFamily="34" charset="-120"/>
               </a:rPr>
-              <a:t>Frame the safe-+-commutable question</a:t>
+              <a:t>Flag violent crime, fix day-of-week, ÷24</a:t>
             </a:r>
             <a:endParaRPr lang="en-US" sz="1100" dirty="0"/>
           </a:p>
@@ -9943,13 +10534,13 @@
       </p:sp>
       <p:sp>
         <p:nvSpPr>
-          <p:cNvPr id="9" name="Shape 6"/>
-          <p:cNvSpPr/>
-          <p:nvPr/>
-        </p:nvSpPr>
-        <p:spPr>
-          <a:xfrm>
-            <a:off x="1783080" y="2057400"/>
+          <p:cNvPr id="21" name="Shape 16"/>
+          <p:cNvSpPr/>
+          <p:nvPr/>
+        </p:nvSpPr>
+        <p:spPr>
+          <a:xfrm>
+            <a:off x="5184648" y="2057400"/>
             <a:ext cx="411480" cy="0"/>
           </a:xfrm>
           <a:prstGeom prst="line">
@@ -9964,23 +10555,16 @@
             <a:tailEnd type="triangle"/>
           </a:ln>
         </p:spPr>
-        <p:txBody>
-          <a:bodyPr/>
-          <a:lstStyle/>
-          <a:p>
-            <a:endParaRPr lang="en-US"/>
-          </a:p>
-        </p:txBody>
-      </p:sp>
-      <p:sp>
-        <p:nvSpPr>
-          <p:cNvPr id="10" name="Shape 7"/>
-          <p:cNvSpPr/>
-          <p:nvPr/>
-        </p:nvSpPr>
-        <p:spPr>
-          <a:xfrm>
-            <a:off x="2523744" y="1600200"/>
+      </p:sp>
+      <p:sp>
+        <p:nvSpPr>
+          <p:cNvPr id="22" name="Shape 17"/>
+          <p:cNvSpPr/>
+          <p:nvPr/>
+        </p:nvSpPr>
+        <p:spPr>
+          <a:xfrm>
+            <a:off x="5925312" y="1600200"/>
             <a:ext cx="914400" cy="914400"/>
           </a:xfrm>
           <a:prstGeom prst="ellipse">
@@ -9991,24 +10575,17 @@
           </a:solidFill>
           <a:ln/>
           <a:effectLst>
-            <a:outerShdw blurRad="88900" dist="38100" dir="5400000" algn="bl" rotWithShape="0">
+            <a:outerShdw sx="100000" sy="100000" kx="0" ky="0" algn="bl" rotWithShape="0" blurRad="88900" dist="38100" dir="5400000">
               <a:srgbClr val="8794A8">
                 <a:alpha val="22000"/>
               </a:srgbClr>
             </a:outerShdw>
           </a:effectLst>
         </p:spPr>
-        <p:txBody>
-          <a:bodyPr/>
-          <a:lstStyle/>
-          <a:p>
-            <a:endParaRPr lang="en-US"/>
-          </a:p>
-        </p:txBody>
       </p:sp>
       <p:pic>
         <p:nvPicPr>
-          <p:cNvPr id="11" name="Image 1" descr="preencoded.png"/>
+          <p:cNvPr id="23" name="Image 3" descr="preencoded.png">    </p:cNvPr>
           <p:cNvPicPr>
             <a:picLocks noChangeAspect="1"/>
           </p:cNvPicPr>
@@ -10022,7 +10599,7 @@
         </p:blipFill>
         <p:spPr>
           <a:xfrm>
-            <a:off x="2761488" y="1837944"/>
+            <a:off x="6163056" y="1837944"/>
             <a:ext cx="438912" cy="438912"/>
           </a:xfrm>
           <a:prstGeom prst="rect">
@@ -10032,13 +10609,13 @@
       </p:pic>
       <p:sp>
         <p:nvSpPr>
-          <p:cNvPr id="12" name="Text 8"/>
-          <p:cNvSpPr/>
-          <p:nvPr/>
-        </p:nvSpPr>
-        <p:spPr>
-          <a:xfrm>
-            <a:off x="2523744" y="1600200"/>
+          <p:cNvPr id="24" name="Text 18"/>
+          <p:cNvSpPr/>
+          <p:nvPr/>
+        </p:nvSpPr>
+        <p:spPr>
+          <a:xfrm>
+            <a:off x="5925312" y="1600200"/>
             <a:ext cx="914400" cy="914400"/>
           </a:xfrm>
           <a:prstGeom prst="rect">
@@ -10051,7 +10628,7 @@
           <a:bodyPr wrap="square" lIns="0" tIns="0" rIns="0" bIns="0" rtlCol="0" anchor="ctr"/>
           <a:lstStyle/>
           <a:p>
-            <a:pPr marL="0" indent="0" algn="ctr">
+            <a:pPr algn="ctr" indent="0" marL="0">
               <a:buNone/>
             </a:pPr>
             <a:r>
@@ -10063,7 +10640,7 @@
                 <a:ea typeface="Cambria" pitchFamily="34" charset="-122"/>
                 <a:cs typeface="Cambria" pitchFamily="34" charset="-120"/>
               </a:rPr>
-              <a:t>2</a:t>
+              <a:t>4</a:t>
             </a:r>
             <a:endParaRPr lang="en-US" sz="1100" dirty="0"/>
           </a:p>
@@ -10071,13 +10648,13 @@
       </p:sp>
       <p:sp>
         <p:nvSpPr>
-          <p:cNvPr id="13" name="Text 9"/>
-          <p:cNvSpPr/>
-          <p:nvPr/>
-        </p:nvSpPr>
-        <p:spPr>
-          <a:xfrm>
-            <a:off x="2203704" y="2697480"/>
+          <p:cNvPr id="25" name="Text 19"/>
+          <p:cNvSpPr/>
+          <p:nvPr/>
+        </p:nvSpPr>
+        <p:spPr>
+          <a:xfrm>
+            <a:off x="5605272" y="2697480"/>
             <a:ext cx="1554480" cy="320040"/>
           </a:xfrm>
           <a:prstGeom prst="rect">
@@ -10090,7 +10667,7 @@
           <a:bodyPr wrap="square" lIns="0" tIns="0" rIns="0" bIns="0" rtlCol="0" anchor="ctr"/>
           <a:lstStyle/>
           <a:p>
-            <a:pPr marL="0" indent="0" algn="ctr">
+            <a:pPr algn="ctr" indent="0" marL="0">
               <a:buNone/>
             </a:pPr>
             <a:r>
@@ -10102,7 +10679,7 @@
                 <a:ea typeface="Cambria" pitchFamily="34" charset="-122"/>
                 <a:cs typeface="Cambria" pitchFamily="34" charset="-120"/>
               </a:rPr>
-              <a:t>Prepare</a:t>
+              <a:t>Analyze</a:t>
             </a:r>
             <a:endParaRPr lang="en-US" sz="1600" dirty="0"/>
           </a:p>
@@ -10110,13 +10687,13 @@
       </p:sp>
       <p:sp>
         <p:nvSpPr>
-          <p:cNvPr id="14" name="Text 10"/>
-          <p:cNvSpPr/>
-          <p:nvPr/>
-        </p:nvSpPr>
-        <p:spPr>
-          <a:xfrm>
-            <a:off x="2157984" y="3063240"/>
+          <p:cNvPr id="26" name="Text 20"/>
+          <p:cNvSpPr/>
+          <p:nvPr/>
+        </p:nvSpPr>
+        <p:spPr>
+          <a:xfrm>
+            <a:off x="5559552" y="3063240"/>
             <a:ext cx="1645920" cy="914400"/>
           </a:xfrm>
           <a:prstGeom prst="rect">
@@ -10129,7 +10706,7 @@
           <a:bodyPr wrap="square" lIns="0" tIns="0" rIns="0" bIns="0" rtlCol="0" anchor="ctr"/>
           <a:lstStyle/>
           <a:p>
-            <a:pPr marL="0" indent="0" algn="ctr">
+            <a:pPr algn="ctr" indent="0" marL="0">
               <a:lnSpc>
                 <a:spcPct val="108000"/>
               </a:lnSpc>
@@ -10144,28 +10721,7 @@
                 <a:ea typeface="Calibri" pitchFamily="34" charset="-122"/>
                 <a:cs typeface="Calibri" pitchFamily="34" charset="-120"/>
               </a:rPr>
-              <a:t>Pull &amp; clean 2 yrs of </a:t>
-            </a:r>
-            <a:br>
-              <a:rPr lang="en-US" sz="1100" dirty="0">
-                <a:solidFill>
-                  <a:srgbClr val="DCE6F5"/>
-                </a:solidFill>
-                <a:latin typeface="Calibri" pitchFamily="34" charset="0"/>
-                <a:ea typeface="Calibri" pitchFamily="34" charset="-122"/>
-                <a:cs typeface="Calibri" pitchFamily="34" charset="-120"/>
-              </a:rPr>
-            </a:br>
-            <a:r>
-              <a:rPr lang="en-US" sz="1100" dirty="0">
-                <a:solidFill>
-                  <a:srgbClr val="DCE6F5"/>
-                </a:solidFill>
-                <a:latin typeface="Calibri" pitchFamily="34" charset="0"/>
-                <a:ea typeface="Calibri" pitchFamily="34" charset="-122"/>
-                <a:cs typeface="Calibri" pitchFamily="34" charset="-120"/>
-              </a:rPr>
-              <a:t>city data</a:t>
+              <a:t>Rank districts, find the patterns</a:t>
             </a:r>
             <a:endParaRPr lang="en-US" sz="1100" dirty="0"/>
           </a:p>
@@ -10173,13 +10729,13 @@
       </p:sp>
       <p:sp>
         <p:nvSpPr>
-          <p:cNvPr id="15" name="Shape 11"/>
-          <p:cNvSpPr/>
-          <p:nvPr/>
-        </p:nvSpPr>
-        <p:spPr>
-          <a:xfrm>
-            <a:off x="3483864" y="2057400"/>
+          <p:cNvPr id="27" name="Shape 21"/>
+          <p:cNvSpPr/>
+          <p:nvPr/>
+        </p:nvSpPr>
+        <p:spPr>
+          <a:xfrm>
+            <a:off x="6885432" y="2057400"/>
             <a:ext cx="411480" cy="0"/>
           </a:xfrm>
           <a:prstGeom prst="line">
@@ -10194,51 +10750,37 @@
             <a:tailEnd type="triangle"/>
           </a:ln>
         </p:spPr>
-        <p:txBody>
-          <a:bodyPr/>
-          <a:lstStyle/>
-          <a:p>
-            <a:endParaRPr lang="en-US"/>
-          </a:p>
-        </p:txBody>
-      </p:sp>
-      <p:sp>
-        <p:nvSpPr>
-          <p:cNvPr id="16" name="Shape 12"/>
-          <p:cNvSpPr/>
-          <p:nvPr/>
-        </p:nvSpPr>
-        <p:spPr>
-          <a:xfrm>
-            <a:off x="4224528" y="1600200"/>
+      </p:sp>
+      <p:sp>
+        <p:nvSpPr>
+          <p:cNvPr id="28" name="Shape 22"/>
+          <p:cNvSpPr/>
+          <p:nvPr/>
+        </p:nvSpPr>
+        <p:spPr>
+          <a:xfrm>
+            <a:off x="7626096" y="1600200"/>
             <a:ext cx="914400" cy="914400"/>
           </a:xfrm>
           <a:prstGeom prst="ellipse">
             <a:avLst/>
           </a:prstGeom>
           <a:solidFill>
-            <a:srgbClr val="2D5BA8"/>
+            <a:srgbClr val="1F9D6B"/>
           </a:solidFill>
           <a:ln/>
           <a:effectLst>
-            <a:outerShdw blurRad="88900" dist="38100" dir="5400000" algn="bl" rotWithShape="0">
+            <a:outerShdw sx="100000" sy="100000" kx="0" ky="0" algn="bl" rotWithShape="0" blurRad="88900" dist="38100" dir="5400000">
               <a:srgbClr val="8794A8">
                 <a:alpha val="22000"/>
               </a:srgbClr>
             </a:outerShdw>
           </a:effectLst>
         </p:spPr>
-        <p:txBody>
-          <a:bodyPr/>
-          <a:lstStyle/>
-          <a:p>
-            <a:endParaRPr lang="en-US"/>
-          </a:p>
-        </p:txBody>
       </p:sp>
       <p:pic>
         <p:nvPicPr>
-          <p:cNvPr id="17" name="Image 2" descr="preencoded.png"/>
+          <p:cNvPr id="29" name="Image 4" descr="preencoded.png">    </p:cNvPr>
           <p:cNvPicPr>
             <a:picLocks noChangeAspect="1"/>
           </p:cNvPicPr>
@@ -10252,7 +10794,7 @@
         </p:blipFill>
         <p:spPr>
           <a:xfrm>
-            <a:off x="4462272" y="1837944"/>
+            <a:off x="7863840" y="1837944"/>
             <a:ext cx="438912" cy="438912"/>
           </a:xfrm>
           <a:prstGeom prst="rect">
@@ -10262,13 +10804,13 @@
       </p:pic>
       <p:sp>
         <p:nvSpPr>
-          <p:cNvPr id="18" name="Text 13"/>
-          <p:cNvSpPr/>
-          <p:nvPr/>
-        </p:nvSpPr>
-        <p:spPr>
-          <a:xfrm>
-            <a:off x="4224528" y="1600200"/>
+          <p:cNvPr id="30" name="Text 23"/>
+          <p:cNvSpPr/>
+          <p:nvPr/>
+        </p:nvSpPr>
+        <p:spPr>
+          <a:xfrm>
+            <a:off x="7626096" y="1600200"/>
             <a:ext cx="914400" cy="914400"/>
           </a:xfrm>
           <a:prstGeom prst="rect">
@@ -10281,7 +10823,7 @@
           <a:bodyPr wrap="square" lIns="0" tIns="0" rIns="0" bIns="0" rtlCol="0" anchor="ctr"/>
           <a:lstStyle/>
           <a:p>
-            <a:pPr marL="0" indent="0" algn="ctr">
+            <a:pPr algn="ctr" indent="0" marL="0">
               <a:buNone/>
             </a:pPr>
             <a:r>
@@ -10293,7 +10835,7 @@
                 <a:ea typeface="Cambria" pitchFamily="34" charset="-122"/>
                 <a:cs typeface="Cambria" pitchFamily="34" charset="-120"/>
               </a:rPr>
-              <a:t>3</a:t>
+              <a:t>5</a:t>
             </a:r>
             <a:endParaRPr lang="en-US" sz="1100" dirty="0"/>
           </a:p>
@@ -10301,13 +10843,13 @@
       </p:sp>
       <p:sp>
         <p:nvSpPr>
-          <p:cNvPr id="19" name="Text 14"/>
-          <p:cNvSpPr/>
-          <p:nvPr/>
-        </p:nvSpPr>
-        <p:spPr>
-          <a:xfrm>
-            <a:off x="3904488" y="2697480"/>
+          <p:cNvPr id="31" name="Text 24"/>
+          <p:cNvSpPr/>
+          <p:nvPr/>
+        </p:nvSpPr>
+        <p:spPr>
+          <a:xfrm>
+            <a:off x="7306056" y="2697480"/>
             <a:ext cx="1554480" cy="320040"/>
           </a:xfrm>
           <a:prstGeom prst="rect">
@@ -10320,7 +10862,7 @@
           <a:bodyPr wrap="square" lIns="0" tIns="0" rIns="0" bIns="0" rtlCol="0" anchor="ctr"/>
           <a:lstStyle/>
           <a:p>
-            <a:pPr marL="0" indent="0" algn="ctr">
+            <a:pPr algn="ctr" indent="0" marL="0">
               <a:buNone/>
             </a:pPr>
             <a:r>
@@ -10332,7 +10874,7 @@
                 <a:ea typeface="Cambria" pitchFamily="34" charset="-122"/>
                 <a:cs typeface="Cambria" pitchFamily="34" charset="-120"/>
               </a:rPr>
-              <a:t>Process</a:t>
+              <a:t>Share</a:t>
             </a:r>
             <a:endParaRPr lang="en-US" sz="1600" dirty="0"/>
           </a:p>
@@ -10340,13 +10882,13 @@
       </p:sp>
       <p:sp>
         <p:nvSpPr>
-          <p:cNvPr id="20" name="Text 15"/>
-          <p:cNvSpPr/>
-          <p:nvPr/>
-        </p:nvSpPr>
-        <p:spPr>
-          <a:xfrm>
-            <a:off x="3858768" y="3063240"/>
+          <p:cNvPr id="32" name="Text 25"/>
+          <p:cNvSpPr/>
+          <p:nvPr/>
+        </p:nvSpPr>
+        <p:spPr>
+          <a:xfrm>
+            <a:off x="7260336" y="3063240"/>
             <a:ext cx="1645920" cy="914400"/>
           </a:xfrm>
           <a:prstGeom prst="rect">
@@ -10359,7 +10901,7 @@
           <a:bodyPr wrap="square" lIns="0" tIns="0" rIns="0" bIns="0" rtlCol="0" anchor="ctr"/>
           <a:lstStyle/>
           <a:p>
-            <a:pPr marL="0" indent="0" algn="ctr">
+            <a:pPr algn="ctr" indent="0" marL="0">
               <a:lnSpc>
                 <a:spcPct val="108000"/>
               </a:lnSpc>
@@ -10374,445 +10916,6 @@
                 <a:ea typeface="Calibri" pitchFamily="34" charset="-122"/>
                 <a:cs typeface="Calibri" pitchFamily="34" charset="-120"/>
               </a:rPr>
-              <a:t>Flag violent crime, </a:t>
-            </a:r>
-            <a:br>
-              <a:rPr lang="en-US" sz="1100" dirty="0">
-                <a:solidFill>
-                  <a:srgbClr val="DCE6F5"/>
-                </a:solidFill>
-                <a:latin typeface="Calibri" pitchFamily="34" charset="0"/>
-                <a:ea typeface="Calibri" pitchFamily="34" charset="-122"/>
-                <a:cs typeface="Calibri" pitchFamily="34" charset="-120"/>
-              </a:rPr>
-            </a:br>
-            <a:r>
-              <a:rPr lang="en-US" sz="1100" dirty="0">
-                <a:solidFill>
-                  <a:srgbClr val="DCE6F5"/>
-                </a:solidFill>
-                <a:latin typeface="Calibri" pitchFamily="34" charset="0"/>
-                <a:ea typeface="Calibri" pitchFamily="34" charset="-122"/>
-                <a:cs typeface="Calibri" pitchFamily="34" charset="-120"/>
-              </a:rPr>
-              <a:t>fix day-of-week, crime ÷24</a:t>
-            </a:r>
-            <a:endParaRPr lang="en-US" sz="1100" dirty="0"/>
-          </a:p>
-        </p:txBody>
-      </p:sp>
-      <p:sp>
-        <p:nvSpPr>
-          <p:cNvPr id="21" name="Shape 16"/>
-          <p:cNvSpPr/>
-          <p:nvPr/>
-        </p:nvSpPr>
-        <p:spPr>
-          <a:xfrm>
-            <a:off x="5184648" y="2057400"/>
-            <a:ext cx="411480" cy="0"/>
-          </a:xfrm>
-          <a:prstGeom prst="line">
-            <a:avLst/>
-          </a:prstGeom>
-          <a:noFill/>
-          <a:ln w="19050">
-            <a:solidFill>
-              <a:srgbClr val="4A5E80"/>
-            </a:solidFill>
-            <a:prstDash val="solid"/>
-            <a:tailEnd type="triangle"/>
-          </a:ln>
-        </p:spPr>
-        <p:txBody>
-          <a:bodyPr/>
-          <a:lstStyle/>
-          <a:p>
-            <a:endParaRPr lang="en-US"/>
-          </a:p>
-        </p:txBody>
-      </p:sp>
-      <p:sp>
-        <p:nvSpPr>
-          <p:cNvPr id="22" name="Shape 17"/>
-          <p:cNvSpPr/>
-          <p:nvPr/>
-        </p:nvSpPr>
-        <p:spPr>
-          <a:xfrm>
-            <a:off x="5925312" y="1600200"/>
-            <a:ext cx="914400" cy="914400"/>
-          </a:xfrm>
-          <a:prstGeom prst="ellipse">
-            <a:avLst/>
-          </a:prstGeom>
-          <a:solidFill>
-            <a:srgbClr val="2D5BA8"/>
-          </a:solidFill>
-          <a:ln/>
-          <a:effectLst>
-            <a:outerShdw blurRad="88900" dist="38100" dir="5400000" algn="bl" rotWithShape="0">
-              <a:srgbClr val="8794A8">
-                <a:alpha val="22000"/>
-              </a:srgbClr>
-            </a:outerShdw>
-          </a:effectLst>
-        </p:spPr>
-        <p:txBody>
-          <a:bodyPr/>
-          <a:lstStyle/>
-          <a:p>
-            <a:endParaRPr lang="en-US"/>
-          </a:p>
-        </p:txBody>
-      </p:sp>
-      <p:pic>
-        <p:nvPicPr>
-          <p:cNvPr id="23" name="Image 3" descr="preencoded.png"/>
-          <p:cNvPicPr>
-            <a:picLocks noChangeAspect="1"/>
-          </p:cNvPicPr>
-          <p:nvPr/>
-        </p:nvPicPr>
-        <p:blipFill>
-          <a:blip r:embed="rId6"/>
-          <a:stretch>
-            <a:fillRect/>
-          </a:stretch>
-        </p:blipFill>
-        <p:spPr>
-          <a:xfrm>
-            <a:off x="6163056" y="1837944"/>
-            <a:ext cx="438912" cy="438912"/>
-          </a:xfrm>
-          <a:prstGeom prst="rect">
-            <a:avLst/>
-          </a:prstGeom>
-        </p:spPr>
-      </p:pic>
-      <p:sp>
-        <p:nvSpPr>
-          <p:cNvPr id="24" name="Text 18"/>
-          <p:cNvSpPr/>
-          <p:nvPr/>
-        </p:nvSpPr>
-        <p:spPr>
-          <a:xfrm>
-            <a:off x="5925312" y="1600200"/>
-            <a:ext cx="914400" cy="914400"/>
-          </a:xfrm>
-          <a:prstGeom prst="rect">
-            <a:avLst/>
-          </a:prstGeom>
-          <a:noFill/>
-          <a:ln/>
-        </p:spPr>
-        <p:txBody>
-          <a:bodyPr wrap="square" lIns="0" tIns="0" rIns="0" bIns="0" rtlCol="0" anchor="ctr"/>
-          <a:lstStyle/>
-          <a:p>
-            <a:pPr marL="0" indent="0" algn="ctr">
-              <a:buNone/>
-            </a:pPr>
-            <a:r>
-              <a:rPr lang="en-US" sz="1100" b="1" dirty="0">
-                <a:solidFill>
-                  <a:srgbClr val="FFFFFF"/>
-                </a:solidFill>
-                <a:latin typeface="Cambria" pitchFamily="34" charset="0"/>
-                <a:ea typeface="Cambria" pitchFamily="34" charset="-122"/>
-                <a:cs typeface="Cambria" pitchFamily="34" charset="-120"/>
-              </a:rPr>
-              <a:t>4</a:t>
-            </a:r>
-            <a:endParaRPr lang="en-US" sz="1100" dirty="0"/>
-          </a:p>
-        </p:txBody>
-      </p:sp>
-      <p:sp>
-        <p:nvSpPr>
-          <p:cNvPr id="25" name="Text 19"/>
-          <p:cNvSpPr/>
-          <p:nvPr/>
-        </p:nvSpPr>
-        <p:spPr>
-          <a:xfrm>
-            <a:off x="5605272" y="2697480"/>
-            <a:ext cx="1554480" cy="320040"/>
-          </a:xfrm>
-          <a:prstGeom prst="rect">
-            <a:avLst/>
-          </a:prstGeom>
-          <a:noFill/>
-          <a:ln/>
-        </p:spPr>
-        <p:txBody>
-          <a:bodyPr wrap="square" lIns="0" tIns="0" rIns="0" bIns="0" rtlCol="0" anchor="ctr"/>
-          <a:lstStyle/>
-          <a:p>
-            <a:pPr marL="0" indent="0" algn="ctr">
-              <a:buNone/>
-            </a:pPr>
-            <a:r>
-              <a:rPr lang="en-US" sz="1600" b="1" dirty="0">
-                <a:solidFill>
-                  <a:srgbClr val="FFFFFF"/>
-                </a:solidFill>
-                <a:latin typeface="Cambria" pitchFamily="34" charset="0"/>
-                <a:ea typeface="Cambria" pitchFamily="34" charset="-122"/>
-                <a:cs typeface="Cambria" pitchFamily="34" charset="-120"/>
-              </a:rPr>
-              <a:t>Analyze</a:t>
-            </a:r>
-            <a:endParaRPr lang="en-US" sz="1600" dirty="0"/>
-          </a:p>
-        </p:txBody>
-      </p:sp>
-      <p:sp>
-        <p:nvSpPr>
-          <p:cNvPr id="26" name="Text 20"/>
-          <p:cNvSpPr/>
-          <p:nvPr/>
-        </p:nvSpPr>
-        <p:spPr>
-          <a:xfrm>
-            <a:off x="5559552" y="3063240"/>
-            <a:ext cx="1645920" cy="914400"/>
-          </a:xfrm>
-          <a:prstGeom prst="rect">
-            <a:avLst/>
-          </a:prstGeom>
-          <a:noFill/>
-          <a:ln/>
-        </p:spPr>
-        <p:txBody>
-          <a:bodyPr wrap="square" lIns="0" tIns="0" rIns="0" bIns="0" rtlCol="0" anchor="ctr"/>
-          <a:lstStyle/>
-          <a:p>
-            <a:pPr marL="0" indent="0" algn="ctr">
-              <a:lnSpc>
-                <a:spcPct val="108000"/>
-              </a:lnSpc>
-              <a:buNone/>
-            </a:pPr>
-            <a:r>
-              <a:rPr lang="en-US" sz="1100" dirty="0">
-                <a:solidFill>
-                  <a:srgbClr val="DCE6F5"/>
-                </a:solidFill>
-                <a:latin typeface="Calibri" pitchFamily="34" charset="0"/>
-                <a:ea typeface="Calibri" pitchFamily="34" charset="-122"/>
-                <a:cs typeface="Calibri" pitchFamily="34" charset="-120"/>
-              </a:rPr>
-              <a:t>Rank districts, find the patterns</a:t>
-            </a:r>
-            <a:endParaRPr lang="en-US" sz="1100" dirty="0"/>
-          </a:p>
-        </p:txBody>
-      </p:sp>
-      <p:sp>
-        <p:nvSpPr>
-          <p:cNvPr id="27" name="Shape 21"/>
-          <p:cNvSpPr/>
-          <p:nvPr/>
-        </p:nvSpPr>
-        <p:spPr>
-          <a:xfrm>
-            <a:off x="6885432" y="2057400"/>
-            <a:ext cx="411480" cy="0"/>
-          </a:xfrm>
-          <a:prstGeom prst="line">
-            <a:avLst/>
-          </a:prstGeom>
-          <a:noFill/>
-          <a:ln w="19050">
-            <a:solidFill>
-              <a:srgbClr val="4A5E80"/>
-            </a:solidFill>
-            <a:prstDash val="solid"/>
-            <a:tailEnd type="triangle"/>
-          </a:ln>
-        </p:spPr>
-        <p:txBody>
-          <a:bodyPr/>
-          <a:lstStyle/>
-          <a:p>
-            <a:endParaRPr lang="en-US"/>
-          </a:p>
-        </p:txBody>
-      </p:sp>
-      <p:sp>
-        <p:nvSpPr>
-          <p:cNvPr id="28" name="Shape 22"/>
-          <p:cNvSpPr/>
-          <p:nvPr/>
-        </p:nvSpPr>
-        <p:spPr>
-          <a:xfrm>
-            <a:off x="7626096" y="1600200"/>
-            <a:ext cx="914400" cy="914400"/>
-          </a:xfrm>
-          <a:prstGeom prst="ellipse">
-            <a:avLst/>
-          </a:prstGeom>
-          <a:solidFill>
-            <a:srgbClr val="1F9D6B"/>
-          </a:solidFill>
-          <a:ln/>
-          <a:effectLst>
-            <a:outerShdw blurRad="88900" dist="38100" dir="5400000" algn="bl" rotWithShape="0">
-              <a:srgbClr val="8794A8">
-                <a:alpha val="22000"/>
-              </a:srgbClr>
-            </a:outerShdw>
-          </a:effectLst>
-        </p:spPr>
-        <p:txBody>
-          <a:bodyPr/>
-          <a:lstStyle/>
-          <a:p>
-            <a:endParaRPr lang="en-US"/>
-          </a:p>
-        </p:txBody>
-      </p:sp>
-      <p:pic>
-        <p:nvPicPr>
-          <p:cNvPr id="29" name="Image 4" descr="preencoded.png"/>
-          <p:cNvPicPr>
-            <a:picLocks noChangeAspect="1"/>
-          </p:cNvPicPr>
-          <p:nvPr/>
-        </p:nvPicPr>
-        <p:blipFill>
-          <a:blip r:embed="rId7"/>
-          <a:stretch>
-            <a:fillRect/>
-          </a:stretch>
-        </p:blipFill>
-        <p:spPr>
-          <a:xfrm>
-            <a:off x="7863840" y="1837944"/>
-            <a:ext cx="438912" cy="438912"/>
-          </a:xfrm>
-          <a:prstGeom prst="rect">
-            <a:avLst/>
-          </a:prstGeom>
-        </p:spPr>
-      </p:pic>
-      <p:sp>
-        <p:nvSpPr>
-          <p:cNvPr id="30" name="Text 23"/>
-          <p:cNvSpPr/>
-          <p:nvPr/>
-        </p:nvSpPr>
-        <p:spPr>
-          <a:xfrm>
-            <a:off x="7626096" y="1600200"/>
-            <a:ext cx="914400" cy="914400"/>
-          </a:xfrm>
-          <a:prstGeom prst="rect">
-            <a:avLst/>
-          </a:prstGeom>
-          <a:noFill/>
-          <a:ln/>
-        </p:spPr>
-        <p:txBody>
-          <a:bodyPr wrap="square" lIns="0" tIns="0" rIns="0" bIns="0" rtlCol="0" anchor="ctr"/>
-          <a:lstStyle/>
-          <a:p>
-            <a:pPr marL="0" indent="0" algn="ctr">
-              <a:buNone/>
-            </a:pPr>
-            <a:r>
-              <a:rPr lang="en-US" sz="1100" b="1" dirty="0">
-                <a:solidFill>
-                  <a:srgbClr val="FFFFFF"/>
-                </a:solidFill>
-                <a:latin typeface="Cambria" pitchFamily="34" charset="0"/>
-                <a:ea typeface="Cambria" pitchFamily="34" charset="-122"/>
-                <a:cs typeface="Cambria" pitchFamily="34" charset="-120"/>
-              </a:rPr>
-              <a:t>5</a:t>
-            </a:r>
-            <a:endParaRPr lang="en-US" sz="1100" dirty="0"/>
-          </a:p>
-        </p:txBody>
-      </p:sp>
-      <p:sp>
-        <p:nvSpPr>
-          <p:cNvPr id="31" name="Text 24"/>
-          <p:cNvSpPr/>
-          <p:nvPr/>
-        </p:nvSpPr>
-        <p:spPr>
-          <a:xfrm>
-            <a:off x="7306056" y="2697480"/>
-            <a:ext cx="1554480" cy="320040"/>
-          </a:xfrm>
-          <a:prstGeom prst="rect">
-            <a:avLst/>
-          </a:prstGeom>
-          <a:noFill/>
-          <a:ln/>
-        </p:spPr>
-        <p:txBody>
-          <a:bodyPr wrap="square" lIns="0" tIns="0" rIns="0" bIns="0" rtlCol="0" anchor="ctr"/>
-          <a:lstStyle/>
-          <a:p>
-            <a:pPr marL="0" indent="0" algn="ctr">
-              <a:buNone/>
-            </a:pPr>
-            <a:r>
-              <a:rPr lang="en-US" sz="1600" b="1" dirty="0">
-                <a:solidFill>
-                  <a:srgbClr val="FFFFFF"/>
-                </a:solidFill>
-                <a:latin typeface="Cambria" pitchFamily="34" charset="0"/>
-                <a:ea typeface="Cambria" pitchFamily="34" charset="-122"/>
-                <a:cs typeface="Cambria" pitchFamily="34" charset="-120"/>
-              </a:rPr>
-              <a:t>Share</a:t>
-            </a:r>
-            <a:endParaRPr lang="en-US" sz="1600" dirty="0"/>
-          </a:p>
-        </p:txBody>
-      </p:sp>
-      <p:sp>
-        <p:nvSpPr>
-          <p:cNvPr id="32" name="Text 25"/>
-          <p:cNvSpPr/>
-          <p:nvPr/>
-        </p:nvSpPr>
-        <p:spPr>
-          <a:xfrm>
-            <a:off x="7260336" y="3063240"/>
-            <a:ext cx="1645920" cy="914400"/>
-          </a:xfrm>
-          <a:prstGeom prst="rect">
-            <a:avLst/>
-          </a:prstGeom>
-          <a:noFill/>
-          <a:ln/>
-        </p:spPr>
-        <p:txBody>
-          <a:bodyPr wrap="square" lIns="0" tIns="0" rIns="0" bIns="0" rtlCol="0" anchor="ctr"/>
-          <a:lstStyle/>
-          <a:p>
-            <a:pPr marL="0" indent="0" algn="ctr">
-              <a:lnSpc>
-                <a:spcPct val="108000"/>
-              </a:lnSpc>
-              <a:buNone/>
-            </a:pPr>
-            <a:r>
-              <a:rPr lang="en-US" sz="1100" dirty="0">
-                <a:solidFill>
-                  <a:srgbClr val="DCE6F5"/>
-                </a:solidFill>
-                <a:latin typeface="Calibri" pitchFamily="34" charset="0"/>
-                <a:ea typeface="Calibri" pitchFamily="34" charset="-122"/>
-                <a:cs typeface="Calibri" pitchFamily="34" charset="-120"/>
-              </a:rPr>
               <a:t>Interactive dashboard + this deck</a:t>
             </a:r>
             <a:endParaRPr lang="en-US" sz="1100" dirty="0"/>
@@ -10840,7 +10943,7 @@
           <a:bodyPr wrap="square" lIns="0" tIns="0" rIns="0" bIns="0" rtlCol="0" anchor="ctr"/>
           <a:lstStyle/>
           <a:p>
-            <a:pPr marL="0" indent="0" algn="ctr">
+            <a:pPr algn="ctr" indent="0" marL="0">
               <a:buNone/>
             </a:pPr>
             <a:r>
@@ -10874,7 +10977,6 @@
         <a:solidFill>
           <a:srgbClr val="FFFFFF"/>
         </a:solidFill>
-        <a:effectLst/>
       </p:bgPr>
     </p:bg>
     <p:spTree>
@@ -10912,11 +11014,11 @@
           <a:bodyPr wrap="square" lIns="0" tIns="0" rIns="0" bIns="0" rtlCol="0" anchor="ctr"/>
           <a:lstStyle/>
           <a:p>
-            <a:pPr marL="0" indent="0">
-              <a:buNone/>
-            </a:pPr>
-            <a:r>
-              <a:rPr lang="en-US" sz="1200" b="1" kern="0" spc="200" dirty="0">
+            <a:pPr indent="0" marL="0">
+              <a:buNone/>
+            </a:pPr>
+            <a:r>
+              <a:rPr lang="en-US" sz="1200" b="1" spc="200" kern="0" dirty="0">
                 <a:solidFill>
                   <a:srgbClr val="1F9D6B"/>
                 </a:solidFill>
@@ -10951,7 +11053,7 @@
           <a:bodyPr wrap="square" lIns="0" tIns="0" rIns="0" bIns="0" rtlCol="0" anchor="ctr"/>
           <a:lstStyle/>
           <a:p>
-            <a:pPr marL="0" indent="0">
+            <a:pPr indent="0" marL="0">
               <a:buNone/>
             </a:pPr>
             <a:r>
@@ -10969,22 +11071,30 @@
           </a:p>
         </p:txBody>
       </p:sp>
-      <p:graphicFrame>
-        <p:nvGraphicFramePr>
-          <p:cNvPr id="4" name="Chart 0"/>
-          <p:cNvGraphicFramePr/>
-          <p:nvPr/>
-        </p:nvGraphicFramePr>
-        <p:xfrm>
-          <a:off x="457200" y="1371600"/>
-          <a:ext cx="5806440" cy="3520440"/>
-        </p:xfrm>
-        <a:graphic>
-          <a:graphicData uri="http://schemas.openxmlformats.org/drawingml/2006/chart">
-            <c:chart xmlns:c="http://schemas.openxmlformats.org/drawingml/2006/chart" xmlns:r="http://schemas.openxmlformats.org/officeDocument/2006/relationships" r:id="rId3"/>
-          </a:graphicData>
-        </a:graphic>
-      </p:graphicFrame>
+      <p:pic>
+        <p:nvPicPr>
+          <p:cNvPr id="4" name="Image 0" descr="chart_violent.png">    </p:cNvPr>
+          <p:cNvPicPr>
+            <a:picLocks noChangeAspect="1"/>
+          </p:cNvPicPr>
+          <p:nvPr/>
+        </p:nvPicPr>
+        <p:blipFill>
+          <a:blip r:embed="rId1"/>
+          <a:stretch>
+            <a:fillRect/>
+          </a:stretch>
+        </p:blipFill>
+        <p:spPr>
+          <a:xfrm>
+            <a:off x="457200" y="1417320"/>
+            <a:ext cx="5029200" cy="3520440"/>
+          </a:xfrm>
+          <a:prstGeom prst="rect">
+            <a:avLst/>
+          </a:prstGeom>
+        </p:spPr>
+      </p:pic>
       <p:sp>
         <p:nvSpPr>
           <p:cNvPr id="5" name="Shape 2"/>
@@ -11011,20 +11121,13 @@
             <a:prstDash val="solid"/>
           </a:ln>
           <a:effectLst>
-            <a:outerShdw blurRad="88900" dist="38100" dir="5400000" algn="bl" rotWithShape="0">
+            <a:outerShdw sx="100000" sy="100000" kx="0" ky="0" algn="bl" rotWithShape="0" blurRad="88900" dist="38100" dir="5400000">
               <a:srgbClr val="8794A8">
                 <a:alpha val="22000"/>
               </a:srgbClr>
             </a:outerShdw>
           </a:effectLst>
         </p:spPr>
-        <p:txBody>
-          <a:bodyPr/>
-          <a:lstStyle/>
-          <a:p>
-            <a:endParaRPr lang="en-US"/>
-          </a:p>
-        </p:txBody>
       </p:sp>
       <p:sp>
         <p:nvSpPr>
@@ -11047,11 +11150,11 @@
           <a:bodyPr wrap="square" lIns="0" tIns="0" rIns="0" bIns="0" rtlCol="0" anchor="ctr"/>
           <a:lstStyle/>
           <a:p>
-            <a:pPr marL="0" indent="0">
-              <a:buNone/>
-            </a:pPr>
-            <a:r>
-              <a:rPr lang="en-US" sz="1100" b="1" kern="0" spc="100" dirty="0">
+            <a:pPr indent="0" marL="0">
+              <a:buNone/>
+            </a:pPr>
+            <a:r>
+              <a:rPr lang="en-US" sz="1100" b="1" spc="100" kern="0" dirty="0">
                 <a:solidFill>
                   <a:srgbClr val="1F9D6B"/>
                 </a:solidFill>
@@ -11086,7 +11189,7 @@
           <a:bodyPr wrap="square" lIns="0" tIns="0" rIns="0" bIns="0" rtlCol="0" anchor="ctr"/>
           <a:lstStyle/>
           <a:p>
-            <a:pPr marL="0" indent="0">
+            <a:pPr indent="0" marL="0">
               <a:buNone/>
             </a:pPr>
             <a:r>
@@ -11125,7 +11228,7 @@
           <a:bodyPr wrap="square" lIns="0" tIns="0" rIns="0" bIns="0" rtlCol="0" anchor="ctr"/>
           <a:lstStyle/>
           <a:p>
-            <a:pPr marL="0" indent="0">
+            <a:pPr indent="0" marL="0">
               <a:buNone/>
             </a:pPr>
             <a:r>
@@ -11164,7 +11267,7 @@
           <a:bodyPr wrap="square" lIns="0" tIns="0" rIns="0" bIns="0" rtlCol="0" anchor="ctr"/>
           <a:lstStyle/>
           <a:p>
-            <a:pPr marL="0" indent="0">
+            <a:pPr indent="0" marL="0">
               <a:buNone/>
             </a:pPr>
             <a:r>
@@ -11178,6 +11281,9 @@
               </a:rPr>
               <a:t>~129</a:t>
             </a:r>
+            <a:pPr indent="0" marL="0">
+              <a:buNone/>
+            </a:pPr>
             <a:r>
               <a:rPr lang="en-US" sz="1300" dirty="0">
                 <a:solidFill>
@@ -11214,7 +11320,7 @@
           <a:bodyPr wrap="square" lIns="0" tIns="0" rIns="0" bIns="0" rtlCol="0" anchor="ctr"/>
           <a:lstStyle/>
           <a:p>
-            <a:pPr marL="0" indent="0">
+            <a:pPr indent="0" marL="0">
               <a:lnSpc>
                 <a:spcPct val="112000"/>
               </a:lnSpc>
@@ -11256,7 +11362,7 @@
           <a:bodyPr wrap="square" lIns="0" tIns="0" rIns="0" bIns="0" rtlCol="0" anchor="ctr"/>
           <a:lstStyle/>
           <a:p>
-            <a:pPr marL="0" indent="0">
+            <a:pPr indent="0" marL="0">
               <a:buNone/>
             </a:pPr>
             <a:r>
@@ -11268,7 +11374,7 @@
                 <a:ea typeface="Calibri" pitchFamily="34" charset="-122"/>
                 <a:cs typeface="Calibri" pitchFamily="34" charset="-120"/>
               </a:rPr>
-              <a:t>Average violent incidents per month, by police district (sorted).</a:t>
+              <a:t>Average violent incidents per month, by police district (sorted). Chart from the live dashboard.</a:t>
             </a:r>
             <a:endParaRPr lang="en-US" sz="1000" dirty="0"/>
           </a:p>
@@ -11290,7 +11396,6 @@
         <a:solidFill>
           <a:srgbClr val="FFFFFF"/>
         </a:solidFill>
-        <a:effectLst/>
       </p:bgPr>
     </p:bg>
     <p:spTree>
@@ -11328,11 +11433,11 @@
           <a:bodyPr wrap="square" lIns="0" tIns="0" rIns="0" bIns="0" rtlCol="0" anchor="ctr"/>
           <a:lstStyle/>
           <a:p>
-            <a:pPr marL="0" indent="0">
-              <a:buNone/>
-            </a:pPr>
-            <a:r>
-              <a:rPr lang="en-US" sz="1200" b="1" kern="0" spc="200" dirty="0">
+            <a:pPr indent="0" marL="0">
+              <a:buNone/>
+            </a:pPr>
+            <a:r>
+              <a:rPr lang="en-US" sz="1200" b="1" spc="200" kern="0" dirty="0">
                 <a:solidFill>
                   <a:srgbClr val="1F9D6B"/>
                 </a:solidFill>
@@ -11367,7 +11472,7 @@
           <a:bodyPr wrap="square" lIns="0" tIns="0" rIns="0" bIns="0" rtlCol="0" anchor="ctr"/>
           <a:lstStyle/>
           <a:p>
-            <a:pPr marL="0" indent="0">
+            <a:pPr indent="0" marL="0">
               <a:buNone/>
             </a:pPr>
             <a:r>
@@ -11406,7 +11511,7 @@
           <a:bodyPr wrap="square" lIns="0" tIns="0" rIns="0" bIns="0" rtlCol="0" anchor="ctr"/>
           <a:lstStyle/>
           <a:p>
-            <a:pPr marL="0" indent="0">
+            <a:pPr indent="0" marL="0">
               <a:buNone/>
             </a:pPr>
             <a:r>
@@ -11450,20 +11555,13 @@
             <a:prstDash val="solid"/>
           </a:ln>
           <a:effectLst>
-            <a:outerShdw blurRad="88900" dist="38100" dir="5400000" algn="bl" rotWithShape="0">
+            <a:outerShdw sx="100000" sy="100000" kx="0" ky="0" algn="bl" rotWithShape="0" blurRad="88900" dist="38100" dir="5400000">
               <a:srgbClr val="8794A8">
                 <a:alpha val="22000"/>
               </a:srgbClr>
             </a:outerShdw>
           </a:effectLst>
         </p:spPr>
-        <p:txBody>
-          <a:bodyPr/>
-          <a:lstStyle/>
-          <a:p>
-            <a:endParaRPr lang="en-US"/>
-          </a:p>
-        </p:txBody>
       </p:sp>
       <p:sp>
         <p:nvSpPr>
@@ -11486,11 +11584,11 @@
           <a:bodyPr wrap="square" lIns="0" tIns="0" rIns="0" bIns="0" rtlCol="0" anchor="ctr"/>
           <a:lstStyle/>
           <a:p>
-            <a:pPr marL="0" indent="0">
-              <a:buNone/>
-            </a:pPr>
-            <a:r>
-              <a:rPr lang="en-US" sz="1100" b="1" kern="0" spc="100" dirty="0">
+            <a:pPr indent="0" marL="0">
+              <a:buNone/>
+            </a:pPr>
+            <a:r>
+              <a:rPr lang="en-US" sz="1100" b="1" spc="100" kern="0" dirty="0">
                 <a:solidFill>
                   <a:srgbClr val="1F9D6B"/>
                 </a:solidFill>
@@ -11525,7 +11623,7 @@
           <a:bodyPr wrap="square" lIns="0" tIns="0" rIns="0" bIns="0" rtlCol="0" anchor="ctr"/>
           <a:lstStyle/>
           <a:p>
-            <a:pPr marL="0" indent="0">
+            <a:pPr indent="0" marL="0">
               <a:buNone/>
             </a:pPr>
             <a:r>
@@ -11564,7 +11662,7 @@
           <a:bodyPr wrap="square" lIns="0" tIns="0" rIns="0" bIns="0" rtlCol="0" anchor="ctr"/>
           <a:lstStyle/>
           <a:p>
-            <a:pPr marL="0" indent="0">
+            <a:pPr indent="0" marL="0">
               <a:buNone/>
             </a:pPr>
             <a:r>
@@ -11603,7 +11701,7 @@
           <a:bodyPr wrap="square" lIns="0" tIns="0" rIns="0" bIns="0" rtlCol="0" anchor="ctr"/>
           <a:lstStyle/>
           <a:p>
-            <a:pPr marL="0" indent="0">
+            <a:pPr indent="0" marL="0">
               <a:buNone/>
             </a:pPr>
             <a:r>
@@ -11642,7 +11740,7 @@
           <a:bodyPr wrap="square" lIns="0" tIns="0" rIns="0" bIns="0" rtlCol="0" anchor="ctr"/>
           <a:lstStyle/>
           <a:p>
-            <a:pPr marL="0" indent="0">
+            <a:pPr indent="0" marL="0">
               <a:buNone/>
             </a:pPr>
             <a:r>
@@ -11654,7 +11752,21 @@
                 <a:ea typeface="Calibri" pitchFamily="34" charset="-122"/>
                 <a:cs typeface="Calibri" pitchFamily="34" charset="-120"/>
               </a:rPr>
-              <a:t>420 total/mo   ·   128.6 violent/mo</a:t>
+              <a:t>420 total/mo</a:t>
+            </a:r>
+            <a:pPr indent="0" marL="0">
+              <a:buNone/>
+            </a:pPr>
+            <a:r>
+              <a:rPr lang="en-US" sz="1150" b="1" dirty="0">
+                <a:solidFill>
+                  <a:srgbClr val="1A2230"/>
+                </a:solidFill>
+                <a:latin typeface="Calibri" pitchFamily="34" charset="0"/>
+                <a:ea typeface="Calibri" pitchFamily="34" charset="-122"/>
+                <a:cs typeface="Calibri" pitchFamily="34" charset="-120"/>
+              </a:rPr>
+              <a:t>   ·   128.6 violent/mo</a:t>
             </a:r>
             <a:endParaRPr lang="en-US" sz="1150" dirty="0"/>
           </a:p>
@@ -11681,7 +11793,7 @@
           <a:bodyPr wrap="square" lIns="0" tIns="0" rIns="0" bIns="0" rtlCol="0" anchor="ctr"/>
           <a:lstStyle/>
           <a:p>
-            <a:pPr marL="0" indent="0">
+            <a:pPr indent="0" marL="0">
               <a:buNone/>
             </a:pPr>
             <a:r>
@@ -11725,20 +11837,13 @@
             <a:prstDash val="solid"/>
           </a:ln>
           <a:effectLst>
-            <a:outerShdw blurRad="88900" dist="38100" dir="5400000" algn="bl" rotWithShape="0">
+            <a:outerShdw sx="100000" sy="100000" kx="0" ky="0" algn="bl" rotWithShape="0" blurRad="88900" dist="38100" dir="5400000">
               <a:srgbClr val="8794A8">
                 <a:alpha val="22000"/>
               </a:srgbClr>
             </a:outerShdw>
           </a:effectLst>
         </p:spPr>
-        <p:txBody>
-          <a:bodyPr/>
-          <a:lstStyle/>
-          <a:p>
-            <a:endParaRPr lang="en-US"/>
-          </a:p>
-        </p:txBody>
       </p:sp>
       <p:sp>
         <p:nvSpPr>
@@ -11761,11 +11866,11 @@
           <a:bodyPr wrap="square" lIns="0" tIns="0" rIns="0" bIns="0" rtlCol="0" anchor="ctr"/>
           <a:lstStyle/>
           <a:p>
-            <a:pPr marL="0" indent="0">
-              <a:buNone/>
-            </a:pPr>
-            <a:r>
-              <a:rPr lang="en-US" sz="1100" b="1" kern="0" spc="100" dirty="0">
+            <a:pPr indent="0" marL="0">
+              <a:buNone/>
+            </a:pPr>
+            <a:r>
+              <a:rPr lang="en-US" sz="1100" b="1" spc="100" kern="0" dirty="0">
                 <a:solidFill>
                   <a:srgbClr val="D64541"/>
                 </a:solidFill>
@@ -11800,7 +11905,7 @@
           <a:bodyPr wrap="square" lIns="0" tIns="0" rIns="0" bIns="0" rtlCol="0" anchor="ctr"/>
           <a:lstStyle/>
           <a:p>
-            <a:pPr marL="0" indent="0">
+            <a:pPr indent="0" marL="0">
               <a:buNone/>
             </a:pPr>
             <a:r>
@@ -11839,7 +11944,7 @@
           <a:bodyPr wrap="square" lIns="0" tIns="0" rIns="0" bIns="0" rtlCol="0" anchor="ctr"/>
           <a:lstStyle/>
           <a:p>
-            <a:pPr marL="0" indent="0">
+            <a:pPr indent="0" marL="0">
               <a:buNone/>
             </a:pPr>
             <a:r>
@@ -11878,7 +11983,7 @@
           <a:bodyPr wrap="square" lIns="0" tIns="0" rIns="0" bIns="0" rtlCol="0" anchor="ctr"/>
           <a:lstStyle/>
           <a:p>
-            <a:pPr marL="0" indent="0">
+            <a:pPr indent="0" marL="0">
               <a:buNone/>
             </a:pPr>
             <a:r>
@@ -11917,7 +12022,7 @@
           <a:bodyPr wrap="square" lIns="0" tIns="0" rIns="0" bIns="0" rtlCol="0" anchor="ctr"/>
           <a:lstStyle/>
           <a:p>
-            <a:pPr marL="0" indent="0">
+            <a:pPr indent="0" marL="0">
               <a:buNone/>
             </a:pPr>
             <a:r>
@@ -11929,7 +12034,21 @@
                 <a:ea typeface="Calibri" pitchFamily="34" charset="-122"/>
                 <a:cs typeface="Calibri" pitchFamily="34" charset="-120"/>
               </a:rPr>
-              <a:t>662 total/mo   ·   294 violent/mo</a:t>
+              <a:t>662 total/mo</a:t>
+            </a:r>
+            <a:pPr indent="0" marL="0">
+              <a:buNone/>
+            </a:pPr>
+            <a:r>
+              <a:rPr lang="en-US" sz="1150" b="1" dirty="0">
+                <a:solidFill>
+                  <a:srgbClr val="1A2230"/>
+                </a:solidFill>
+                <a:latin typeface="Calibri" pitchFamily="34" charset="0"/>
+                <a:ea typeface="Calibri" pitchFamily="34" charset="-122"/>
+                <a:cs typeface="Calibri" pitchFamily="34" charset="-120"/>
+              </a:rPr>
+              <a:t>   ·   294 violent/mo</a:t>
             </a:r>
             <a:endParaRPr lang="en-US" sz="1150" dirty="0"/>
           </a:p>
@@ -11956,7 +12075,7 @@
           <a:bodyPr wrap="square" lIns="0" tIns="0" rIns="0" bIns="0" rtlCol="0" anchor="ctr"/>
           <a:lstStyle/>
           <a:p>
-            <a:pPr marL="0" indent="0">
+            <a:pPr indent="0" marL="0">
               <a:buNone/>
             </a:pPr>
             <a:r>
@@ -12000,20 +12119,13 @@
             <a:prstDash val="solid"/>
           </a:ln>
           <a:effectLst>
-            <a:outerShdw blurRad="88900" dist="38100" dir="5400000" algn="bl" rotWithShape="0">
+            <a:outerShdw sx="100000" sy="100000" kx="0" ky="0" algn="bl" rotWithShape="0" blurRad="88900" dist="38100" dir="5400000">
               <a:srgbClr val="8794A8">
                 <a:alpha val="22000"/>
               </a:srgbClr>
             </a:outerShdw>
           </a:effectLst>
         </p:spPr>
-        <p:txBody>
-          <a:bodyPr/>
-          <a:lstStyle/>
-          <a:p>
-            <a:endParaRPr lang="en-US"/>
-          </a:p>
-        </p:txBody>
       </p:sp>
       <p:sp>
         <p:nvSpPr>
@@ -12036,11 +12148,11 @@
           <a:bodyPr wrap="square" lIns="0" tIns="0" rIns="0" bIns="0" rtlCol="0" anchor="ctr"/>
           <a:lstStyle/>
           <a:p>
-            <a:pPr marL="0" indent="0">
-              <a:buNone/>
-            </a:pPr>
-            <a:r>
-              <a:rPr lang="en-US" sz="1100" b="1" kern="0" spc="100" dirty="0">
+            <a:pPr indent="0" marL="0">
+              <a:buNone/>
+            </a:pPr>
+            <a:r>
+              <a:rPr lang="en-US" sz="1100" b="1" spc="100" kern="0" dirty="0">
                 <a:solidFill>
                   <a:srgbClr val="DB9A2E"/>
                 </a:solidFill>
@@ -12075,7 +12187,7 @@
           <a:bodyPr wrap="square" lIns="0" tIns="0" rIns="0" bIns="0" rtlCol="0" anchor="ctr"/>
           <a:lstStyle/>
           <a:p>
-            <a:pPr marL="0" indent="0">
+            <a:pPr indent="0" marL="0">
               <a:buNone/>
             </a:pPr>
             <a:r>
@@ -12114,7 +12226,7 @@
           <a:bodyPr wrap="square" lIns="0" tIns="0" rIns="0" bIns="0" rtlCol="0" anchor="ctr"/>
           <a:lstStyle/>
           <a:p>
-            <a:pPr marL="0" indent="0">
+            <a:pPr indent="0" marL="0">
               <a:buNone/>
             </a:pPr>
             <a:r>
@@ -12153,7 +12265,7 @@
           <a:bodyPr wrap="square" lIns="0" tIns="0" rIns="0" bIns="0" rtlCol="0" anchor="ctr"/>
           <a:lstStyle/>
           <a:p>
-            <a:pPr marL="0" indent="0">
+            <a:pPr indent="0" marL="0">
               <a:buNone/>
             </a:pPr>
             <a:r>
@@ -12192,7 +12304,7 @@
           <a:bodyPr wrap="square" lIns="0" tIns="0" rIns="0" bIns="0" rtlCol="0" anchor="ctr"/>
           <a:lstStyle/>
           <a:p>
-            <a:pPr marL="0" indent="0">
+            <a:pPr indent="0" marL="0">
               <a:buNone/>
             </a:pPr>
             <a:r>
@@ -12204,45 +12316,59 @@
                 <a:ea typeface="Calibri" pitchFamily="34" charset="-122"/>
                 <a:cs typeface="Calibri" pitchFamily="34" charset="-120"/>
               </a:rPr>
-              <a:t>1137 total/mo   ·   294.5 violent/mo</a:t>
-            </a:r>
-            <a:endParaRPr lang="en-US" sz="1150" dirty="0"/>
-          </a:p>
-        </p:txBody>
-      </p:sp>
-      <p:sp>
-        <p:nvSpPr>
-          <p:cNvPr id="25" name="Text 23"/>
-          <p:cNvSpPr/>
-          <p:nvPr/>
-        </p:nvSpPr>
-        <p:spPr>
-          <a:xfrm>
-            <a:off x="6309360" y="4069080"/>
-            <a:ext cx="2240280" cy="457200"/>
-          </a:xfrm>
-          <a:prstGeom prst="rect">
-            <a:avLst/>
-          </a:prstGeom>
-          <a:noFill/>
-          <a:ln/>
-        </p:spPr>
-        <p:txBody>
-          <a:bodyPr wrap="square" lIns="0" tIns="0" rIns="0" bIns="0" rtlCol="0" anchor="ctr"/>
-          <a:lstStyle/>
-          <a:p>
-            <a:pPr marL="0" indent="0">
-              <a:buNone/>
-            </a:pPr>
-            <a:r>
-              <a:rPr lang="en-US" sz="1100" i="1" dirty="0">
-                <a:solidFill>
-                  <a:srgbClr val="6B7585"/>
+              <a:t>1137 total/mo</a:t>
+            </a:r>
+            <a:pPr indent="0" marL="0">
+              <a:buNone/>
+            </a:pPr>
+            <a:r>
+              <a:rPr lang="en-US" sz="1150" b="1" dirty="0">
+                <a:solidFill>
+                  <a:srgbClr val="1A2230"/>
                 </a:solidFill>
                 <a:latin typeface="Calibri" pitchFamily="34" charset="0"/>
                 <a:ea typeface="Calibri" pitchFamily="34" charset="-122"/>
                 <a:cs typeface="Calibri" pitchFamily="34" charset="-120"/>
               </a:rPr>
+              <a:t>   ·   294.5 violent/mo</a:t>
+            </a:r>
+            <a:endParaRPr lang="en-US" sz="1150" dirty="0"/>
+          </a:p>
+        </p:txBody>
+      </p:sp>
+      <p:sp>
+        <p:nvSpPr>
+          <p:cNvPr id="25" name="Text 23"/>
+          <p:cNvSpPr/>
+          <p:nvPr/>
+        </p:nvSpPr>
+        <p:spPr>
+          <a:xfrm>
+            <a:off x="6309360" y="4069080"/>
+            <a:ext cx="2240280" cy="457200"/>
+          </a:xfrm>
+          <a:prstGeom prst="rect">
+            <a:avLst/>
+          </a:prstGeom>
+          <a:noFill/>
+          <a:ln/>
+        </p:spPr>
+        <p:txBody>
+          <a:bodyPr wrap="square" lIns="0" tIns="0" rIns="0" bIns="0" rtlCol="0" anchor="ctr"/>
+          <a:lstStyle/>
+          <a:p>
+            <a:pPr indent="0" marL="0">
+              <a:buNone/>
+            </a:pPr>
+            <a:r>
+              <a:rPr lang="en-US" sz="1100" i="1" dirty="0">
+                <a:solidFill>
+                  <a:srgbClr val="6B7585"/>
+                </a:solidFill>
+                <a:latin typeface="Calibri" pitchFamily="34" charset="0"/>
+                <a:ea typeface="Calibri" pitchFamily="34" charset="-122"/>
+                <a:cs typeface="Calibri" pitchFamily="34" charset="-120"/>
+              </a:rPr>
               <a:t>High total, lower violent share</a:t>
             </a:r>
             <a:endParaRPr lang="en-US" sz="1100" dirty="0"/>
@@ -12270,7 +12396,7 @@
           <a:bodyPr wrap="square" lIns="0" tIns="0" rIns="0" bIns="0" rtlCol="0" anchor="ctr"/>
           <a:lstStyle/>
           <a:p>
-            <a:pPr marL="0" indent="0">
+            <a:pPr indent="0" marL="0">
               <a:buNone/>
             </a:pPr>
             <a:r>
@@ -12304,7 +12430,6 @@
         <a:solidFill>
           <a:srgbClr val="FFFFFF"/>
         </a:solidFill>
-        <a:effectLst/>
       </p:bgPr>
     </p:bg>
     <p:spTree>
@@ -12342,11 +12467,11 @@
           <a:bodyPr wrap="square" lIns="0" tIns="0" rIns="0" bIns="0" rtlCol="0" anchor="ctr"/>
           <a:lstStyle/>
           <a:p>
-            <a:pPr marL="0" indent="0">
-              <a:buNone/>
-            </a:pPr>
-            <a:r>
-              <a:rPr lang="en-US" sz="1200" b="1" kern="0" spc="200" dirty="0">
+            <a:pPr indent="0" marL="0">
+              <a:buNone/>
+            </a:pPr>
+            <a:r>
+              <a:rPr lang="en-US" sz="1200" b="1" spc="200" kern="0" dirty="0">
                 <a:solidFill>
                   <a:srgbClr val="1F9D6B"/>
                 </a:solidFill>
@@ -12354,7 +12479,7 @@
                 <a:ea typeface="Calibri" pitchFamily="34" charset="-122"/>
                 <a:cs typeface="Calibri" pitchFamily="34" charset="-120"/>
               </a:rPr>
-              <a:t>07  ·  FINDING 3</a:t>
+              <a:t>FROM THE DASHBOARD</a:t>
             </a:r>
             <a:endParaRPr lang="en-US" sz="1200" dirty="0"/>
           </a:p>
@@ -12381,7 +12506,7 @@
           <a:bodyPr wrap="square" lIns="0" tIns="0" rIns="0" bIns="0" rtlCol="0" anchor="ctr"/>
           <a:lstStyle/>
           <a:p>
-            <a:pPr marL="0" indent="0">
+            <a:pPr indent="0" marL="0">
               <a:buNone/>
             </a:pPr>
             <a:r>
@@ -12393,210 +12518,144 @@
                 <a:ea typeface="Cambria" pitchFamily="34" charset="-122"/>
                 <a:cs typeface="Cambria" pitchFamily="34" charset="-120"/>
               </a:rPr>
-              <a:t>Living closer to the office isn't safer</a:t>
+              <a:t>The full landscape: volume vs. violence</a:t>
             </a:r>
             <a:endParaRPr lang="en-US" sz="3000" dirty="0"/>
           </a:p>
         </p:txBody>
       </p:sp>
-      <p:graphicFrame>
-        <p:nvGraphicFramePr>
-          <p:cNvPr id="4" name="Chart 0"/>
-          <p:cNvGraphicFramePr/>
-          <p:nvPr/>
-        </p:nvGraphicFramePr>
-        <p:xfrm>
-          <a:off x="457200" y="1554480"/>
-          <a:ext cx="4846320" cy="3108960"/>
-        </p:xfrm>
-        <a:graphic>
-          <a:graphicData uri="http://schemas.openxmlformats.org/drawingml/2006/chart">
-            <c:chart xmlns:c="http://schemas.openxmlformats.org/drawingml/2006/chart" xmlns:r="http://schemas.openxmlformats.org/officeDocument/2006/relationships" r:id="rId3"/>
-          </a:graphicData>
-        </a:graphic>
-      </p:graphicFrame>
-      <p:sp>
-        <p:nvSpPr>
-          <p:cNvPr id="5" name="Shape 2"/>
-          <p:cNvSpPr/>
-          <p:nvPr/>
-        </p:nvSpPr>
-        <p:spPr>
-          <a:xfrm>
-            <a:off x="5532120" y="1783080"/>
-            <a:ext cx="3108960" cy="2377440"/>
-          </a:xfrm>
-          <a:prstGeom prst="roundRect">
-            <a:avLst>
-              <a:gd name="adj" fmla="val 3846"/>
-            </a:avLst>
-          </a:prstGeom>
-          <a:solidFill>
-            <a:srgbClr val="14233A"/>
-          </a:solidFill>
-          <a:ln/>
-          <a:effectLst>
-            <a:outerShdw blurRad="88900" dist="38100" dir="5400000" algn="bl" rotWithShape="0">
-              <a:srgbClr val="8794A8">
-                <a:alpha val="22000"/>
-              </a:srgbClr>
-            </a:outerShdw>
-          </a:effectLst>
-        </p:spPr>
-        <p:txBody>
-          <a:bodyPr/>
-          <a:lstStyle/>
-          <a:p>
-            <a:endParaRPr lang="en-US"/>
-          </a:p>
-        </p:txBody>
-      </p:sp>
-      <p:sp>
-        <p:nvSpPr>
-          <p:cNvPr id="6" name="Text 3"/>
-          <p:cNvSpPr/>
-          <p:nvPr/>
-        </p:nvSpPr>
-        <p:spPr>
-          <a:xfrm>
-            <a:off x="5715000" y="1965960"/>
-            <a:ext cx="2743200" cy="868680"/>
-          </a:xfrm>
-          <a:prstGeom prst="rect">
-            <a:avLst/>
-          </a:prstGeom>
-          <a:noFill/>
-          <a:ln/>
-        </p:spPr>
-        <p:txBody>
-          <a:bodyPr wrap="square" lIns="0" tIns="0" rIns="0" bIns="0" rtlCol="0" anchor="ctr"/>
-          <a:lstStyle/>
-          <a:p>
-            <a:pPr marL="0" indent="0">
-              <a:buNone/>
-            </a:pPr>
-            <a:r>
-              <a:rPr lang="en-US" sz="6000" b="1" dirty="0">
-                <a:solidFill>
-                  <a:srgbClr val="6FE3B6"/>
-                </a:solidFill>
-                <a:latin typeface="Cambria" pitchFamily="34" charset="0"/>
-                <a:ea typeface="Cambria" pitchFamily="34" charset="-122"/>
-                <a:cs typeface="Cambria" pitchFamily="34" charset="-120"/>
-              </a:rPr>
-              <a:t>2.3×</a:t>
-            </a:r>
-            <a:endParaRPr lang="en-US" sz="6000" dirty="0"/>
-          </a:p>
-        </p:txBody>
-      </p:sp>
-      <p:sp>
-        <p:nvSpPr>
-          <p:cNvPr id="7" name="Text 4"/>
-          <p:cNvSpPr/>
-          <p:nvPr/>
-        </p:nvSpPr>
-        <p:spPr>
-          <a:xfrm>
-            <a:off x="5760720" y="2880360"/>
-            <a:ext cx="2697480" cy="640080"/>
-          </a:xfrm>
-          <a:prstGeom prst="rect">
-            <a:avLst/>
-          </a:prstGeom>
-          <a:noFill/>
-          <a:ln/>
-        </p:spPr>
-        <p:txBody>
-          <a:bodyPr wrap="square" lIns="0" tIns="0" rIns="0" bIns="0" rtlCol="0" anchor="ctr"/>
-          <a:lstStyle/>
-          <a:p>
-            <a:pPr marL="0" indent="0">
+      <p:pic>
+        <p:nvPicPr>
+          <p:cNvPr id="4" name="Image 0" descr="chart_scatter.png">    </p:cNvPr>
+          <p:cNvPicPr>
+            <a:picLocks noChangeAspect="1"/>
+          </p:cNvPicPr>
+          <p:nvPr/>
+        </p:nvPicPr>
+        <p:blipFill>
+          <a:blip r:embed="rId1"/>
+          <a:stretch>
+            <a:fillRect/>
+          </a:stretch>
+        </p:blipFill>
+        <p:spPr>
+          <a:xfrm>
+            <a:off x="365760" y="1371600"/>
+            <a:ext cx="5532120" cy="3511296"/>
+          </a:xfrm>
+          <a:prstGeom prst="rect">
+            <a:avLst/>
+          </a:prstGeom>
+        </p:spPr>
+      </p:pic>
+      <p:sp>
+        <p:nvSpPr>
+          <p:cNvPr id="5" name="Text 2"/>
+          <p:cNvSpPr/>
+          <p:nvPr/>
+        </p:nvSpPr>
+        <p:spPr>
+          <a:xfrm>
+            <a:off x="6080760" y="1463040"/>
+            <a:ext cx="2697480" cy="868680"/>
+          </a:xfrm>
+          <a:prstGeom prst="rect">
+            <a:avLst/>
+          </a:prstGeom>
+          <a:noFill/>
+          <a:ln/>
+        </p:spPr>
+        <p:txBody>
+          <a:bodyPr wrap="square" lIns="0" tIns="0" rIns="0" bIns="0" rtlCol="0" anchor="ctr"/>
+          <a:lstStyle/>
+          <a:p>
+            <a:pPr indent="0" marL="0">
               <a:lnSpc>
-                <a:spcPct val="110000"/>
+                <a:spcPct val="112000"/>
               </a:lnSpc>
               <a:buNone/>
             </a:pPr>
             <a:r>
-              <a:rPr lang="en-US" sz="1450" dirty="0">
-                <a:solidFill>
-                  <a:srgbClr val="FFFFFF"/>
+              <a:rPr lang="en-US" sz="1250" dirty="0">
+                <a:solidFill>
+                  <a:srgbClr val="1A2230"/>
                 </a:solidFill>
                 <a:latin typeface="Calibri" pitchFamily="34" charset="0"/>
                 <a:ea typeface="Calibri" pitchFamily="34" charset="-122"/>
                 <a:cs typeface="Calibri" pitchFamily="34" charset="-120"/>
               </a:rPr>
-              <a:t>more violent crime in the Loop than in Edgewater</a:t>
-            </a:r>
-            <a:endParaRPr lang="en-US" sz="1450" dirty="0"/>
-          </a:p>
-        </p:txBody>
-      </p:sp>
-      <p:sp>
-        <p:nvSpPr>
-          <p:cNvPr id="8" name="Text 5"/>
-          <p:cNvSpPr/>
-          <p:nvPr/>
-        </p:nvSpPr>
-        <p:spPr>
-          <a:xfrm>
-            <a:off x="5760720" y="3611880"/>
-            <a:ext cx="2697480" cy="365760"/>
-          </a:xfrm>
-          <a:prstGeom prst="rect">
-            <a:avLst/>
-          </a:prstGeom>
-          <a:noFill/>
-          <a:ln/>
-        </p:spPr>
-        <p:txBody>
-          <a:bodyPr wrap="square" lIns="0" tIns="0" rIns="0" bIns="0" rtlCol="0" anchor="ctr"/>
-          <a:lstStyle/>
-          <a:p>
-            <a:pPr marL="0" indent="0">
-              <a:buNone/>
-            </a:pPr>
-            <a:r>
-              <a:rPr lang="en-US" sz="1150" i="1" dirty="0">
-                <a:solidFill>
-                  <a:srgbClr val="DCE6F5"/>
+              <a:t>Every district plotted by total crime (x) and violent share (y), split at the citywide medians into four zones:</a:t>
+            </a:r>
+            <a:endParaRPr lang="en-US" sz="1250" dirty="0"/>
+          </a:p>
+        </p:txBody>
+      </p:sp>
+      <p:sp>
+        <p:nvSpPr>
+          <p:cNvPr id="6" name="Shape 3"/>
+          <p:cNvSpPr/>
+          <p:nvPr/>
+        </p:nvSpPr>
+        <p:spPr>
+          <a:xfrm>
+            <a:off x="6080760" y="2423160"/>
+            <a:ext cx="146304" cy="146304"/>
+          </a:xfrm>
+          <a:prstGeom prst="ellipse">
+            <a:avLst/>
+          </a:prstGeom>
+          <a:solidFill>
+            <a:srgbClr val="1F9D6B"/>
+          </a:solidFill>
+          <a:ln/>
+        </p:spPr>
+      </p:sp>
+      <p:sp>
+        <p:nvSpPr>
+          <p:cNvPr id="7" name="Text 4"/>
+          <p:cNvSpPr/>
+          <p:nvPr/>
+        </p:nvSpPr>
+        <p:spPr>
+          <a:xfrm>
+            <a:off x="6309360" y="2350008"/>
+            <a:ext cx="2468880" cy="548640"/>
+          </a:xfrm>
+          <a:prstGeom prst="rect">
+            <a:avLst/>
+          </a:prstGeom>
+          <a:noFill/>
+          <a:ln/>
+        </p:spPr>
+        <p:txBody>
+          <a:bodyPr wrap="square" lIns="0" tIns="0" rIns="0" bIns="0" rtlCol="0" anchor="ctr"/>
+          <a:lstStyle/>
+          <a:p>
+            <a:pPr indent="0" marL="0">
+              <a:lnSpc>
+                <a:spcPct val="105000"/>
+              </a:lnSpc>
+              <a:buNone/>
+            </a:pPr>
+            <a:r>
+              <a:rPr lang="en-US" sz="1100" b="1" dirty="0">
+                <a:solidFill>
+                  <a:srgbClr val="1F9D6B"/>
                 </a:solidFill>
                 <a:latin typeface="Calibri" pitchFamily="34" charset="0"/>
                 <a:ea typeface="Calibri" pitchFamily="34" charset="-122"/>
                 <a:cs typeface="Calibri" pitchFamily="34" charset="-120"/>
               </a:rPr>
-              <a:t>~295 vs ~129 violent incidents per month</a:t>
-            </a:r>
-            <a:endParaRPr lang="en-US" sz="1150" dirty="0"/>
-          </a:p>
-        </p:txBody>
-      </p:sp>
-      <p:sp>
-        <p:nvSpPr>
-          <p:cNvPr id="9" name="Text 6"/>
-          <p:cNvSpPr/>
-          <p:nvPr/>
-        </p:nvSpPr>
-        <p:spPr>
-          <a:xfrm>
-            <a:off x="502920" y="4709160"/>
-            <a:ext cx="8229600" cy="274320"/>
-          </a:xfrm>
-          <a:prstGeom prst="rect">
-            <a:avLst/>
-          </a:prstGeom>
-          <a:noFill/>
-          <a:ln/>
-        </p:spPr>
-        <p:txBody>
-          <a:bodyPr wrap="square" lIns="0" tIns="0" rIns="0" bIns="0" rtlCol="0" anchor="ctr"/>
-          <a:lstStyle/>
-          <a:p>
-            <a:pPr marL="0" indent="0">
-              <a:buNone/>
-            </a:pPr>
-            <a:r>
-              <a:rPr lang="en-US" sz="1050" i="1" dirty="0">
+              <a:t>Safest  </a:t>
+            </a:r>
+            <a:pPr indent="0" marL="0">
+              <a:lnSpc>
+                <a:spcPct val="105000"/>
+              </a:lnSpc>
+              <a:buNone/>
+            </a:pPr>
+            <a:r>
+              <a:rPr lang="en-US" sz="1100" dirty="0">
                 <a:solidFill>
                   <a:srgbClr val="6B7585"/>
                 </a:solidFill>
@@ -12604,9 +12663,285 @@
                 <a:ea typeface="Calibri" pitchFamily="34" charset="-122"/>
                 <a:cs typeface="Calibri" pitchFamily="34" charset="-120"/>
               </a:rPr>
-              <a:t>Downtown has more crime, not less - proximity to the office works against safety.</a:t>
-            </a:r>
-            <a:endParaRPr lang="en-US" sz="1050" dirty="0"/>
+              <a:t>Low volume, low violence - e.g. Edgewater (20).</a:t>
+            </a:r>
+            <a:endParaRPr lang="en-US" sz="1100" dirty="0"/>
+          </a:p>
+        </p:txBody>
+      </p:sp>
+      <p:sp>
+        <p:nvSpPr>
+          <p:cNvPr id="8" name="Shape 5"/>
+          <p:cNvSpPr/>
+          <p:nvPr/>
+        </p:nvSpPr>
+        <p:spPr>
+          <a:xfrm>
+            <a:off x="6080760" y="2990088"/>
+            <a:ext cx="146304" cy="146304"/>
+          </a:xfrm>
+          <a:prstGeom prst="ellipse">
+            <a:avLst/>
+          </a:prstGeom>
+          <a:solidFill>
+            <a:srgbClr val="D64541"/>
+          </a:solidFill>
+          <a:ln/>
+        </p:spPr>
+      </p:sp>
+      <p:sp>
+        <p:nvSpPr>
+          <p:cNvPr id="9" name="Text 6"/>
+          <p:cNvSpPr/>
+          <p:nvPr/>
+        </p:nvSpPr>
+        <p:spPr>
+          <a:xfrm>
+            <a:off x="6309360" y="2916936"/>
+            <a:ext cx="2468880" cy="548640"/>
+          </a:xfrm>
+          <a:prstGeom prst="rect">
+            <a:avLst/>
+          </a:prstGeom>
+          <a:noFill/>
+          <a:ln/>
+        </p:spPr>
+        <p:txBody>
+          <a:bodyPr wrap="square" lIns="0" tIns="0" rIns="0" bIns="0" rtlCol="0" anchor="ctr"/>
+          <a:lstStyle/>
+          <a:p>
+            <a:pPr indent="0" marL="0">
+              <a:lnSpc>
+                <a:spcPct val="105000"/>
+              </a:lnSpc>
+              <a:buNone/>
+            </a:pPr>
+            <a:r>
+              <a:rPr lang="en-US" sz="1100" b="1" dirty="0">
+                <a:solidFill>
+                  <a:srgbClr val="D64541"/>
+                </a:solidFill>
+                <a:latin typeface="Calibri" pitchFamily="34" charset="0"/>
+                <a:ea typeface="Calibri" pitchFamily="34" charset="-122"/>
+                <a:cs typeface="Calibri" pitchFamily="34" charset="-120"/>
+              </a:rPr>
+              <a:t>Deceptive  </a:t>
+            </a:r>
+            <a:pPr indent="0" marL="0">
+              <a:lnSpc>
+                <a:spcPct val="105000"/>
+              </a:lnSpc>
+              <a:buNone/>
+            </a:pPr>
+            <a:r>
+              <a:rPr lang="en-US" sz="1100" dirty="0">
+                <a:solidFill>
+                  <a:srgbClr val="6B7585"/>
+                </a:solidFill>
+                <a:latin typeface="Calibri" pitchFamily="34" charset="0"/>
+                <a:ea typeface="Calibri" pitchFamily="34" charset="-122"/>
+                <a:cs typeface="Calibri" pitchFamily="34" charset="-120"/>
+              </a:rPr>
+              <a:t>Low volume but HIGH violence - Austin (15) is the trap.</a:t>
+            </a:r>
+            <a:endParaRPr lang="en-US" sz="1100" dirty="0"/>
+          </a:p>
+        </p:txBody>
+      </p:sp>
+      <p:sp>
+        <p:nvSpPr>
+          <p:cNvPr id="10" name="Shape 7"/>
+          <p:cNvSpPr/>
+          <p:nvPr/>
+        </p:nvSpPr>
+        <p:spPr>
+          <a:xfrm>
+            <a:off x="6080760" y="3557016"/>
+            <a:ext cx="146304" cy="146304"/>
+          </a:xfrm>
+          <a:prstGeom prst="ellipse">
+            <a:avLst/>
+          </a:prstGeom>
+          <a:solidFill>
+            <a:srgbClr val="DB9A2E"/>
+          </a:solidFill>
+          <a:ln/>
+        </p:spPr>
+      </p:sp>
+      <p:sp>
+        <p:nvSpPr>
+          <p:cNvPr id="11" name="Text 8"/>
+          <p:cNvSpPr/>
+          <p:nvPr/>
+        </p:nvSpPr>
+        <p:spPr>
+          <a:xfrm>
+            <a:off x="6309360" y="3483864"/>
+            <a:ext cx="2468880" cy="548640"/>
+          </a:xfrm>
+          <a:prstGeom prst="rect">
+            <a:avLst/>
+          </a:prstGeom>
+          <a:noFill/>
+          <a:ln/>
+        </p:spPr>
+        <p:txBody>
+          <a:bodyPr wrap="square" lIns="0" tIns="0" rIns="0" bIns="0" rtlCol="0" anchor="ctr"/>
+          <a:lstStyle/>
+          <a:p>
+            <a:pPr indent="0" marL="0">
+              <a:lnSpc>
+                <a:spcPct val="105000"/>
+              </a:lnSpc>
+              <a:buNone/>
+            </a:pPr>
+            <a:r>
+              <a:rPr lang="en-US" sz="1100" b="1" dirty="0">
+                <a:solidFill>
+                  <a:srgbClr val="DB9A2E"/>
+                </a:solidFill>
+                <a:latin typeface="Calibri" pitchFamily="34" charset="0"/>
+                <a:ea typeface="Calibri" pitchFamily="34" charset="-122"/>
+                <a:cs typeface="Calibri" pitchFamily="34" charset="-120"/>
+              </a:rPr>
+              <a:t>Busy, less violent  </a:t>
+            </a:r>
+            <a:pPr indent="0" marL="0">
+              <a:lnSpc>
+                <a:spcPct val="105000"/>
+              </a:lnSpc>
+              <a:buNone/>
+            </a:pPr>
+            <a:r>
+              <a:rPr lang="en-US" sz="1100" dirty="0">
+                <a:solidFill>
+                  <a:srgbClr val="6B7585"/>
+                </a:solidFill>
+                <a:latin typeface="Calibri" pitchFamily="34" charset="0"/>
+                <a:ea typeface="Calibri" pitchFamily="34" charset="-122"/>
+                <a:cs typeface="Calibri" pitchFamily="34" charset="-120"/>
+              </a:rPr>
+              <a:t>High volume, lower violent share - the Loop (1).</a:t>
+            </a:r>
+            <a:endParaRPr lang="en-US" sz="1100" dirty="0"/>
+          </a:p>
+        </p:txBody>
+      </p:sp>
+      <p:sp>
+        <p:nvSpPr>
+          <p:cNvPr id="12" name="Shape 9"/>
+          <p:cNvSpPr/>
+          <p:nvPr/>
+        </p:nvSpPr>
+        <p:spPr>
+          <a:xfrm>
+            <a:off x="6080760" y="4123944"/>
+            <a:ext cx="146304" cy="146304"/>
+          </a:xfrm>
+          <a:prstGeom prst="ellipse">
+            <a:avLst/>
+          </a:prstGeom>
+          <a:solidFill>
+            <a:srgbClr val="8A2E2E"/>
+          </a:solidFill>
+          <a:ln/>
+        </p:spPr>
+      </p:sp>
+      <p:sp>
+        <p:nvSpPr>
+          <p:cNvPr id="13" name="Text 10"/>
+          <p:cNvSpPr/>
+          <p:nvPr/>
+        </p:nvSpPr>
+        <p:spPr>
+          <a:xfrm>
+            <a:off x="6309360" y="4050792"/>
+            <a:ext cx="2468880" cy="548640"/>
+          </a:xfrm>
+          <a:prstGeom prst="rect">
+            <a:avLst/>
+          </a:prstGeom>
+          <a:noFill/>
+          <a:ln/>
+        </p:spPr>
+        <p:txBody>
+          <a:bodyPr wrap="square" lIns="0" tIns="0" rIns="0" bIns="0" rtlCol="0" anchor="ctr"/>
+          <a:lstStyle/>
+          <a:p>
+            <a:pPr indent="0" marL="0">
+              <a:lnSpc>
+                <a:spcPct val="105000"/>
+              </a:lnSpc>
+              <a:buNone/>
+            </a:pPr>
+            <a:r>
+              <a:rPr lang="en-US" sz="1100" b="1" dirty="0">
+                <a:solidFill>
+                  <a:srgbClr val="8A2E2E"/>
+                </a:solidFill>
+                <a:latin typeface="Calibri" pitchFamily="34" charset="0"/>
+                <a:ea typeface="Calibri" pitchFamily="34" charset="-122"/>
+                <a:cs typeface="Calibri" pitchFamily="34" charset="-120"/>
+              </a:rPr>
+              <a:t>Highest risk  </a:t>
+            </a:r>
+            <a:pPr indent="0" marL="0">
+              <a:lnSpc>
+                <a:spcPct val="105000"/>
+              </a:lnSpc>
+              <a:buNone/>
+            </a:pPr>
+            <a:r>
+              <a:rPr lang="en-US" sz="1100" dirty="0">
+                <a:solidFill>
+                  <a:srgbClr val="6B7585"/>
+                </a:solidFill>
+                <a:latin typeface="Calibri" pitchFamily="34" charset="0"/>
+                <a:ea typeface="Calibri" pitchFamily="34" charset="-122"/>
+                <a:cs typeface="Calibri" pitchFamily="34" charset="-120"/>
+              </a:rPr>
+              <a:t>High on both - avoid for relocation.</a:t>
+            </a:r>
+            <a:endParaRPr lang="en-US" sz="1100" dirty="0"/>
+          </a:p>
+        </p:txBody>
+      </p:sp>
+      <p:sp>
+        <p:nvSpPr>
+          <p:cNvPr id="14" name="Text 11"/>
+          <p:cNvSpPr/>
+          <p:nvPr/>
+        </p:nvSpPr>
+        <p:spPr>
+          <a:xfrm>
+            <a:off x="411480" y="4864608"/>
+            <a:ext cx="5486400" cy="274320"/>
+          </a:xfrm>
+          <a:prstGeom prst="rect">
+            <a:avLst/>
+          </a:prstGeom>
+          <a:noFill/>
+          <a:ln/>
+        </p:spPr>
+        <p:txBody>
+          <a:bodyPr wrap="square" lIns="0" tIns="0" rIns="0" bIns="0" rtlCol="0" anchor="ctr"/>
+          <a:lstStyle/>
+          <a:p>
+            <a:pPr indent="0" marL="0">
+              <a:buNone/>
+            </a:pPr>
+            <a:r>
+              <a:rPr lang="en-US" sz="1000" i="1" dirty="0">
+                <a:solidFill>
+                  <a:srgbClr val="6B7585"/>
+                </a:solidFill>
+                <a:latin typeface="Calibri" pitchFamily="34" charset="0"/>
+                <a:ea typeface="Calibri" pitchFamily="34" charset="-122"/>
+                <a:cs typeface="Calibri" pitchFamily="34" charset="-120"/>
+              </a:rPr>
+              <a:t>Interactive version (hover any district) on the live dashboard.</a:t>
+            </a:r>
+            <a:endParaRPr lang="en-US" sz="1000" dirty="0"/>
           </a:p>
         </p:txBody>
       </p:sp>
@@ -12626,7 +12961,6 @@
         <a:solidFill>
           <a:srgbClr val="FFFFFF"/>
         </a:solidFill>
-        <a:effectLst/>
       </p:bgPr>
     </p:bg>
     <p:spTree>
@@ -12664,11 +12998,11 @@
           <a:bodyPr wrap="square" lIns="0" tIns="0" rIns="0" bIns="0" rtlCol="0" anchor="ctr"/>
           <a:lstStyle/>
           <a:p>
-            <a:pPr marL="0" indent="0">
-              <a:buNone/>
-            </a:pPr>
-            <a:r>
-              <a:rPr lang="en-US" sz="1200" b="1" kern="0" spc="200" dirty="0">
+            <a:pPr indent="0" marL="0">
+              <a:buNone/>
+            </a:pPr>
+            <a:r>
+              <a:rPr lang="en-US" sz="1200" b="1" spc="200" kern="0" dirty="0">
                 <a:solidFill>
                   <a:srgbClr val="1F9D6B"/>
                 </a:solidFill>
@@ -12676,7 +13010,7 @@
                 <a:ea typeface="Calibri" pitchFamily="34" charset="-122"/>
                 <a:cs typeface="Calibri" pitchFamily="34" charset="-120"/>
               </a:rPr>
-              <a:t>08  ·  FINDING 4</a:t>
+              <a:t>07  ·  FINDING 3</a:t>
             </a:r>
             <a:endParaRPr lang="en-US" sz="1200" dirty="0"/>
           </a:p>
@@ -12703,7 +13037,7 @@
           <a:bodyPr wrap="square" lIns="0" tIns="0" rIns="0" bIns="0" rtlCol="0" anchor="ctr"/>
           <a:lstStyle/>
           <a:p>
-            <a:pPr marL="0" indent="0">
+            <a:pPr indent="0" marL="0">
               <a:buNone/>
             </a:pPr>
             <a:r>
@@ -12715,7 +13049,7 @@
                 <a:ea typeface="Cambria" pitchFamily="34" charset="-122"/>
                 <a:cs typeface="Cambria" pitchFamily="34" charset="-120"/>
               </a:rPr>
-              <a:t>Time of day matters more than day of week</a:t>
+              <a:t>Living closer to the office isn't safer</a:t>
             </a:r>
             <a:endParaRPr lang="en-US" sz="3000" dirty="0"/>
           </a:p>
@@ -12723,17 +13057,17 @@
       </p:sp>
       <p:graphicFrame>
         <p:nvGraphicFramePr>
-          <p:cNvPr id="4" name="Chart 0"/>
+          <p:cNvPr id="4" name="Chart 0" descr=""/>
           <p:cNvGraphicFramePr/>
           <p:nvPr/>
         </p:nvGraphicFramePr>
         <p:xfrm>
-          <a:off x="457200" y="1508760"/>
-          <a:ext cx="5669280" cy="3200400"/>
+          <a:off x="457200" y="1554480"/>
+          <a:ext cx="4846320" cy="3108960"/>
         </p:xfrm>
-        <a:graphic>
+        <a:graphic xmlns:a="http://schemas.openxmlformats.org/drawingml/2006/main">
           <a:graphicData uri="http://schemas.openxmlformats.org/drawingml/2006/chart">
-            <c:chart xmlns:c="http://schemas.openxmlformats.org/drawingml/2006/chart" xmlns:r="http://schemas.openxmlformats.org/officeDocument/2006/relationships" r:id="rId3"/>
+            <c:chart xmlns:c="http://schemas.openxmlformats.org/drawingml/2006/chart" r:id="rId1"/>
           </a:graphicData>
         </a:graphic>
       </p:graphicFrame>
@@ -12745,38 +13079,26 @@
         </p:nvSpPr>
         <p:spPr>
           <a:xfrm>
-            <a:off x="6355080" y="1554480"/>
-            <a:ext cx="2331720" cy="1417320"/>
+            <a:off x="5532120" y="1783080"/>
+            <a:ext cx="3108960" cy="2377440"/>
           </a:xfrm>
           <a:prstGeom prst="roundRect">
             <a:avLst>
-              <a:gd name="adj" fmla="val 5161"/>
+              <a:gd name="adj" fmla="val 3846"/>
             </a:avLst>
           </a:prstGeom>
           <a:solidFill>
-            <a:srgbClr val="EDF6F1"/>
+            <a:srgbClr val="14233A"/>
           </a:solidFill>
-          <a:ln w="12700">
-            <a:solidFill>
-              <a:srgbClr val="CDE9DC"/>
-            </a:solidFill>
-            <a:prstDash val="solid"/>
-          </a:ln>
+          <a:ln/>
           <a:effectLst>
-            <a:outerShdw blurRad="88900" dist="38100" dir="5400000" algn="bl" rotWithShape="0">
+            <a:outerShdw sx="100000" sy="100000" kx="0" ky="0" algn="bl" rotWithShape="0" blurRad="88900" dist="38100" dir="5400000">
               <a:srgbClr val="8794A8">
                 <a:alpha val="22000"/>
               </a:srgbClr>
             </a:outerShdw>
           </a:effectLst>
         </p:spPr>
-        <p:txBody>
-          <a:bodyPr/>
-          <a:lstStyle/>
-          <a:p>
-            <a:endParaRPr lang="en-US"/>
-          </a:p>
-        </p:txBody>
       </p:sp>
       <p:sp>
         <p:nvSpPr>
@@ -12786,73 +13108,76 @@
         </p:nvSpPr>
         <p:spPr>
           <a:xfrm>
-            <a:off x="6537960" y="1719072"/>
-            <a:ext cx="2011680" cy="274320"/>
-          </a:xfrm>
-          <a:prstGeom prst="rect">
-            <a:avLst/>
-          </a:prstGeom>
-          <a:noFill/>
-          <a:ln/>
-        </p:spPr>
-        <p:txBody>
-          <a:bodyPr wrap="square" lIns="0" tIns="0" rIns="0" bIns="0" rtlCol="0" anchor="ctr"/>
-          <a:lstStyle/>
-          <a:p>
-            <a:pPr marL="0" indent="0">
-              <a:buNone/>
-            </a:pPr>
-            <a:r>
-              <a:rPr lang="en-US" sz="1050" b="1" kern="0" spc="100" dirty="0">
-                <a:solidFill>
-                  <a:srgbClr val="1F9D6B"/>
+            <a:off x="5715000" y="1965960"/>
+            <a:ext cx="2743200" cy="868680"/>
+          </a:xfrm>
+          <a:prstGeom prst="rect">
+            <a:avLst/>
+          </a:prstGeom>
+          <a:noFill/>
+          <a:ln/>
+        </p:spPr>
+        <p:txBody>
+          <a:bodyPr wrap="square" lIns="0" tIns="0" rIns="0" bIns="0" rtlCol="0" anchor="ctr"/>
+          <a:lstStyle/>
+          <a:p>
+            <a:pPr indent="0" marL="0">
+              <a:buNone/>
+            </a:pPr>
+            <a:r>
+              <a:rPr lang="en-US" sz="6000" b="1" dirty="0">
+                <a:solidFill>
+                  <a:srgbClr val="6FE3B6"/>
+                </a:solidFill>
+                <a:latin typeface="Cambria" pitchFamily="34" charset="0"/>
+                <a:ea typeface="Cambria" pitchFamily="34" charset="-122"/>
+                <a:cs typeface="Cambria" pitchFamily="34" charset="-120"/>
+              </a:rPr>
+              <a:t>2.3×</a:t>
+            </a:r>
+            <a:endParaRPr lang="en-US" sz="6000" dirty="0"/>
+          </a:p>
+        </p:txBody>
+      </p:sp>
+      <p:sp>
+        <p:nvSpPr>
+          <p:cNvPr id="7" name="Text 4"/>
+          <p:cNvSpPr/>
+          <p:nvPr/>
+        </p:nvSpPr>
+        <p:spPr>
+          <a:xfrm>
+            <a:off x="5760720" y="2880360"/>
+            <a:ext cx="2697480" cy="640080"/>
+          </a:xfrm>
+          <a:prstGeom prst="rect">
+            <a:avLst/>
+          </a:prstGeom>
+          <a:noFill/>
+          <a:ln/>
+        </p:spPr>
+        <p:txBody>
+          <a:bodyPr wrap="square" lIns="0" tIns="0" rIns="0" bIns="0" rtlCol="0" anchor="ctr"/>
+          <a:lstStyle/>
+          <a:p>
+            <a:pPr indent="0" marL="0">
+              <a:lnSpc>
+                <a:spcPct val="110000"/>
+              </a:lnSpc>
+              <a:buNone/>
+            </a:pPr>
+            <a:r>
+              <a:rPr lang="en-US" sz="1450" dirty="0">
+                <a:solidFill>
+                  <a:srgbClr val="FFFFFF"/>
                 </a:solidFill>
                 <a:latin typeface="Calibri" pitchFamily="34" charset="0"/>
                 <a:ea typeface="Calibri" pitchFamily="34" charset="-122"/>
                 <a:cs typeface="Calibri" pitchFamily="34" charset="-120"/>
               </a:rPr>
-              <a:t>SAFEST WINDOW</a:t>
-            </a:r>
-            <a:endParaRPr lang="en-US" sz="1050" dirty="0"/>
-          </a:p>
-        </p:txBody>
-      </p:sp>
-      <p:sp>
-        <p:nvSpPr>
-          <p:cNvPr id="7" name="Text 4"/>
-          <p:cNvSpPr/>
-          <p:nvPr/>
-        </p:nvSpPr>
-        <p:spPr>
-          <a:xfrm>
-            <a:off x="6537960" y="1965960"/>
-            <a:ext cx="2011680" cy="548640"/>
-          </a:xfrm>
-          <a:prstGeom prst="rect">
-            <a:avLst/>
-          </a:prstGeom>
-          <a:noFill/>
-          <a:ln/>
-        </p:spPr>
-        <p:txBody>
-          <a:bodyPr wrap="square" lIns="0" tIns="0" rIns="0" bIns="0" rtlCol="0" anchor="ctr"/>
-          <a:lstStyle/>
-          <a:p>
-            <a:pPr marL="0" indent="0">
-              <a:buNone/>
-            </a:pPr>
-            <a:r>
-              <a:rPr lang="en-US" sz="3000" b="1" dirty="0">
-                <a:solidFill>
-                  <a:srgbClr val="1F9D6B"/>
-                </a:solidFill>
-                <a:latin typeface="Cambria" pitchFamily="34" charset="0"/>
-                <a:ea typeface="Cambria" pitchFamily="34" charset="-122"/>
-                <a:cs typeface="Cambria" pitchFamily="34" charset="-120"/>
-              </a:rPr>
-              <a:t>2-7 AM</a:t>
-            </a:r>
-            <a:endParaRPr lang="en-US" sz="3000" dirty="0"/>
+              <a:t>more violent crime in the Loop than in Edgewater</a:t>
+            </a:r>
+            <a:endParaRPr lang="en-US" sz="1450" dirty="0"/>
           </a:p>
         </p:txBody>
       </p:sp>
@@ -12864,107 +13189,63 @@
         </p:nvSpPr>
         <p:spPr>
           <a:xfrm>
-            <a:off x="6537960" y="2487168"/>
-            <a:ext cx="2057400" cy="457200"/>
-          </a:xfrm>
-          <a:prstGeom prst="rect">
-            <a:avLst/>
-          </a:prstGeom>
-          <a:noFill/>
-          <a:ln/>
-        </p:spPr>
-        <p:txBody>
-          <a:bodyPr wrap="square" lIns="0" tIns="0" rIns="0" bIns="0" rtlCol="0" anchor="ctr"/>
-          <a:lstStyle/>
-          <a:p>
-            <a:pPr marL="0" indent="0">
-              <a:lnSpc>
-                <a:spcPct val="105000"/>
-              </a:lnSpc>
-              <a:buNone/>
-            </a:pPr>
-            <a:r>
-              <a:rPr lang="en-US" sz="1100" dirty="0">
-                <a:solidFill>
-                  <a:srgbClr val="6B7585"/>
+            <a:off x="5760720" y="3611880"/>
+            <a:ext cx="2697480" cy="365760"/>
+          </a:xfrm>
+          <a:prstGeom prst="rect">
+            <a:avLst/>
+          </a:prstGeom>
+          <a:noFill/>
+          <a:ln/>
+        </p:spPr>
+        <p:txBody>
+          <a:bodyPr wrap="square" lIns="0" tIns="0" rIns="0" bIns="0" rtlCol="0" anchor="ctr"/>
+          <a:lstStyle/>
+          <a:p>
+            <a:pPr indent="0" marL="0">
+              <a:buNone/>
+            </a:pPr>
+            <a:r>
+              <a:rPr lang="en-US" sz="1150" i="1" dirty="0">
+                <a:solidFill>
+                  <a:srgbClr val="DCE6F5"/>
                 </a:solidFill>
                 <a:latin typeface="Calibri" pitchFamily="34" charset="0"/>
                 <a:ea typeface="Calibri" pitchFamily="34" charset="-122"/>
                 <a:cs typeface="Calibri" pitchFamily="34" charset="-120"/>
               </a:rPr>
-              <a:t>Crime bottoms out overnight, peaks midday-evening.</a:t>
-            </a:r>
-            <a:endParaRPr lang="en-US" sz="1100" dirty="0"/>
-          </a:p>
-        </p:txBody>
-      </p:sp>
-      <p:sp>
-        <p:nvSpPr>
-          <p:cNvPr id="9" name="Shape 6"/>
-          <p:cNvSpPr/>
-          <p:nvPr/>
-        </p:nvSpPr>
-        <p:spPr>
-          <a:xfrm>
-            <a:off x="6355080" y="3154680"/>
-            <a:ext cx="2331720" cy="1417320"/>
-          </a:xfrm>
-          <a:prstGeom prst="roundRect">
-            <a:avLst>
-              <a:gd name="adj" fmla="val 5161"/>
-            </a:avLst>
-          </a:prstGeom>
-          <a:solidFill>
-            <a:srgbClr val="F5F7F9"/>
-          </a:solidFill>
-          <a:ln w="12700">
-            <a:solidFill>
-              <a:srgbClr val="E4E8EE"/>
-            </a:solidFill>
-            <a:prstDash val="solid"/>
-          </a:ln>
-          <a:effectLst>
-            <a:outerShdw blurRad="88900" dist="38100" dir="5400000" algn="bl" rotWithShape="0">
-              <a:srgbClr val="8794A8">
-                <a:alpha val="22000"/>
-              </a:srgbClr>
-            </a:outerShdw>
-          </a:effectLst>
-        </p:spPr>
-        <p:txBody>
-          <a:bodyPr/>
-          <a:lstStyle/>
-          <a:p>
-            <a:endParaRPr lang="en-US"/>
-          </a:p>
-        </p:txBody>
-      </p:sp>
-      <p:sp>
-        <p:nvSpPr>
-          <p:cNvPr id="10" name="Text 7"/>
-          <p:cNvSpPr/>
-          <p:nvPr/>
-        </p:nvSpPr>
-        <p:spPr>
-          <a:xfrm>
-            <a:off x="6537960" y="3319272"/>
-            <a:ext cx="2011680" cy="274320"/>
-          </a:xfrm>
-          <a:prstGeom prst="rect">
-            <a:avLst/>
-          </a:prstGeom>
-          <a:noFill/>
-          <a:ln/>
-        </p:spPr>
-        <p:txBody>
-          <a:bodyPr wrap="square" lIns="0" tIns="0" rIns="0" bIns="0" rtlCol="0" anchor="ctr"/>
-          <a:lstStyle/>
-          <a:p>
-            <a:pPr marL="0" indent="0">
-              <a:buNone/>
-            </a:pPr>
-            <a:r>
-              <a:rPr lang="en-US" sz="1050" b="1" kern="0" spc="100" dirty="0">
+              <a:t>~295 vs ~129 violent incidents per month</a:t>
+            </a:r>
+            <a:endParaRPr lang="en-US" sz="1150" dirty="0"/>
+          </a:p>
+        </p:txBody>
+      </p:sp>
+      <p:sp>
+        <p:nvSpPr>
+          <p:cNvPr id="9" name="Text 6"/>
+          <p:cNvSpPr/>
+          <p:nvPr/>
+        </p:nvSpPr>
+        <p:spPr>
+          <a:xfrm>
+            <a:off x="502920" y="4709160"/>
+            <a:ext cx="8229600" cy="274320"/>
+          </a:xfrm>
+          <a:prstGeom prst="rect">
+            <a:avLst/>
+          </a:prstGeom>
+          <a:noFill/>
+          <a:ln/>
+        </p:spPr>
+        <p:txBody>
+          <a:bodyPr wrap="square" lIns="0" tIns="0" rIns="0" bIns="0" rtlCol="0" anchor="ctr"/>
+          <a:lstStyle/>
+          <a:p>
+            <a:pPr indent="0" marL="0">
+              <a:buNone/>
+            </a:pPr>
+            <a:r>
+              <a:rPr lang="en-US" sz="1050" i="1" dirty="0">
                 <a:solidFill>
                   <a:srgbClr val="6B7585"/>
                 </a:solidFill>
@@ -12972,129 +13253,9 @@
                 <a:ea typeface="Calibri" pitchFamily="34" charset="-122"/>
                 <a:cs typeface="Calibri" pitchFamily="34" charset="-120"/>
               </a:rPr>
-              <a:t>DAY OF WEEK</a:t>
+              <a:t>Downtown has more crime, not less - proximity to the office works against safety.</a:t>
             </a:r>
             <a:endParaRPr lang="en-US" sz="1050" dirty="0"/>
-          </a:p>
-        </p:txBody>
-      </p:sp>
-      <p:sp>
-        <p:nvSpPr>
-          <p:cNvPr id="11" name="Text 8"/>
-          <p:cNvSpPr/>
-          <p:nvPr/>
-        </p:nvSpPr>
-        <p:spPr>
-          <a:xfrm>
-            <a:off x="6537960" y="3566160"/>
-            <a:ext cx="2011680" cy="548640"/>
-          </a:xfrm>
-          <a:prstGeom prst="rect">
-            <a:avLst/>
-          </a:prstGeom>
-          <a:noFill/>
-          <a:ln/>
-        </p:spPr>
-        <p:txBody>
-          <a:bodyPr wrap="square" lIns="0" tIns="0" rIns="0" bIns="0" rtlCol="0" anchor="ctr"/>
-          <a:lstStyle/>
-          <a:p>
-            <a:pPr marL="0" indent="0">
-              <a:buNone/>
-            </a:pPr>
-            <a:r>
-              <a:rPr lang="en-US" sz="3000" b="1" dirty="0">
-                <a:solidFill>
-                  <a:srgbClr val="1A2230"/>
-                </a:solidFill>
-                <a:latin typeface="Cambria" pitchFamily="34" charset="0"/>
-                <a:ea typeface="Cambria" pitchFamily="34" charset="-122"/>
-                <a:cs typeface="Cambria" pitchFamily="34" charset="-120"/>
-              </a:rPr>
-              <a:t>≈ Flat</a:t>
-            </a:r>
-            <a:endParaRPr lang="en-US" sz="3000" dirty="0"/>
-          </a:p>
-        </p:txBody>
-      </p:sp>
-      <p:sp>
-        <p:nvSpPr>
-          <p:cNvPr id="12" name="Text 9"/>
-          <p:cNvSpPr/>
-          <p:nvPr/>
-        </p:nvSpPr>
-        <p:spPr>
-          <a:xfrm>
-            <a:off x="6537960" y="4087368"/>
-            <a:ext cx="2057400" cy="457200"/>
-          </a:xfrm>
-          <a:prstGeom prst="rect">
-            <a:avLst/>
-          </a:prstGeom>
-          <a:noFill/>
-          <a:ln/>
-        </p:spPr>
-        <p:txBody>
-          <a:bodyPr wrap="square" lIns="0" tIns="0" rIns="0" bIns="0" rtlCol="0" anchor="ctr"/>
-          <a:lstStyle/>
-          <a:p>
-            <a:pPr marL="0" indent="0">
-              <a:lnSpc>
-                <a:spcPct val="105000"/>
-              </a:lnSpc>
-              <a:buNone/>
-            </a:pPr>
-            <a:r>
-              <a:rPr lang="en-US" sz="1100" dirty="0">
-                <a:solidFill>
-                  <a:srgbClr val="6B7585"/>
-                </a:solidFill>
-                <a:latin typeface="Calibri" pitchFamily="34" charset="0"/>
-                <a:ea typeface="Calibri" pitchFamily="34" charset="-122"/>
-                <a:cs typeface="Calibri" pitchFamily="34" charset="-120"/>
-              </a:rPr>
-              <a:t>~1-point spread - the day you go out barely matters.</a:t>
-            </a:r>
-            <a:endParaRPr lang="en-US" sz="1100" dirty="0"/>
-          </a:p>
-        </p:txBody>
-      </p:sp>
-      <p:sp>
-        <p:nvSpPr>
-          <p:cNvPr id="13" name="Text 10"/>
-          <p:cNvSpPr/>
-          <p:nvPr/>
-        </p:nvSpPr>
-        <p:spPr>
-          <a:xfrm>
-            <a:off x="502920" y="4754880"/>
-            <a:ext cx="5760720" cy="274320"/>
-          </a:xfrm>
-          <a:prstGeom prst="rect">
-            <a:avLst/>
-          </a:prstGeom>
-          <a:noFill/>
-          <a:ln/>
-        </p:spPr>
-        <p:txBody>
-          <a:bodyPr wrap="square" lIns="0" tIns="0" rIns="0" bIns="0" rtlCol="0" anchor="ctr"/>
-          <a:lstStyle/>
-          <a:p>
-            <a:pPr marL="0" indent="0">
-              <a:buNone/>
-            </a:pPr>
-            <a:r>
-              <a:rPr lang="en-US" sz="1000" i="1" dirty="0">
-                <a:solidFill>
-                  <a:srgbClr val="6B7585"/>
-                </a:solidFill>
-                <a:latin typeface="Calibri" pitchFamily="34" charset="0"/>
-                <a:ea typeface="Calibri" pitchFamily="34" charset="-122"/>
-                <a:cs typeface="Calibri" pitchFamily="34" charset="-120"/>
-              </a:rPr>
-              <a:t>Share of all incidents by hour. (The 00:00 bar is inflated by unknown-time reports.)</a:t>
-            </a:r>
-            <a:endParaRPr lang="en-US" sz="1000" dirty="0"/>
           </a:p>
         </p:txBody>
       </p:sp>
@@ -13399,319 +13560,4 @@
     </a:ext>
   </a:extLst>
 </a:theme>
-</file>
-
-<file path=ppt/theme/theme2.xml><?xml version="1.0" encoding="utf-8"?>
-<a:theme xmlns:a="http://schemas.openxmlformats.org/drawingml/2006/main" name="Office Theme">
-  <a:themeElements>
-    <a:clrScheme name="Office">
-      <a:dk1>
-        <a:sysClr val="windowText" lastClr="000000"/>
-      </a:dk1>
-      <a:lt1>
-        <a:sysClr val="window" lastClr="FFFFFF"/>
-      </a:lt1>
-      <a:dk2>
-        <a:srgbClr val="0E2841"/>
-      </a:dk2>
-      <a:lt2>
-        <a:srgbClr val="E8E8E8"/>
-      </a:lt2>
-      <a:accent1>
-        <a:srgbClr val="156082"/>
-      </a:accent1>
-      <a:accent2>
-        <a:srgbClr val="E97132"/>
-      </a:accent2>
-      <a:accent3>
-        <a:srgbClr val="196B24"/>
-      </a:accent3>
-      <a:accent4>
-        <a:srgbClr val="0F9ED5"/>
-      </a:accent4>
-      <a:accent5>
-        <a:srgbClr val="A02B93"/>
-      </a:accent5>
-      <a:accent6>
-        <a:srgbClr val="4EA72E"/>
-      </a:accent6>
-      <a:hlink>
-        <a:srgbClr val="467886"/>
-      </a:hlink>
-      <a:folHlink>
-        <a:srgbClr val="96607D"/>
-      </a:folHlink>
-    </a:clrScheme>
-    <a:fontScheme name="Office">
-      <a:majorFont>
-        <a:latin typeface="Aptos Display" panose="02110004020202020204"/>
-        <a:ea typeface=""/>
-        <a:cs typeface=""/>
-        <a:font script="Jpan" typeface="游ゴシック Light"/>
-        <a:font script="Hang" typeface="맑은 고딕"/>
-        <a:font script="Hans" typeface="等线 Light"/>
-        <a:font script="Hant" typeface="新細明體"/>
-        <a:font script="Arab" typeface="Times New Roman"/>
-        <a:font script="Hebr" typeface="Times New Roman"/>
-        <a:font script="Thai" typeface="Angsana New"/>
-        <a:font script="Ethi" typeface="Nyala"/>
-        <a:font script="Beng" typeface="Vrinda"/>
-        <a:font script="Gujr" typeface="Shruti"/>
-        <a:font script="Khmr" typeface="MoolBoran"/>
-        <a:font script="Knda" typeface="Tunga"/>
-        <a:font script="Guru" typeface="Raavi"/>
-        <a:font script="Cans" typeface="Euphemia"/>
-        <a:font script="Cher" typeface="Plantagenet Cherokee"/>
-        <a:font script="Yiii" typeface="Microsoft Yi Baiti"/>
-        <a:font script="Tibt" typeface="Microsoft Himalaya"/>
-        <a:font script="Thaa" typeface="MV Boli"/>
-        <a:font script="Deva" typeface="Mangal"/>
-        <a:font script="Telu" typeface="Gautami"/>
-        <a:font script="Taml" typeface="Latha"/>
-        <a:font script="Syrc" typeface="Estrangelo Edessa"/>
-        <a:font script="Orya" typeface="Kalinga"/>
-        <a:font script="Mlym" typeface="Kartika"/>
-        <a:font script="Laoo" typeface="DokChampa"/>
-        <a:font script="Sinh" typeface="Iskoola Pota"/>
-        <a:font script="Mong" typeface="Mongolian Baiti"/>
-        <a:font script="Viet" typeface="Times New Roman"/>
-        <a:font script="Uigh" typeface="Microsoft Uighur"/>
-        <a:font script="Geor" typeface="Sylfaen"/>
-        <a:font script="Armn" typeface="Arial"/>
-        <a:font script="Bugi" typeface="Leelawadee UI"/>
-        <a:font script="Bopo" typeface="Microsoft JhengHei"/>
-        <a:font script="Java" typeface="Javanese Text"/>
-        <a:font script="Lisu" typeface="Segoe UI"/>
-        <a:font script="Mymr" typeface="Myanmar Text"/>
-        <a:font script="Nkoo" typeface="Ebrima"/>
-        <a:font script="Olck" typeface="Nirmala UI"/>
-        <a:font script="Osma" typeface="Ebrima"/>
-        <a:font script="Phag" typeface="Phagspa"/>
-        <a:font script="Syrn" typeface="Estrangelo Edessa"/>
-        <a:font script="Syrj" typeface="Estrangelo Edessa"/>
-        <a:font script="Syre" typeface="Estrangelo Edessa"/>
-        <a:font script="Sora" typeface="Nirmala UI"/>
-        <a:font script="Tale" typeface="Microsoft Tai Le"/>
-        <a:font script="Talu" typeface="Microsoft New Tai Lue"/>
-        <a:font script="Tfng" typeface="Ebrima"/>
-      </a:majorFont>
-      <a:minorFont>
-        <a:latin typeface="Aptos" panose="02110004020202020204"/>
-        <a:ea typeface=""/>
-        <a:cs typeface=""/>
-        <a:font script="Jpan" typeface="游ゴシック"/>
-        <a:font script="Hang" typeface="맑은 고딕"/>
-        <a:font script="Hans" typeface="等线"/>
-        <a:font script="Hant" typeface="新細明體"/>
-        <a:font script="Arab" typeface="Arial"/>
-        <a:font script="Hebr" typeface="Arial"/>
-        <a:font script="Thai" typeface="Cordia New"/>
-        <a:font script="Ethi" typeface="Nyala"/>
-        <a:font script="Beng" typeface="Vrinda"/>
-        <a:font script="Gujr" typeface="Shruti"/>
-        <a:font script="Khmr" typeface="DaunPenh"/>
-        <a:font script="Knda" typeface="Tunga"/>
-        <a:font script="Guru" typeface="Raavi"/>
-        <a:font script="Cans" typeface="Euphemia"/>
-        <a:font script="Cher" typeface="Plantagenet Cherokee"/>
-        <a:font script="Yiii" typeface="Microsoft Yi Baiti"/>
-        <a:font script="Tibt" typeface="Microsoft Himalaya"/>
-        <a:font script="Thaa" typeface="MV Boli"/>
-        <a:font script="Deva" typeface="Mangal"/>
-        <a:font script="Telu" typeface="Gautami"/>
-        <a:font script="Taml" typeface="Latha"/>
-        <a:font script="Syrc" typeface="Estrangelo Edessa"/>
-        <a:font script="Orya" typeface="Kalinga"/>
-        <a:font script="Mlym" typeface="Kartika"/>
-        <a:font script="Laoo" typeface="DokChampa"/>
-        <a:font script="Sinh" typeface="Iskoola Pota"/>
-        <a:font script="Mong" typeface="Mongolian Baiti"/>
-        <a:font script="Viet" typeface="Arial"/>
-        <a:font script="Uigh" typeface="Microsoft Uighur"/>
-        <a:font script="Geor" typeface="Sylfaen"/>
-        <a:font script="Armn" typeface="Arial"/>
-        <a:font script="Bugi" typeface="Leelawadee UI"/>
-        <a:font script="Bopo" typeface="Microsoft JhengHei"/>
-        <a:font script="Java" typeface="Javanese Text"/>
-        <a:font script="Lisu" typeface="Segoe UI"/>
-        <a:font script="Mymr" typeface="Myanmar Text"/>
-        <a:font script="Nkoo" typeface="Ebrima"/>
-        <a:font script="Olck" typeface="Nirmala UI"/>
-        <a:font script="Osma" typeface="Ebrima"/>
-        <a:font script="Phag" typeface="Phagspa"/>
-        <a:font script="Syrn" typeface="Estrangelo Edessa"/>
-        <a:font script="Syrj" typeface="Estrangelo Edessa"/>
-        <a:font script="Syre" typeface="Estrangelo Edessa"/>
-        <a:font script="Sora" typeface="Nirmala UI"/>
-        <a:font script="Tale" typeface="Microsoft Tai Le"/>
-        <a:font script="Talu" typeface="Microsoft New Tai Lue"/>
-        <a:font script="Tfng" typeface="Ebrima"/>
-      </a:minorFont>
-    </a:fontScheme>
-    <a:fmtScheme name="Office">
-      <a:fillStyleLst>
-        <a:solidFill>
-          <a:schemeClr val="phClr"/>
-        </a:solidFill>
-        <a:gradFill rotWithShape="1">
-          <a:gsLst>
-            <a:gs pos="0">
-              <a:schemeClr val="phClr">
-                <a:lumMod val="110000"/>
-                <a:satMod val="105000"/>
-                <a:tint val="67000"/>
-              </a:schemeClr>
-            </a:gs>
-            <a:gs pos="50000">
-              <a:schemeClr val="phClr">
-                <a:lumMod val="105000"/>
-                <a:satMod val="103000"/>
-                <a:tint val="73000"/>
-              </a:schemeClr>
-            </a:gs>
-            <a:gs pos="100000">
-              <a:schemeClr val="phClr">
-                <a:lumMod val="105000"/>
-                <a:satMod val="109000"/>
-                <a:tint val="81000"/>
-              </a:schemeClr>
-            </a:gs>
-          </a:gsLst>
-          <a:lin ang="5400000" scaled="0"/>
-        </a:gradFill>
-        <a:gradFill rotWithShape="1">
-          <a:gsLst>
-            <a:gs pos="0">
-              <a:schemeClr val="phClr">
-                <a:satMod val="103000"/>
-                <a:lumMod val="102000"/>
-                <a:tint val="94000"/>
-              </a:schemeClr>
-            </a:gs>
-            <a:gs pos="50000">
-              <a:schemeClr val="phClr">
-                <a:satMod val="110000"/>
-                <a:lumMod val="100000"/>
-                <a:shade val="100000"/>
-              </a:schemeClr>
-            </a:gs>
-            <a:gs pos="100000">
-              <a:schemeClr val="phClr">
-                <a:lumMod val="99000"/>
-                <a:satMod val="120000"/>
-                <a:shade val="78000"/>
-              </a:schemeClr>
-            </a:gs>
-          </a:gsLst>
-          <a:lin ang="5400000" scaled="0"/>
-        </a:gradFill>
-      </a:fillStyleLst>
-      <a:lnStyleLst>
-        <a:ln w="12700" cap="flat" cmpd="sng" algn="ctr">
-          <a:solidFill>
-            <a:schemeClr val="phClr"/>
-          </a:solidFill>
-          <a:prstDash val="solid"/>
-          <a:miter lim="800000"/>
-        </a:ln>
-        <a:ln w="19050" cap="flat" cmpd="sng" algn="ctr">
-          <a:solidFill>
-            <a:schemeClr val="phClr"/>
-          </a:solidFill>
-          <a:prstDash val="solid"/>
-          <a:miter lim="800000"/>
-        </a:ln>
-        <a:ln w="25400" cap="flat" cmpd="sng" algn="ctr">
-          <a:solidFill>
-            <a:schemeClr val="phClr"/>
-          </a:solidFill>
-          <a:prstDash val="solid"/>
-          <a:miter lim="800000"/>
-        </a:ln>
-      </a:lnStyleLst>
-      <a:effectStyleLst>
-        <a:effectStyle>
-          <a:effectLst/>
-        </a:effectStyle>
-        <a:effectStyle>
-          <a:effectLst/>
-        </a:effectStyle>
-        <a:effectStyle>
-          <a:effectLst>
-            <a:outerShdw blurRad="57150" dist="19050" dir="5400000" algn="ctr" rotWithShape="0">
-              <a:srgbClr val="000000">
-                <a:alpha val="63000"/>
-              </a:srgbClr>
-            </a:outerShdw>
-          </a:effectLst>
-        </a:effectStyle>
-      </a:effectStyleLst>
-      <a:bgFillStyleLst>
-        <a:solidFill>
-          <a:schemeClr val="phClr"/>
-        </a:solidFill>
-        <a:solidFill>
-          <a:schemeClr val="phClr">
-            <a:tint val="95000"/>
-            <a:satMod val="170000"/>
-          </a:schemeClr>
-        </a:solidFill>
-        <a:gradFill rotWithShape="1">
-          <a:gsLst>
-            <a:gs pos="0">
-              <a:schemeClr val="phClr">
-                <a:tint val="93000"/>
-                <a:satMod val="150000"/>
-                <a:shade val="98000"/>
-                <a:lumMod val="102000"/>
-              </a:schemeClr>
-            </a:gs>
-            <a:gs pos="50000">
-              <a:schemeClr val="phClr">
-                <a:tint val="98000"/>
-                <a:satMod val="130000"/>
-                <a:shade val="90000"/>
-                <a:lumMod val="103000"/>
-              </a:schemeClr>
-            </a:gs>
-            <a:gs pos="100000">
-              <a:schemeClr val="phClr">
-                <a:shade val="63000"/>
-                <a:satMod val="120000"/>
-              </a:schemeClr>
-            </a:gs>
-          </a:gsLst>
-          <a:lin ang="5400000" scaled="0"/>
-        </a:gradFill>
-      </a:bgFillStyleLst>
-    </a:fmtScheme>
-  </a:themeElements>
-  <a:objectDefaults>
-    <a:lnDef>
-      <a:spPr/>
-      <a:bodyPr/>
-      <a:lstStyle/>
-      <a:style>
-        <a:lnRef idx="2">
-          <a:schemeClr val="accent1"/>
-        </a:lnRef>
-        <a:fillRef idx="0">
-          <a:schemeClr val="accent1"/>
-        </a:fillRef>
-        <a:effectRef idx="1">
-          <a:schemeClr val="accent1"/>
-        </a:effectRef>
-        <a:fontRef idx="minor">
-          <a:schemeClr val="tx1"/>
-        </a:fontRef>
-      </a:style>
-    </a:lnDef>
-  </a:objectDefaults>
-  <a:extraClrSchemeLst/>
-  <a:extLst>
-    <a:ext uri="{05A4C25C-085E-4340-85A3-A5531E510DB2}">
-      <thm15:themeFamily xmlns:thm15="http://schemas.microsoft.com/office/thememl/2012/main" name="Office Theme" id="{2E142A2C-CD16-42D6-873A-C26D2A0506FA}" vid="{1BDDFF52-6CD6-40A5-AB3C-68EB2F1E4D0A}"/>
-    </a:ext>
-  </a:extLst>
-</a:theme>
 </file>